--- a/PFE_PROJECT/ForsaDrive_Defense.pptx
+++ b/PFE_PROJECT/ForsaDrive_Defense.pptx
@@ -26,6 +26,15 @@
     <p:sldId id="274" r:id="rId25"/>
     <p:sldId id="275" r:id="rId26"/>
     <p:sldId id="276" r:id="rId27"/>
+    <p:sldId id="277" r:id="rId28"/>
+    <p:sldId id="278" r:id="rId29"/>
+    <p:sldId id="279" r:id="rId30"/>
+    <p:sldId id="280" r:id="rId31"/>
+    <p:sldId id="281" r:id="rId32"/>
+    <p:sldId id="282" r:id="rId33"/>
+    <p:sldId id="283" r:id="rId34"/>
+    <p:sldId id="284" r:id="rId35"/>
+    <p:sldId id="285" r:id="rId36"/>
   </p:sldIdLst>
   <p:sldSz cx="12191695" cy="6858000" type="screen4x3"/>
   <p:notesSz cx="6858000" cy="9144000"/>
@@ -17974,6 +17983,5471 @@
 </p:sld>
 </file>
 
+<file path=ppt/slides/slide22.xml><?xml version="1.0" encoding="utf-8"?>
+<p:sld xmlns:a="http://schemas.openxmlformats.org/drawingml/2006/main" xmlns:p="http://schemas.openxmlformats.org/presentationml/2006/main" xmlns:r="http://schemas.openxmlformats.org/officeDocument/2006/relationships">
+  <p:cSld>
+    <p:spTree>
+      <p:nvGrpSpPr>
+        <p:cNvPr id="1" name=""/>
+        <p:cNvGrpSpPr/>
+        <p:nvPr/>
+      </p:nvGrpSpPr>
+      <p:grpSpPr/>
+      <p:sp>
+        <p:nvSpPr>
+          <p:cNvPr id="2" name="Rectangle 1"/>
+          <p:cNvSpPr/>
+          <p:nvPr/>
+        </p:nvSpPr>
+        <p:spPr>
+          <a:xfrm>
+            <a:off x="0" y="0"/>
+            <a:ext cx="12191695" cy="6858000"/>
+          </a:xfrm>
+          <a:prstGeom prst="rect">
+            <a:avLst/>
+          </a:prstGeom>
+          <a:solidFill>
+            <a:srgbClr val="0A1628"/>
+          </a:solidFill>
+          <a:ln>
+            <a:noFill/>
+          </a:ln>
+          <a:effectLst/>
+        </p:spPr>
+        <p:style>
+          <a:lnRef idx="1">
+            <a:schemeClr val="accent1"/>
+          </a:lnRef>
+          <a:fillRef idx="3">
+            <a:schemeClr val="accent1"/>
+          </a:fillRef>
+          <a:effectRef idx="2">
+            <a:schemeClr val="accent1"/>
+          </a:effectRef>
+          <a:fontRef idx="minor">
+            <a:schemeClr val="lt1"/>
+          </a:fontRef>
+        </p:style>
+        <p:txBody>
+          <a:bodyPr rtlCol="0" anchor="ctr"/>
+          <a:lstStyle/>
+          <a:p>
+            <a:pPr algn="ctr"/>
+          </a:p>
+        </p:txBody>
+      </p:sp>
+      <p:sp>
+        <p:nvSpPr>
+          <p:cNvPr id="3" name="Rectangle 2"/>
+          <p:cNvSpPr/>
+          <p:nvPr/>
+        </p:nvSpPr>
+        <p:spPr>
+          <a:xfrm>
+            <a:off x="0" y="2743200"/>
+            <a:ext cx="320040" cy="1371600"/>
+          </a:xfrm>
+          <a:prstGeom prst="rect">
+            <a:avLst/>
+          </a:prstGeom>
+          <a:solidFill>
+            <a:srgbClr val="E8B84B"/>
+          </a:solidFill>
+          <a:ln>
+            <a:noFill/>
+          </a:ln>
+          <a:effectLst/>
+        </p:spPr>
+        <p:style>
+          <a:lnRef idx="1">
+            <a:schemeClr val="accent1"/>
+          </a:lnRef>
+          <a:fillRef idx="3">
+            <a:schemeClr val="accent1"/>
+          </a:fillRef>
+          <a:effectRef idx="2">
+            <a:schemeClr val="accent1"/>
+          </a:effectRef>
+          <a:fontRef idx="minor">
+            <a:schemeClr val="lt1"/>
+          </a:fontRef>
+        </p:style>
+        <p:txBody>
+          <a:bodyPr rtlCol="0" anchor="ctr"/>
+          <a:lstStyle/>
+          <a:p>
+            <a:pPr algn="ctr"/>
+          </a:p>
+        </p:txBody>
+      </p:sp>
+      <p:sp>
+        <p:nvSpPr>
+          <p:cNvPr id="4" name="TextBox 3"/>
+          <p:cNvSpPr txBox="1"/>
+          <p:nvPr/>
+        </p:nvSpPr>
+        <p:spPr>
+          <a:xfrm>
+            <a:off x="914400" y="2377440"/>
+            <a:ext cx="10058400" cy="365760"/>
+          </a:xfrm>
+          <a:prstGeom prst="rect">
+            <a:avLst/>
+          </a:prstGeom>
+          <a:noFill/>
+        </p:spPr>
+        <p:txBody>
+          <a:bodyPr wrap="square" anchor="t" lIns="45720" rIns="45720" tIns="18288" bIns="18288">
+            <a:spAutoFit/>
+          </a:bodyPr>
+          <a:lstStyle/>
+          <a:p>
+            <a:pPr algn="l"/>
+            <a:r>
+              <a:rPr sz="1400" b="1">
+                <a:solidFill>
+                  <a:srgbClr val="E8B84B"/>
+                </a:solidFill>
+                <a:latin typeface="Calibri"/>
+              </a:rPr>
+              <a:t>BACKUP MATERIAL</a:t>
+            </a:r>
+          </a:p>
+        </p:txBody>
+      </p:sp>
+      <p:sp>
+        <p:nvSpPr>
+          <p:cNvPr id="5" name="TextBox 4"/>
+          <p:cNvSpPr txBox="1"/>
+          <p:nvPr/>
+        </p:nvSpPr>
+        <p:spPr>
+          <a:xfrm>
+            <a:off x="914400" y="2834640"/>
+            <a:ext cx="10515600" cy="1097280"/>
+          </a:xfrm>
+          <a:prstGeom prst="rect">
+            <a:avLst/>
+          </a:prstGeom>
+          <a:noFill/>
+        </p:spPr>
+        <p:txBody>
+          <a:bodyPr wrap="square" anchor="t" lIns="45720" rIns="45720" tIns="18288" bIns="18288">
+            <a:spAutoFit/>
+          </a:bodyPr>
+          <a:lstStyle/>
+          <a:p>
+            <a:pPr algn="l"/>
+            <a:r>
+              <a:rPr sz="4800" b="1">
+                <a:solidFill>
+                  <a:srgbClr val="FFFFFF"/>
+                </a:solidFill>
+                <a:latin typeface="Calibri"/>
+              </a:rPr>
+              <a:t>Annexes — for questions</a:t>
+            </a:r>
+          </a:p>
+        </p:txBody>
+      </p:sp>
+      <p:sp>
+        <p:nvSpPr>
+          <p:cNvPr id="6" name="TextBox 5"/>
+          <p:cNvSpPr txBox="1"/>
+          <p:nvPr/>
+        </p:nvSpPr>
+        <p:spPr>
+          <a:xfrm>
+            <a:off x="914400" y="4297680"/>
+            <a:ext cx="10515600" cy="457200"/>
+          </a:xfrm>
+          <a:prstGeom prst="rect">
+            <a:avLst/>
+          </a:prstGeom>
+          <a:noFill/>
+        </p:spPr>
+        <p:txBody>
+          <a:bodyPr wrap="square" anchor="t" lIns="45720" rIns="45720" tIns="18288" bIns="18288">
+            <a:spAutoFit/>
+          </a:bodyPr>
+          <a:lstStyle/>
+          <a:p>
+            <a:pPr algn="l"/>
+            <a:r>
+              <a:rPr sz="1400" b="0">
+                <a:solidFill>
+                  <a:srgbClr val="FFF3CD"/>
+                </a:solidFill>
+                <a:latin typeface="Calibri"/>
+              </a:rPr>
+              <a:t>The following slides are not part of the main presentation. They are kept available in case the jury asks for deeper detail.</a:t>
+            </a:r>
+          </a:p>
+        </p:txBody>
+      </p:sp>
+    </p:spTree>
+  </p:cSld>
+  <p:clrMapOvr>
+    <a:masterClrMapping/>
+  </p:clrMapOvr>
+</p:sld>
+</file>
+
+<file path=ppt/slides/slide23.xml><?xml version="1.0" encoding="utf-8"?>
+<p:sld xmlns:a="http://schemas.openxmlformats.org/drawingml/2006/main" xmlns:p="http://schemas.openxmlformats.org/presentationml/2006/main" xmlns:r="http://schemas.openxmlformats.org/officeDocument/2006/relationships">
+  <p:cSld>
+    <p:spTree>
+      <p:nvGrpSpPr>
+        <p:cNvPr id="1" name=""/>
+        <p:cNvGrpSpPr/>
+        <p:nvPr/>
+      </p:nvGrpSpPr>
+      <p:grpSpPr/>
+      <p:sp>
+        <p:nvSpPr>
+          <p:cNvPr id="2" name="Rectangle 1"/>
+          <p:cNvSpPr/>
+          <p:nvPr/>
+        </p:nvSpPr>
+        <p:spPr>
+          <a:xfrm>
+            <a:off x="0" y="0"/>
+            <a:ext cx="12191695" cy="6858000"/>
+          </a:xfrm>
+          <a:prstGeom prst="rect">
+            <a:avLst/>
+          </a:prstGeom>
+          <a:solidFill>
+            <a:srgbClr val="FFFFFF"/>
+          </a:solidFill>
+          <a:ln>
+            <a:noFill/>
+          </a:ln>
+          <a:effectLst/>
+        </p:spPr>
+        <p:style>
+          <a:lnRef idx="1">
+            <a:schemeClr val="accent1"/>
+          </a:lnRef>
+          <a:fillRef idx="3">
+            <a:schemeClr val="accent1"/>
+          </a:fillRef>
+          <a:effectRef idx="2">
+            <a:schemeClr val="accent1"/>
+          </a:effectRef>
+          <a:fontRef idx="minor">
+            <a:schemeClr val="lt1"/>
+          </a:fontRef>
+        </p:style>
+        <p:txBody>
+          <a:bodyPr rtlCol="0" anchor="ctr"/>
+          <a:lstStyle/>
+          <a:p>
+            <a:pPr algn="ctr"/>
+          </a:p>
+        </p:txBody>
+      </p:sp>
+      <p:sp>
+        <p:nvSpPr>
+          <p:cNvPr id="3" name="Rectangle 2"/>
+          <p:cNvSpPr/>
+          <p:nvPr/>
+        </p:nvSpPr>
+        <p:spPr>
+          <a:xfrm>
+            <a:off x="0" y="0"/>
+            <a:ext cx="12191695" cy="1097280"/>
+          </a:xfrm>
+          <a:prstGeom prst="rect">
+            <a:avLst/>
+          </a:prstGeom>
+          <a:solidFill>
+            <a:srgbClr val="0A1628"/>
+          </a:solidFill>
+          <a:ln>
+            <a:noFill/>
+          </a:ln>
+          <a:effectLst/>
+        </p:spPr>
+        <p:style>
+          <a:lnRef idx="1">
+            <a:schemeClr val="accent1"/>
+          </a:lnRef>
+          <a:fillRef idx="3">
+            <a:schemeClr val="accent1"/>
+          </a:fillRef>
+          <a:effectRef idx="2">
+            <a:schemeClr val="accent1"/>
+          </a:effectRef>
+          <a:fontRef idx="minor">
+            <a:schemeClr val="lt1"/>
+          </a:fontRef>
+        </p:style>
+        <p:txBody>
+          <a:bodyPr rtlCol="0" anchor="ctr"/>
+          <a:lstStyle/>
+          <a:p>
+            <a:pPr algn="ctr"/>
+          </a:p>
+        </p:txBody>
+      </p:sp>
+      <p:sp>
+        <p:nvSpPr>
+          <p:cNvPr id="4" name="Rectangle 3"/>
+          <p:cNvSpPr/>
+          <p:nvPr/>
+        </p:nvSpPr>
+        <p:spPr>
+          <a:xfrm>
+            <a:off x="0" y="1097280"/>
+            <a:ext cx="12191695" cy="54864"/>
+          </a:xfrm>
+          <a:prstGeom prst="rect">
+            <a:avLst/>
+          </a:prstGeom>
+          <a:solidFill>
+            <a:srgbClr val="E8B84B"/>
+          </a:solidFill>
+          <a:ln>
+            <a:noFill/>
+          </a:ln>
+          <a:effectLst/>
+        </p:spPr>
+        <p:style>
+          <a:lnRef idx="1">
+            <a:schemeClr val="accent1"/>
+          </a:lnRef>
+          <a:fillRef idx="3">
+            <a:schemeClr val="accent1"/>
+          </a:fillRef>
+          <a:effectRef idx="2">
+            <a:schemeClr val="accent1"/>
+          </a:effectRef>
+          <a:fontRef idx="minor">
+            <a:schemeClr val="lt1"/>
+          </a:fontRef>
+        </p:style>
+        <p:txBody>
+          <a:bodyPr rtlCol="0" anchor="ctr"/>
+          <a:lstStyle/>
+          <a:p>
+            <a:pPr algn="ctr"/>
+          </a:p>
+        </p:txBody>
+      </p:sp>
+      <p:sp>
+        <p:nvSpPr>
+          <p:cNvPr id="5" name="TextBox 4"/>
+          <p:cNvSpPr txBox="1"/>
+          <p:nvPr/>
+        </p:nvSpPr>
+        <p:spPr>
+          <a:xfrm>
+            <a:off x="457200" y="164592"/>
+            <a:ext cx="7315200" cy="320040"/>
+          </a:xfrm>
+          <a:prstGeom prst="rect">
+            <a:avLst/>
+          </a:prstGeom>
+          <a:noFill/>
+        </p:spPr>
+        <p:txBody>
+          <a:bodyPr wrap="square" anchor="t" lIns="45720" rIns="45720" tIns="18288" bIns="18288">
+            <a:spAutoFit/>
+          </a:bodyPr>
+          <a:lstStyle/>
+          <a:p>
+            <a:pPr algn="l"/>
+            <a:r>
+              <a:rPr sz="1100" b="1">
+                <a:solidFill>
+                  <a:srgbClr val="E8B84B"/>
+                </a:solidFill>
+                <a:latin typeface="Calibri"/>
+              </a:rPr>
+              <a:t>BACKUP A · BOOKING FLOW</a:t>
+            </a:r>
+          </a:p>
+        </p:txBody>
+      </p:sp>
+      <p:sp>
+        <p:nvSpPr>
+          <p:cNvPr id="6" name="TextBox 5"/>
+          <p:cNvSpPr txBox="1"/>
+          <p:nvPr/>
+        </p:nvSpPr>
+        <p:spPr>
+          <a:xfrm>
+            <a:off x="457200" y="457200"/>
+            <a:ext cx="10972800" cy="640080"/>
+          </a:xfrm>
+          <a:prstGeom prst="rect">
+            <a:avLst/>
+          </a:prstGeom>
+          <a:noFill/>
+        </p:spPr>
+        <p:txBody>
+          <a:bodyPr wrap="square" anchor="t" lIns="45720" rIns="45720" tIns="18288" bIns="18288">
+            <a:spAutoFit/>
+          </a:bodyPr>
+          <a:lstStyle/>
+          <a:p>
+            <a:pPr algn="l"/>
+            <a:r>
+              <a:rPr sz="2600" b="1">
+                <a:solidFill>
+                  <a:srgbClr val="FFFFFF"/>
+                </a:solidFill>
+                <a:latin typeface="Calibri"/>
+              </a:rPr>
+              <a:t>Sequence — passenger books a ride</a:t>
+            </a:r>
+          </a:p>
+        </p:txBody>
+      </p:sp>
+      <p:pic>
+        <p:nvPicPr>
+          <p:cNvPr id="7" name="Picture 6" descr="ForsaDrive_Sequence_BookRide.png"/>
+          <p:cNvPicPr>
+            <a:picLocks noChangeAspect="1"/>
+          </p:cNvPicPr>
+          <p:nvPr/>
+        </p:nvPicPr>
+        <p:blipFill>
+          <a:blip r:embed="rId2"/>
+          <a:stretch>
+            <a:fillRect/>
+          </a:stretch>
+        </p:blipFill>
+        <p:spPr>
+          <a:xfrm>
+            <a:off x="838047" y="1280160"/>
+            <a:ext cx="10515600" cy="4937760"/>
+          </a:xfrm>
+          <a:prstGeom prst="rect">
+            <a:avLst/>
+          </a:prstGeom>
+        </p:spPr>
+      </p:pic>
+      <p:sp>
+        <p:nvSpPr>
+          <p:cNvPr id="8" name="TextBox 7"/>
+          <p:cNvSpPr txBox="1"/>
+          <p:nvPr/>
+        </p:nvSpPr>
+        <p:spPr>
+          <a:xfrm>
+            <a:off x="640080" y="6355080"/>
+            <a:ext cx="10972800" cy="365760"/>
+          </a:xfrm>
+          <a:prstGeom prst="rect">
+            <a:avLst/>
+          </a:prstGeom>
+          <a:noFill/>
+        </p:spPr>
+        <p:txBody>
+          <a:bodyPr wrap="square" anchor="t" lIns="45720" rIns="45720" tIns="18288" bIns="18288">
+            <a:spAutoFit/>
+          </a:bodyPr>
+          <a:lstStyle/>
+          <a:p>
+            <a:pPr algn="ctr"/>
+            <a:r>
+              <a:rPr sz="1100" b="0">
+                <a:solidFill>
+                  <a:srgbClr val="6B7280"/>
+                </a:solidFill>
+                <a:latin typeface="Calibri"/>
+              </a:rPr>
+              <a:t>Prepayment is deducted from the wallet BEFORE the booking is persisted — guarantees no orphan bookings.</a:t>
+            </a:r>
+          </a:p>
+        </p:txBody>
+      </p:sp>
+      <p:sp>
+        <p:nvSpPr>
+          <p:cNvPr id="9" name="Rectangle 8"/>
+          <p:cNvSpPr/>
+          <p:nvPr/>
+        </p:nvSpPr>
+        <p:spPr>
+          <a:xfrm>
+            <a:off x="0" y="6537960"/>
+            <a:ext cx="12191695" cy="320040"/>
+          </a:xfrm>
+          <a:prstGeom prst="rect">
+            <a:avLst/>
+          </a:prstGeom>
+          <a:solidFill>
+            <a:srgbClr val="0A1628"/>
+          </a:solidFill>
+          <a:ln>
+            <a:noFill/>
+          </a:ln>
+          <a:effectLst/>
+        </p:spPr>
+        <p:style>
+          <a:lnRef idx="1">
+            <a:schemeClr val="accent1"/>
+          </a:lnRef>
+          <a:fillRef idx="3">
+            <a:schemeClr val="accent1"/>
+          </a:fillRef>
+          <a:effectRef idx="2">
+            <a:schemeClr val="accent1"/>
+          </a:effectRef>
+          <a:fontRef idx="minor">
+            <a:schemeClr val="lt1"/>
+          </a:fontRef>
+        </p:style>
+        <p:txBody>
+          <a:bodyPr rtlCol="0" anchor="ctr"/>
+          <a:lstStyle/>
+          <a:p>
+            <a:pPr algn="ctr"/>
+          </a:p>
+        </p:txBody>
+      </p:sp>
+      <p:sp>
+        <p:nvSpPr>
+          <p:cNvPr id="10" name="TextBox 9"/>
+          <p:cNvSpPr txBox="1"/>
+          <p:nvPr/>
+        </p:nvSpPr>
+        <p:spPr>
+          <a:xfrm>
+            <a:off x="457200" y="6583680"/>
+            <a:ext cx="7315200" cy="274320"/>
+          </a:xfrm>
+          <a:prstGeom prst="rect">
+            <a:avLst/>
+          </a:prstGeom>
+          <a:noFill/>
+        </p:spPr>
+        <p:txBody>
+          <a:bodyPr wrap="square" anchor="ctr" lIns="45720" rIns="45720" tIns="18288" bIns="18288">
+            <a:spAutoFit/>
+          </a:bodyPr>
+          <a:lstStyle/>
+          <a:p>
+            <a:pPr algn="l"/>
+            <a:r>
+              <a:rPr sz="1000" b="0">
+                <a:solidFill>
+                  <a:srgbClr val="FFFFFF"/>
+                </a:solidFill>
+                <a:latin typeface="Calibri"/>
+              </a:rPr>
+              <a:t>ForsaDrive  •  Final Year Project Defense  •  ATOMIC IT</a:t>
+            </a:r>
+          </a:p>
+        </p:txBody>
+      </p:sp>
+      <p:sp>
+        <p:nvSpPr>
+          <p:cNvPr id="11" name="TextBox 10"/>
+          <p:cNvSpPr txBox="1"/>
+          <p:nvPr/>
+        </p:nvSpPr>
+        <p:spPr>
+          <a:xfrm>
+            <a:off x="10515600" y="6583680"/>
+            <a:ext cx="1371600" cy="274320"/>
+          </a:xfrm>
+          <a:prstGeom prst="rect">
+            <a:avLst/>
+          </a:prstGeom>
+          <a:noFill/>
+        </p:spPr>
+        <p:txBody>
+          <a:bodyPr wrap="square" anchor="ctr" lIns="45720" rIns="45720" tIns="18288" bIns="18288">
+            <a:spAutoFit/>
+          </a:bodyPr>
+          <a:lstStyle/>
+          <a:p>
+            <a:pPr algn="r"/>
+            <a:r>
+              <a:rPr sz="1000" b="1">
+                <a:solidFill>
+                  <a:srgbClr val="E8B84B"/>
+                </a:solidFill>
+                <a:latin typeface="Calibri"/>
+              </a:rPr>
+              <a:t>A / 21</a:t>
+            </a:r>
+          </a:p>
+        </p:txBody>
+      </p:sp>
+    </p:spTree>
+  </p:cSld>
+  <p:clrMapOvr>
+    <a:masterClrMapping/>
+  </p:clrMapOvr>
+</p:sld>
+</file>
+
+<file path=ppt/slides/slide24.xml><?xml version="1.0" encoding="utf-8"?>
+<p:sld xmlns:a="http://schemas.openxmlformats.org/drawingml/2006/main" xmlns:p="http://schemas.openxmlformats.org/presentationml/2006/main" xmlns:r="http://schemas.openxmlformats.org/officeDocument/2006/relationships">
+  <p:cSld>
+    <p:spTree>
+      <p:nvGrpSpPr>
+        <p:cNvPr id="1" name=""/>
+        <p:cNvGrpSpPr/>
+        <p:nvPr/>
+      </p:nvGrpSpPr>
+      <p:grpSpPr/>
+      <p:sp>
+        <p:nvSpPr>
+          <p:cNvPr id="2" name="Rectangle 1"/>
+          <p:cNvSpPr/>
+          <p:nvPr/>
+        </p:nvSpPr>
+        <p:spPr>
+          <a:xfrm>
+            <a:off x="0" y="0"/>
+            <a:ext cx="12191695" cy="6858000"/>
+          </a:xfrm>
+          <a:prstGeom prst="rect">
+            <a:avLst/>
+          </a:prstGeom>
+          <a:solidFill>
+            <a:srgbClr val="FFFFFF"/>
+          </a:solidFill>
+          <a:ln>
+            <a:noFill/>
+          </a:ln>
+          <a:effectLst/>
+        </p:spPr>
+        <p:style>
+          <a:lnRef idx="1">
+            <a:schemeClr val="accent1"/>
+          </a:lnRef>
+          <a:fillRef idx="3">
+            <a:schemeClr val="accent1"/>
+          </a:fillRef>
+          <a:effectRef idx="2">
+            <a:schemeClr val="accent1"/>
+          </a:effectRef>
+          <a:fontRef idx="minor">
+            <a:schemeClr val="lt1"/>
+          </a:fontRef>
+        </p:style>
+        <p:txBody>
+          <a:bodyPr rtlCol="0" anchor="ctr"/>
+          <a:lstStyle/>
+          <a:p>
+            <a:pPr algn="ctr"/>
+          </a:p>
+        </p:txBody>
+      </p:sp>
+      <p:sp>
+        <p:nvSpPr>
+          <p:cNvPr id="3" name="Rectangle 2"/>
+          <p:cNvSpPr/>
+          <p:nvPr/>
+        </p:nvSpPr>
+        <p:spPr>
+          <a:xfrm>
+            <a:off x="0" y="0"/>
+            <a:ext cx="12191695" cy="1097280"/>
+          </a:xfrm>
+          <a:prstGeom prst="rect">
+            <a:avLst/>
+          </a:prstGeom>
+          <a:solidFill>
+            <a:srgbClr val="0A1628"/>
+          </a:solidFill>
+          <a:ln>
+            <a:noFill/>
+          </a:ln>
+          <a:effectLst/>
+        </p:spPr>
+        <p:style>
+          <a:lnRef idx="1">
+            <a:schemeClr val="accent1"/>
+          </a:lnRef>
+          <a:fillRef idx="3">
+            <a:schemeClr val="accent1"/>
+          </a:fillRef>
+          <a:effectRef idx="2">
+            <a:schemeClr val="accent1"/>
+          </a:effectRef>
+          <a:fontRef idx="minor">
+            <a:schemeClr val="lt1"/>
+          </a:fontRef>
+        </p:style>
+        <p:txBody>
+          <a:bodyPr rtlCol="0" anchor="ctr"/>
+          <a:lstStyle/>
+          <a:p>
+            <a:pPr algn="ctr"/>
+          </a:p>
+        </p:txBody>
+      </p:sp>
+      <p:sp>
+        <p:nvSpPr>
+          <p:cNvPr id="4" name="Rectangle 3"/>
+          <p:cNvSpPr/>
+          <p:nvPr/>
+        </p:nvSpPr>
+        <p:spPr>
+          <a:xfrm>
+            <a:off x="0" y="1097280"/>
+            <a:ext cx="12191695" cy="54864"/>
+          </a:xfrm>
+          <a:prstGeom prst="rect">
+            <a:avLst/>
+          </a:prstGeom>
+          <a:solidFill>
+            <a:srgbClr val="E8B84B"/>
+          </a:solidFill>
+          <a:ln>
+            <a:noFill/>
+          </a:ln>
+          <a:effectLst/>
+        </p:spPr>
+        <p:style>
+          <a:lnRef idx="1">
+            <a:schemeClr val="accent1"/>
+          </a:lnRef>
+          <a:fillRef idx="3">
+            <a:schemeClr val="accent1"/>
+          </a:fillRef>
+          <a:effectRef idx="2">
+            <a:schemeClr val="accent1"/>
+          </a:effectRef>
+          <a:fontRef idx="minor">
+            <a:schemeClr val="lt1"/>
+          </a:fontRef>
+        </p:style>
+        <p:txBody>
+          <a:bodyPr rtlCol="0" anchor="ctr"/>
+          <a:lstStyle/>
+          <a:p>
+            <a:pPr algn="ctr"/>
+          </a:p>
+        </p:txBody>
+      </p:sp>
+      <p:sp>
+        <p:nvSpPr>
+          <p:cNvPr id="5" name="TextBox 4"/>
+          <p:cNvSpPr txBox="1"/>
+          <p:nvPr/>
+        </p:nvSpPr>
+        <p:spPr>
+          <a:xfrm>
+            <a:off x="457200" y="164592"/>
+            <a:ext cx="7315200" cy="320040"/>
+          </a:xfrm>
+          <a:prstGeom prst="rect">
+            <a:avLst/>
+          </a:prstGeom>
+          <a:noFill/>
+        </p:spPr>
+        <p:txBody>
+          <a:bodyPr wrap="square" anchor="t" lIns="45720" rIns="45720" tIns="18288" bIns="18288">
+            <a:spAutoFit/>
+          </a:bodyPr>
+          <a:lstStyle/>
+          <a:p>
+            <a:pPr algn="l"/>
+            <a:r>
+              <a:rPr sz="1100" b="1">
+                <a:solidFill>
+                  <a:srgbClr val="E8B84B"/>
+                </a:solidFill>
+                <a:latin typeface="Calibri"/>
+              </a:rPr>
+              <a:t>BACKUP B · TRUST FLOW</a:t>
+            </a:r>
+          </a:p>
+        </p:txBody>
+      </p:sp>
+      <p:sp>
+        <p:nvSpPr>
+          <p:cNvPr id="6" name="TextBox 5"/>
+          <p:cNvSpPr txBox="1"/>
+          <p:nvPr/>
+        </p:nvSpPr>
+        <p:spPr>
+          <a:xfrm>
+            <a:off x="457200" y="457200"/>
+            <a:ext cx="10972800" cy="640080"/>
+          </a:xfrm>
+          <a:prstGeom prst="rect">
+            <a:avLst/>
+          </a:prstGeom>
+          <a:noFill/>
+        </p:spPr>
+        <p:txBody>
+          <a:bodyPr wrap="square" anchor="t" lIns="45720" rIns="45720" tIns="18288" bIns="18288">
+            <a:spAutoFit/>
+          </a:bodyPr>
+          <a:lstStyle/>
+          <a:p>
+            <a:pPr algn="l"/>
+            <a:r>
+              <a:rPr sz="2600" b="1">
+                <a:solidFill>
+                  <a:srgbClr val="FFFFFF"/>
+                </a:solidFill>
+                <a:latin typeface="Calibri"/>
+              </a:rPr>
+              <a:t>Sequence — student OTP verification</a:t>
+            </a:r>
+          </a:p>
+        </p:txBody>
+      </p:sp>
+      <p:pic>
+        <p:nvPicPr>
+          <p:cNvPr id="7" name="Picture 6" descr="ForsaDrive_Sequence_VerifyStudent.png"/>
+          <p:cNvPicPr>
+            <a:picLocks noChangeAspect="1"/>
+          </p:cNvPicPr>
+          <p:nvPr/>
+        </p:nvPicPr>
+        <p:blipFill>
+          <a:blip r:embed="rId2"/>
+          <a:stretch>
+            <a:fillRect/>
+          </a:stretch>
+        </p:blipFill>
+        <p:spPr>
+          <a:xfrm>
+            <a:off x="838047" y="1280160"/>
+            <a:ext cx="10515600" cy="4937760"/>
+          </a:xfrm>
+          <a:prstGeom prst="rect">
+            <a:avLst/>
+          </a:prstGeom>
+        </p:spPr>
+      </p:pic>
+      <p:sp>
+        <p:nvSpPr>
+          <p:cNvPr id="8" name="TextBox 7"/>
+          <p:cNvSpPr txBox="1"/>
+          <p:nvPr/>
+        </p:nvSpPr>
+        <p:spPr>
+          <a:xfrm>
+            <a:off x="640080" y="6355080"/>
+            <a:ext cx="10972800" cy="365760"/>
+          </a:xfrm>
+          <a:prstGeom prst="rect">
+            <a:avLst/>
+          </a:prstGeom>
+          <a:noFill/>
+        </p:spPr>
+        <p:txBody>
+          <a:bodyPr wrap="square" anchor="t" lIns="45720" rIns="45720" tIns="18288" bIns="18288">
+            <a:spAutoFit/>
+          </a:bodyPr>
+          <a:lstStyle/>
+          <a:p>
+            <a:pPr algn="ctr"/>
+            <a:r>
+              <a:rPr sz="1100" b="0">
+                <a:solidFill>
+                  <a:srgbClr val="6B7280"/>
+                </a:solidFill>
+                <a:latin typeface="Calibri"/>
+              </a:rPr>
+              <a:t>Domain checked against student_domains • 6-digit OTP, 10-min expiry, 5-attempt cap, 30s cooldown between sends.</a:t>
+            </a:r>
+          </a:p>
+        </p:txBody>
+      </p:sp>
+      <p:sp>
+        <p:nvSpPr>
+          <p:cNvPr id="9" name="Rectangle 8"/>
+          <p:cNvSpPr/>
+          <p:nvPr/>
+        </p:nvSpPr>
+        <p:spPr>
+          <a:xfrm>
+            <a:off x="0" y="6537960"/>
+            <a:ext cx="12191695" cy="320040"/>
+          </a:xfrm>
+          <a:prstGeom prst="rect">
+            <a:avLst/>
+          </a:prstGeom>
+          <a:solidFill>
+            <a:srgbClr val="0A1628"/>
+          </a:solidFill>
+          <a:ln>
+            <a:noFill/>
+          </a:ln>
+          <a:effectLst/>
+        </p:spPr>
+        <p:style>
+          <a:lnRef idx="1">
+            <a:schemeClr val="accent1"/>
+          </a:lnRef>
+          <a:fillRef idx="3">
+            <a:schemeClr val="accent1"/>
+          </a:fillRef>
+          <a:effectRef idx="2">
+            <a:schemeClr val="accent1"/>
+          </a:effectRef>
+          <a:fontRef idx="minor">
+            <a:schemeClr val="lt1"/>
+          </a:fontRef>
+        </p:style>
+        <p:txBody>
+          <a:bodyPr rtlCol="0" anchor="ctr"/>
+          <a:lstStyle/>
+          <a:p>
+            <a:pPr algn="ctr"/>
+          </a:p>
+        </p:txBody>
+      </p:sp>
+      <p:sp>
+        <p:nvSpPr>
+          <p:cNvPr id="10" name="TextBox 9"/>
+          <p:cNvSpPr txBox="1"/>
+          <p:nvPr/>
+        </p:nvSpPr>
+        <p:spPr>
+          <a:xfrm>
+            <a:off x="457200" y="6583680"/>
+            <a:ext cx="7315200" cy="274320"/>
+          </a:xfrm>
+          <a:prstGeom prst="rect">
+            <a:avLst/>
+          </a:prstGeom>
+          <a:noFill/>
+        </p:spPr>
+        <p:txBody>
+          <a:bodyPr wrap="square" anchor="ctr" lIns="45720" rIns="45720" tIns="18288" bIns="18288">
+            <a:spAutoFit/>
+          </a:bodyPr>
+          <a:lstStyle/>
+          <a:p>
+            <a:pPr algn="l"/>
+            <a:r>
+              <a:rPr sz="1000" b="0">
+                <a:solidFill>
+                  <a:srgbClr val="FFFFFF"/>
+                </a:solidFill>
+                <a:latin typeface="Calibri"/>
+              </a:rPr>
+              <a:t>ForsaDrive  •  Final Year Project Defense  •  ATOMIC IT</a:t>
+            </a:r>
+          </a:p>
+        </p:txBody>
+      </p:sp>
+      <p:sp>
+        <p:nvSpPr>
+          <p:cNvPr id="11" name="TextBox 10"/>
+          <p:cNvSpPr txBox="1"/>
+          <p:nvPr/>
+        </p:nvSpPr>
+        <p:spPr>
+          <a:xfrm>
+            <a:off x="10515600" y="6583680"/>
+            <a:ext cx="1371600" cy="274320"/>
+          </a:xfrm>
+          <a:prstGeom prst="rect">
+            <a:avLst/>
+          </a:prstGeom>
+          <a:noFill/>
+        </p:spPr>
+        <p:txBody>
+          <a:bodyPr wrap="square" anchor="ctr" lIns="45720" rIns="45720" tIns="18288" bIns="18288">
+            <a:spAutoFit/>
+          </a:bodyPr>
+          <a:lstStyle/>
+          <a:p>
+            <a:pPr algn="r"/>
+            <a:r>
+              <a:rPr sz="1000" b="1">
+                <a:solidFill>
+                  <a:srgbClr val="E8B84B"/>
+                </a:solidFill>
+                <a:latin typeface="Calibri"/>
+              </a:rPr>
+              <a:t>B / 21</a:t>
+            </a:r>
+          </a:p>
+        </p:txBody>
+      </p:sp>
+    </p:spTree>
+  </p:cSld>
+  <p:clrMapOvr>
+    <a:masterClrMapping/>
+  </p:clrMapOvr>
+</p:sld>
+</file>
+
+<file path=ppt/slides/slide25.xml><?xml version="1.0" encoding="utf-8"?>
+<p:sld xmlns:a="http://schemas.openxmlformats.org/drawingml/2006/main" xmlns:p="http://schemas.openxmlformats.org/presentationml/2006/main" xmlns:r="http://schemas.openxmlformats.org/officeDocument/2006/relationships">
+  <p:cSld>
+    <p:spTree>
+      <p:nvGrpSpPr>
+        <p:cNvPr id="1" name=""/>
+        <p:cNvGrpSpPr/>
+        <p:nvPr/>
+      </p:nvGrpSpPr>
+      <p:grpSpPr/>
+      <p:sp>
+        <p:nvSpPr>
+          <p:cNvPr id="2" name="Rectangle 1"/>
+          <p:cNvSpPr/>
+          <p:nvPr/>
+        </p:nvSpPr>
+        <p:spPr>
+          <a:xfrm>
+            <a:off x="0" y="0"/>
+            <a:ext cx="12191695" cy="6858000"/>
+          </a:xfrm>
+          <a:prstGeom prst="rect">
+            <a:avLst/>
+          </a:prstGeom>
+          <a:solidFill>
+            <a:srgbClr val="FFFFFF"/>
+          </a:solidFill>
+          <a:ln>
+            <a:noFill/>
+          </a:ln>
+          <a:effectLst/>
+        </p:spPr>
+        <p:style>
+          <a:lnRef idx="1">
+            <a:schemeClr val="accent1"/>
+          </a:lnRef>
+          <a:fillRef idx="3">
+            <a:schemeClr val="accent1"/>
+          </a:fillRef>
+          <a:effectRef idx="2">
+            <a:schemeClr val="accent1"/>
+          </a:effectRef>
+          <a:fontRef idx="minor">
+            <a:schemeClr val="lt1"/>
+          </a:fontRef>
+        </p:style>
+        <p:txBody>
+          <a:bodyPr rtlCol="0" anchor="ctr"/>
+          <a:lstStyle/>
+          <a:p>
+            <a:pPr algn="ctr"/>
+          </a:p>
+        </p:txBody>
+      </p:sp>
+      <p:sp>
+        <p:nvSpPr>
+          <p:cNvPr id="3" name="Rectangle 2"/>
+          <p:cNvSpPr/>
+          <p:nvPr/>
+        </p:nvSpPr>
+        <p:spPr>
+          <a:xfrm>
+            <a:off x="0" y="0"/>
+            <a:ext cx="12191695" cy="1097280"/>
+          </a:xfrm>
+          <a:prstGeom prst="rect">
+            <a:avLst/>
+          </a:prstGeom>
+          <a:solidFill>
+            <a:srgbClr val="0A1628"/>
+          </a:solidFill>
+          <a:ln>
+            <a:noFill/>
+          </a:ln>
+          <a:effectLst/>
+        </p:spPr>
+        <p:style>
+          <a:lnRef idx="1">
+            <a:schemeClr val="accent1"/>
+          </a:lnRef>
+          <a:fillRef idx="3">
+            <a:schemeClr val="accent1"/>
+          </a:fillRef>
+          <a:effectRef idx="2">
+            <a:schemeClr val="accent1"/>
+          </a:effectRef>
+          <a:fontRef idx="minor">
+            <a:schemeClr val="lt1"/>
+          </a:fontRef>
+        </p:style>
+        <p:txBody>
+          <a:bodyPr rtlCol="0" anchor="ctr"/>
+          <a:lstStyle/>
+          <a:p>
+            <a:pPr algn="ctr"/>
+          </a:p>
+        </p:txBody>
+      </p:sp>
+      <p:sp>
+        <p:nvSpPr>
+          <p:cNvPr id="4" name="Rectangle 3"/>
+          <p:cNvSpPr/>
+          <p:nvPr/>
+        </p:nvSpPr>
+        <p:spPr>
+          <a:xfrm>
+            <a:off x="0" y="1097280"/>
+            <a:ext cx="12191695" cy="54864"/>
+          </a:xfrm>
+          <a:prstGeom prst="rect">
+            <a:avLst/>
+          </a:prstGeom>
+          <a:solidFill>
+            <a:srgbClr val="E8B84B"/>
+          </a:solidFill>
+          <a:ln>
+            <a:noFill/>
+          </a:ln>
+          <a:effectLst/>
+        </p:spPr>
+        <p:style>
+          <a:lnRef idx="1">
+            <a:schemeClr val="accent1"/>
+          </a:lnRef>
+          <a:fillRef idx="3">
+            <a:schemeClr val="accent1"/>
+          </a:fillRef>
+          <a:effectRef idx="2">
+            <a:schemeClr val="accent1"/>
+          </a:effectRef>
+          <a:fontRef idx="minor">
+            <a:schemeClr val="lt1"/>
+          </a:fontRef>
+        </p:style>
+        <p:txBody>
+          <a:bodyPr rtlCol="0" anchor="ctr"/>
+          <a:lstStyle/>
+          <a:p>
+            <a:pPr algn="ctr"/>
+          </a:p>
+        </p:txBody>
+      </p:sp>
+      <p:sp>
+        <p:nvSpPr>
+          <p:cNvPr id="5" name="TextBox 4"/>
+          <p:cNvSpPr txBox="1"/>
+          <p:nvPr/>
+        </p:nvSpPr>
+        <p:spPr>
+          <a:xfrm>
+            <a:off x="457200" y="164592"/>
+            <a:ext cx="7315200" cy="320040"/>
+          </a:xfrm>
+          <a:prstGeom prst="rect">
+            <a:avLst/>
+          </a:prstGeom>
+          <a:noFill/>
+        </p:spPr>
+        <p:txBody>
+          <a:bodyPr wrap="square" anchor="t" lIns="45720" rIns="45720" tIns="18288" bIns="18288">
+            <a:spAutoFit/>
+          </a:bodyPr>
+          <a:lstStyle/>
+          <a:p>
+            <a:pPr algn="l"/>
+            <a:r>
+              <a:rPr sz="1100" b="1">
+                <a:solidFill>
+                  <a:srgbClr val="E8B84B"/>
+                </a:solidFill>
+                <a:latin typeface="Calibri"/>
+              </a:rPr>
+              <a:t>BACKUP C · ONBOARDING</a:t>
+            </a:r>
+          </a:p>
+        </p:txBody>
+      </p:sp>
+      <p:sp>
+        <p:nvSpPr>
+          <p:cNvPr id="6" name="TextBox 5"/>
+          <p:cNvSpPr txBox="1"/>
+          <p:nvPr/>
+        </p:nvSpPr>
+        <p:spPr>
+          <a:xfrm>
+            <a:off x="457200" y="457200"/>
+            <a:ext cx="10972800" cy="640080"/>
+          </a:xfrm>
+          <a:prstGeom prst="rect">
+            <a:avLst/>
+          </a:prstGeom>
+          <a:noFill/>
+        </p:spPr>
+        <p:txBody>
+          <a:bodyPr wrap="square" anchor="t" lIns="45720" rIns="45720" tIns="18288" bIns="18288">
+            <a:spAutoFit/>
+          </a:bodyPr>
+          <a:lstStyle/>
+          <a:p>
+            <a:pPr algn="l"/>
+            <a:r>
+              <a:rPr sz="2600" b="1">
+                <a:solidFill>
+                  <a:srgbClr val="FFFFFF"/>
+                </a:solidFill>
+                <a:latin typeface="Calibri"/>
+              </a:rPr>
+              <a:t>Sequence — driver application &amp; admin approval</a:t>
+            </a:r>
+          </a:p>
+        </p:txBody>
+      </p:sp>
+      <p:sp>
+        <p:nvSpPr>
+          <p:cNvPr id="7" name="Rectangle 6"/>
+          <p:cNvSpPr/>
+          <p:nvPr/>
+        </p:nvSpPr>
+        <p:spPr>
+          <a:xfrm>
+            <a:off x="838047" y="1280160"/>
+            <a:ext cx="10515600" cy="4937760"/>
+          </a:xfrm>
+          <a:prstGeom prst="rect">
+            <a:avLst/>
+          </a:prstGeom>
+          <a:solidFill>
+            <a:srgbClr val="F3F4F6"/>
+          </a:solidFill>
+          <a:ln>
+            <a:solidFill>
+              <a:srgbClr val="6B7280"/>
+            </a:solidFill>
+          </a:ln>
+          <a:effectLst/>
+        </p:spPr>
+        <p:style>
+          <a:lnRef idx="1">
+            <a:schemeClr val="accent1"/>
+          </a:lnRef>
+          <a:fillRef idx="3">
+            <a:schemeClr val="accent1"/>
+          </a:fillRef>
+          <a:effectRef idx="2">
+            <a:schemeClr val="accent1"/>
+          </a:effectRef>
+          <a:fontRef idx="minor">
+            <a:schemeClr val="lt1"/>
+          </a:fontRef>
+        </p:style>
+        <p:txBody>
+          <a:bodyPr rtlCol="0" anchor="ctr"/>
+          <a:lstStyle/>
+          <a:p>
+            <a:pPr algn="ctr"/>
+          </a:p>
+        </p:txBody>
+      </p:sp>
+      <p:sp>
+        <p:nvSpPr>
+          <p:cNvPr id="8" name="TextBox 7"/>
+          <p:cNvSpPr txBox="1"/>
+          <p:nvPr/>
+        </p:nvSpPr>
+        <p:spPr>
+          <a:xfrm>
+            <a:off x="838047" y="3566160"/>
+            <a:ext cx="10515600" cy="365760"/>
+          </a:xfrm>
+          <a:prstGeom prst="rect">
+            <a:avLst/>
+          </a:prstGeom>
+          <a:noFill/>
+        </p:spPr>
+        <p:txBody>
+          <a:bodyPr wrap="square" anchor="ctr" lIns="45720" rIns="45720" tIns="18288" bIns="18288">
+            <a:spAutoFit/>
+          </a:bodyPr>
+          <a:lstStyle/>
+          <a:p>
+            <a:pPr algn="ctr"/>
+            <a:r>
+              <a:rPr sz="1200" b="0">
+                <a:solidFill>
+                  <a:srgbClr val="6B7280"/>
+                </a:solidFill>
+                <a:latin typeface="Calibri"/>
+              </a:rPr>
+              <a:t>[image: ForsaDrive_Sequence_DriverApplication.png]</a:t>
+            </a:r>
+          </a:p>
+        </p:txBody>
+      </p:sp>
+      <p:sp>
+        <p:nvSpPr>
+          <p:cNvPr id="9" name="TextBox 8"/>
+          <p:cNvSpPr txBox="1"/>
+          <p:nvPr/>
+        </p:nvSpPr>
+        <p:spPr>
+          <a:xfrm>
+            <a:off x="640080" y="6355080"/>
+            <a:ext cx="10972800" cy="365760"/>
+          </a:xfrm>
+          <a:prstGeom prst="rect">
+            <a:avLst/>
+          </a:prstGeom>
+          <a:noFill/>
+        </p:spPr>
+        <p:txBody>
+          <a:bodyPr wrap="square" anchor="t" lIns="45720" rIns="45720" tIns="18288" bIns="18288">
+            <a:spAutoFit/>
+          </a:bodyPr>
+          <a:lstStyle/>
+          <a:p>
+            <a:pPr algn="ctr"/>
+            <a:r>
+              <a:rPr sz="1100" b="0">
+                <a:solidFill>
+                  <a:srgbClr val="6B7280"/>
+                </a:solidFill>
+                <a:latin typeface="Calibri"/>
+              </a:rPr>
+              <a:t>On approval: DriverProfile + Vehicle are created and the user role is switched to DRIVER atomically.</a:t>
+            </a:r>
+          </a:p>
+        </p:txBody>
+      </p:sp>
+      <p:sp>
+        <p:nvSpPr>
+          <p:cNvPr id="10" name="Rectangle 9"/>
+          <p:cNvSpPr/>
+          <p:nvPr/>
+        </p:nvSpPr>
+        <p:spPr>
+          <a:xfrm>
+            <a:off x="0" y="6537960"/>
+            <a:ext cx="12191695" cy="320040"/>
+          </a:xfrm>
+          <a:prstGeom prst="rect">
+            <a:avLst/>
+          </a:prstGeom>
+          <a:solidFill>
+            <a:srgbClr val="0A1628"/>
+          </a:solidFill>
+          <a:ln>
+            <a:noFill/>
+          </a:ln>
+          <a:effectLst/>
+        </p:spPr>
+        <p:style>
+          <a:lnRef idx="1">
+            <a:schemeClr val="accent1"/>
+          </a:lnRef>
+          <a:fillRef idx="3">
+            <a:schemeClr val="accent1"/>
+          </a:fillRef>
+          <a:effectRef idx="2">
+            <a:schemeClr val="accent1"/>
+          </a:effectRef>
+          <a:fontRef idx="minor">
+            <a:schemeClr val="lt1"/>
+          </a:fontRef>
+        </p:style>
+        <p:txBody>
+          <a:bodyPr rtlCol="0" anchor="ctr"/>
+          <a:lstStyle/>
+          <a:p>
+            <a:pPr algn="ctr"/>
+          </a:p>
+        </p:txBody>
+      </p:sp>
+      <p:sp>
+        <p:nvSpPr>
+          <p:cNvPr id="11" name="TextBox 10"/>
+          <p:cNvSpPr txBox="1"/>
+          <p:nvPr/>
+        </p:nvSpPr>
+        <p:spPr>
+          <a:xfrm>
+            <a:off x="457200" y="6583680"/>
+            <a:ext cx="7315200" cy="274320"/>
+          </a:xfrm>
+          <a:prstGeom prst="rect">
+            <a:avLst/>
+          </a:prstGeom>
+          <a:noFill/>
+        </p:spPr>
+        <p:txBody>
+          <a:bodyPr wrap="square" anchor="ctr" lIns="45720" rIns="45720" tIns="18288" bIns="18288">
+            <a:spAutoFit/>
+          </a:bodyPr>
+          <a:lstStyle/>
+          <a:p>
+            <a:pPr algn="l"/>
+            <a:r>
+              <a:rPr sz="1000" b="0">
+                <a:solidFill>
+                  <a:srgbClr val="FFFFFF"/>
+                </a:solidFill>
+                <a:latin typeface="Calibri"/>
+              </a:rPr>
+              <a:t>ForsaDrive  •  Final Year Project Defense  •  ATOMIC IT</a:t>
+            </a:r>
+          </a:p>
+        </p:txBody>
+      </p:sp>
+      <p:sp>
+        <p:nvSpPr>
+          <p:cNvPr id="12" name="TextBox 11"/>
+          <p:cNvSpPr txBox="1"/>
+          <p:nvPr/>
+        </p:nvSpPr>
+        <p:spPr>
+          <a:xfrm>
+            <a:off x="10515600" y="6583680"/>
+            <a:ext cx="1371600" cy="274320"/>
+          </a:xfrm>
+          <a:prstGeom prst="rect">
+            <a:avLst/>
+          </a:prstGeom>
+          <a:noFill/>
+        </p:spPr>
+        <p:txBody>
+          <a:bodyPr wrap="square" anchor="ctr" lIns="45720" rIns="45720" tIns="18288" bIns="18288">
+            <a:spAutoFit/>
+          </a:bodyPr>
+          <a:lstStyle/>
+          <a:p>
+            <a:pPr algn="r"/>
+            <a:r>
+              <a:rPr sz="1000" b="1">
+                <a:solidFill>
+                  <a:srgbClr val="E8B84B"/>
+                </a:solidFill>
+                <a:latin typeface="Calibri"/>
+              </a:rPr>
+              <a:t>C / 21</a:t>
+            </a:r>
+          </a:p>
+        </p:txBody>
+      </p:sp>
+    </p:spTree>
+  </p:cSld>
+  <p:clrMapOvr>
+    <a:masterClrMapping/>
+  </p:clrMapOvr>
+</p:sld>
+</file>
+
+<file path=ppt/slides/slide26.xml><?xml version="1.0" encoding="utf-8"?>
+<p:sld xmlns:a="http://schemas.openxmlformats.org/drawingml/2006/main" xmlns:p="http://schemas.openxmlformats.org/presentationml/2006/main" xmlns:r="http://schemas.openxmlformats.org/officeDocument/2006/relationships">
+  <p:cSld>
+    <p:spTree>
+      <p:nvGrpSpPr>
+        <p:cNvPr id="1" name=""/>
+        <p:cNvGrpSpPr/>
+        <p:nvPr/>
+      </p:nvGrpSpPr>
+      <p:grpSpPr/>
+      <p:sp>
+        <p:nvSpPr>
+          <p:cNvPr id="2" name="Rectangle 1"/>
+          <p:cNvSpPr/>
+          <p:nvPr/>
+        </p:nvSpPr>
+        <p:spPr>
+          <a:xfrm>
+            <a:off x="0" y="0"/>
+            <a:ext cx="12191695" cy="6858000"/>
+          </a:xfrm>
+          <a:prstGeom prst="rect">
+            <a:avLst/>
+          </a:prstGeom>
+          <a:solidFill>
+            <a:srgbClr val="FFFFFF"/>
+          </a:solidFill>
+          <a:ln>
+            <a:noFill/>
+          </a:ln>
+          <a:effectLst/>
+        </p:spPr>
+        <p:style>
+          <a:lnRef idx="1">
+            <a:schemeClr val="accent1"/>
+          </a:lnRef>
+          <a:fillRef idx="3">
+            <a:schemeClr val="accent1"/>
+          </a:fillRef>
+          <a:effectRef idx="2">
+            <a:schemeClr val="accent1"/>
+          </a:effectRef>
+          <a:fontRef idx="minor">
+            <a:schemeClr val="lt1"/>
+          </a:fontRef>
+        </p:style>
+        <p:txBody>
+          <a:bodyPr rtlCol="0" anchor="ctr"/>
+          <a:lstStyle/>
+          <a:p>
+            <a:pPr algn="ctr"/>
+          </a:p>
+        </p:txBody>
+      </p:sp>
+      <p:sp>
+        <p:nvSpPr>
+          <p:cNvPr id="3" name="Rectangle 2"/>
+          <p:cNvSpPr/>
+          <p:nvPr/>
+        </p:nvSpPr>
+        <p:spPr>
+          <a:xfrm>
+            <a:off x="0" y="0"/>
+            <a:ext cx="12191695" cy="1097280"/>
+          </a:xfrm>
+          <a:prstGeom prst="rect">
+            <a:avLst/>
+          </a:prstGeom>
+          <a:solidFill>
+            <a:srgbClr val="0A1628"/>
+          </a:solidFill>
+          <a:ln>
+            <a:noFill/>
+          </a:ln>
+          <a:effectLst/>
+        </p:spPr>
+        <p:style>
+          <a:lnRef idx="1">
+            <a:schemeClr val="accent1"/>
+          </a:lnRef>
+          <a:fillRef idx="3">
+            <a:schemeClr val="accent1"/>
+          </a:fillRef>
+          <a:effectRef idx="2">
+            <a:schemeClr val="accent1"/>
+          </a:effectRef>
+          <a:fontRef idx="minor">
+            <a:schemeClr val="lt1"/>
+          </a:fontRef>
+        </p:style>
+        <p:txBody>
+          <a:bodyPr rtlCol="0" anchor="ctr"/>
+          <a:lstStyle/>
+          <a:p>
+            <a:pPr algn="ctr"/>
+          </a:p>
+        </p:txBody>
+      </p:sp>
+      <p:sp>
+        <p:nvSpPr>
+          <p:cNvPr id="4" name="Rectangle 3"/>
+          <p:cNvSpPr/>
+          <p:nvPr/>
+        </p:nvSpPr>
+        <p:spPr>
+          <a:xfrm>
+            <a:off x="0" y="1097280"/>
+            <a:ext cx="12191695" cy="54864"/>
+          </a:xfrm>
+          <a:prstGeom prst="rect">
+            <a:avLst/>
+          </a:prstGeom>
+          <a:solidFill>
+            <a:srgbClr val="E8B84B"/>
+          </a:solidFill>
+          <a:ln>
+            <a:noFill/>
+          </a:ln>
+          <a:effectLst/>
+        </p:spPr>
+        <p:style>
+          <a:lnRef idx="1">
+            <a:schemeClr val="accent1"/>
+          </a:lnRef>
+          <a:fillRef idx="3">
+            <a:schemeClr val="accent1"/>
+          </a:fillRef>
+          <a:effectRef idx="2">
+            <a:schemeClr val="accent1"/>
+          </a:effectRef>
+          <a:fontRef idx="minor">
+            <a:schemeClr val="lt1"/>
+          </a:fontRef>
+        </p:style>
+        <p:txBody>
+          <a:bodyPr rtlCol="0" anchor="ctr"/>
+          <a:lstStyle/>
+          <a:p>
+            <a:pPr algn="ctr"/>
+          </a:p>
+        </p:txBody>
+      </p:sp>
+      <p:sp>
+        <p:nvSpPr>
+          <p:cNvPr id="5" name="TextBox 4"/>
+          <p:cNvSpPr txBox="1"/>
+          <p:nvPr/>
+        </p:nvSpPr>
+        <p:spPr>
+          <a:xfrm>
+            <a:off x="457200" y="164592"/>
+            <a:ext cx="7315200" cy="320040"/>
+          </a:xfrm>
+          <a:prstGeom prst="rect">
+            <a:avLst/>
+          </a:prstGeom>
+          <a:noFill/>
+        </p:spPr>
+        <p:txBody>
+          <a:bodyPr wrap="square" anchor="t" lIns="45720" rIns="45720" tIns="18288" bIns="18288">
+            <a:spAutoFit/>
+          </a:bodyPr>
+          <a:lstStyle/>
+          <a:p>
+            <a:pPr algn="l"/>
+            <a:r>
+              <a:rPr sz="1100" b="1">
+                <a:solidFill>
+                  <a:srgbClr val="E8B84B"/>
+                </a:solidFill>
+                <a:latin typeface="Calibri"/>
+              </a:rPr>
+              <a:t>BACKUP D · FULL LIFECYCLE</a:t>
+            </a:r>
+          </a:p>
+        </p:txBody>
+      </p:sp>
+      <p:sp>
+        <p:nvSpPr>
+          <p:cNvPr id="6" name="TextBox 5"/>
+          <p:cNvSpPr txBox="1"/>
+          <p:nvPr/>
+        </p:nvSpPr>
+        <p:spPr>
+          <a:xfrm>
+            <a:off x="457200" y="457200"/>
+            <a:ext cx="10972800" cy="640080"/>
+          </a:xfrm>
+          <a:prstGeom prst="rect">
+            <a:avLst/>
+          </a:prstGeom>
+          <a:noFill/>
+        </p:spPr>
+        <p:txBody>
+          <a:bodyPr wrap="square" anchor="t" lIns="45720" rIns="45720" tIns="18288" bIns="18288">
+            <a:spAutoFit/>
+          </a:bodyPr>
+          <a:lstStyle/>
+          <a:p>
+            <a:pPr algn="l"/>
+            <a:r>
+              <a:rPr sz="2600" b="1">
+                <a:solidFill>
+                  <a:srgbClr val="FFFFFF"/>
+                </a:solidFill>
+                <a:latin typeface="Calibri"/>
+              </a:rPr>
+              <a:t>Activity diagram — end-to-end booking journey</a:t>
+            </a:r>
+          </a:p>
+        </p:txBody>
+      </p:sp>
+      <p:pic>
+        <p:nvPicPr>
+          <p:cNvPr id="7" name="Picture 6" descr="ForsaDrive_Activity_BookingFlow.png"/>
+          <p:cNvPicPr>
+            <a:picLocks noChangeAspect="1"/>
+          </p:cNvPicPr>
+          <p:nvPr/>
+        </p:nvPicPr>
+        <p:blipFill>
+          <a:blip r:embed="rId2"/>
+          <a:stretch>
+            <a:fillRect/>
+          </a:stretch>
+        </p:blipFill>
+        <p:spPr>
+          <a:xfrm>
+            <a:off x="838047" y="1280160"/>
+            <a:ext cx="10515600" cy="4937760"/>
+          </a:xfrm>
+          <a:prstGeom prst="rect">
+            <a:avLst/>
+          </a:prstGeom>
+        </p:spPr>
+      </p:pic>
+      <p:sp>
+        <p:nvSpPr>
+          <p:cNvPr id="8" name="TextBox 7"/>
+          <p:cNvSpPr txBox="1"/>
+          <p:nvPr/>
+        </p:nvSpPr>
+        <p:spPr>
+          <a:xfrm>
+            <a:off x="640080" y="6355080"/>
+            <a:ext cx="10972800" cy="365760"/>
+          </a:xfrm>
+          <a:prstGeom prst="rect">
+            <a:avLst/>
+          </a:prstGeom>
+          <a:noFill/>
+        </p:spPr>
+        <p:txBody>
+          <a:bodyPr wrap="square" anchor="t" lIns="45720" rIns="45720" tIns="18288" bIns="18288">
+            <a:spAutoFit/>
+          </a:bodyPr>
+          <a:lstStyle/>
+          <a:p>
+            <a:pPr algn="ctr"/>
+            <a:r>
+              <a:rPr sz="1100" b="0">
+                <a:solidFill>
+                  <a:srgbClr val="6B7280"/>
+                </a:solidFill>
+                <a:latin typeface="Calibri"/>
+              </a:rPr>
+              <a:t>Three swimlanes: passenger / system / driver. Decision points: retry payment, accept/refuse, depart, arrive, cash collection.</a:t>
+            </a:r>
+          </a:p>
+        </p:txBody>
+      </p:sp>
+      <p:sp>
+        <p:nvSpPr>
+          <p:cNvPr id="9" name="Rectangle 8"/>
+          <p:cNvSpPr/>
+          <p:nvPr/>
+        </p:nvSpPr>
+        <p:spPr>
+          <a:xfrm>
+            <a:off x="0" y="6537960"/>
+            <a:ext cx="12191695" cy="320040"/>
+          </a:xfrm>
+          <a:prstGeom prst="rect">
+            <a:avLst/>
+          </a:prstGeom>
+          <a:solidFill>
+            <a:srgbClr val="0A1628"/>
+          </a:solidFill>
+          <a:ln>
+            <a:noFill/>
+          </a:ln>
+          <a:effectLst/>
+        </p:spPr>
+        <p:style>
+          <a:lnRef idx="1">
+            <a:schemeClr val="accent1"/>
+          </a:lnRef>
+          <a:fillRef idx="3">
+            <a:schemeClr val="accent1"/>
+          </a:fillRef>
+          <a:effectRef idx="2">
+            <a:schemeClr val="accent1"/>
+          </a:effectRef>
+          <a:fontRef idx="minor">
+            <a:schemeClr val="lt1"/>
+          </a:fontRef>
+        </p:style>
+        <p:txBody>
+          <a:bodyPr rtlCol="0" anchor="ctr"/>
+          <a:lstStyle/>
+          <a:p>
+            <a:pPr algn="ctr"/>
+          </a:p>
+        </p:txBody>
+      </p:sp>
+      <p:sp>
+        <p:nvSpPr>
+          <p:cNvPr id="10" name="TextBox 9"/>
+          <p:cNvSpPr txBox="1"/>
+          <p:nvPr/>
+        </p:nvSpPr>
+        <p:spPr>
+          <a:xfrm>
+            <a:off x="457200" y="6583680"/>
+            <a:ext cx="7315200" cy="274320"/>
+          </a:xfrm>
+          <a:prstGeom prst="rect">
+            <a:avLst/>
+          </a:prstGeom>
+          <a:noFill/>
+        </p:spPr>
+        <p:txBody>
+          <a:bodyPr wrap="square" anchor="ctr" lIns="45720" rIns="45720" tIns="18288" bIns="18288">
+            <a:spAutoFit/>
+          </a:bodyPr>
+          <a:lstStyle/>
+          <a:p>
+            <a:pPr algn="l"/>
+            <a:r>
+              <a:rPr sz="1000" b="0">
+                <a:solidFill>
+                  <a:srgbClr val="FFFFFF"/>
+                </a:solidFill>
+                <a:latin typeface="Calibri"/>
+              </a:rPr>
+              <a:t>ForsaDrive  •  Final Year Project Defense  •  ATOMIC IT</a:t>
+            </a:r>
+          </a:p>
+        </p:txBody>
+      </p:sp>
+      <p:sp>
+        <p:nvSpPr>
+          <p:cNvPr id="11" name="TextBox 10"/>
+          <p:cNvSpPr txBox="1"/>
+          <p:nvPr/>
+        </p:nvSpPr>
+        <p:spPr>
+          <a:xfrm>
+            <a:off x="10515600" y="6583680"/>
+            <a:ext cx="1371600" cy="274320"/>
+          </a:xfrm>
+          <a:prstGeom prst="rect">
+            <a:avLst/>
+          </a:prstGeom>
+          <a:noFill/>
+        </p:spPr>
+        <p:txBody>
+          <a:bodyPr wrap="square" anchor="ctr" lIns="45720" rIns="45720" tIns="18288" bIns="18288">
+            <a:spAutoFit/>
+          </a:bodyPr>
+          <a:lstStyle/>
+          <a:p>
+            <a:pPr algn="r"/>
+            <a:r>
+              <a:rPr sz="1000" b="1">
+                <a:solidFill>
+                  <a:srgbClr val="E8B84B"/>
+                </a:solidFill>
+                <a:latin typeface="Calibri"/>
+              </a:rPr>
+              <a:t>D / 21</a:t>
+            </a:r>
+          </a:p>
+        </p:txBody>
+      </p:sp>
+    </p:spTree>
+  </p:cSld>
+  <p:clrMapOvr>
+    <a:masterClrMapping/>
+  </p:clrMapOvr>
+</p:sld>
+</file>
+
+<file path=ppt/slides/slide27.xml><?xml version="1.0" encoding="utf-8"?>
+<p:sld xmlns:a="http://schemas.openxmlformats.org/drawingml/2006/main" xmlns:p="http://schemas.openxmlformats.org/presentationml/2006/main" xmlns:r="http://schemas.openxmlformats.org/officeDocument/2006/relationships">
+  <p:cSld>
+    <p:spTree>
+      <p:nvGrpSpPr>
+        <p:cNvPr id="1" name=""/>
+        <p:cNvGrpSpPr/>
+        <p:nvPr/>
+      </p:nvGrpSpPr>
+      <p:grpSpPr/>
+      <p:sp>
+        <p:nvSpPr>
+          <p:cNvPr id="2" name="Rectangle 1"/>
+          <p:cNvSpPr/>
+          <p:nvPr/>
+        </p:nvSpPr>
+        <p:spPr>
+          <a:xfrm>
+            <a:off x="0" y="0"/>
+            <a:ext cx="12191695" cy="6858000"/>
+          </a:xfrm>
+          <a:prstGeom prst="rect">
+            <a:avLst/>
+          </a:prstGeom>
+          <a:solidFill>
+            <a:srgbClr val="FFFFFF"/>
+          </a:solidFill>
+          <a:ln>
+            <a:noFill/>
+          </a:ln>
+          <a:effectLst/>
+        </p:spPr>
+        <p:style>
+          <a:lnRef idx="1">
+            <a:schemeClr val="accent1"/>
+          </a:lnRef>
+          <a:fillRef idx="3">
+            <a:schemeClr val="accent1"/>
+          </a:fillRef>
+          <a:effectRef idx="2">
+            <a:schemeClr val="accent1"/>
+          </a:effectRef>
+          <a:fontRef idx="minor">
+            <a:schemeClr val="lt1"/>
+          </a:fontRef>
+        </p:style>
+        <p:txBody>
+          <a:bodyPr rtlCol="0" anchor="ctr"/>
+          <a:lstStyle/>
+          <a:p>
+            <a:pPr algn="ctr"/>
+          </a:p>
+        </p:txBody>
+      </p:sp>
+      <p:sp>
+        <p:nvSpPr>
+          <p:cNvPr id="3" name="Rectangle 2"/>
+          <p:cNvSpPr/>
+          <p:nvPr/>
+        </p:nvSpPr>
+        <p:spPr>
+          <a:xfrm>
+            <a:off x="0" y="0"/>
+            <a:ext cx="12191695" cy="1097280"/>
+          </a:xfrm>
+          <a:prstGeom prst="rect">
+            <a:avLst/>
+          </a:prstGeom>
+          <a:solidFill>
+            <a:srgbClr val="0A1628"/>
+          </a:solidFill>
+          <a:ln>
+            <a:noFill/>
+          </a:ln>
+          <a:effectLst/>
+        </p:spPr>
+        <p:style>
+          <a:lnRef idx="1">
+            <a:schemeClr val="accent1"/>
+          </a:lnRef>
+          <a:fillRef idx="3">
+            <a:schemeClr val="accent1"/>
+          </a:fillRef>
+          <a:effectRef idx="2">
+            <a:schemeClr val="accent1"/>
+          </a:effectRef>
+          <a:fontRef idx="minor">
+            <a:schemeClr val="lt1"/>
+          </a:fontRef>
+        </p:style>
+        <p:txBody>
+          <a:bodyPr rtlCol="0" anchor="ctr"/>
+          <a:lstStyle/>
+          <a:p>
+            <a:pPr algn="ctr"/>
+          </a:p>
+        </p:txBody>
+      </p:sp>
+      <p:sp>
+        <p:nvSpPr>
+          <p:cNvPr id="4" name="Rectangle 3"/>
+          <p:cNvSpPr/>
+          <p:nvPr/>
+        </p:nvSpPr>
+        <p:spPr>
+          <a:xfrm>
+            <a:off x="0" y="1097280"/>
+            <a:ext cx="12191695" cy="54864"/>
+          </a:xfrm>
+          <a:prstGeom prst="rect">
+            <a:avLst/>
+          </a:prstGeom>
+          <a:solidFill>
+            <a:srgbClr val="E8B84B"/>
+          </a:solidFill>
+          <a:ln>
+            <a:noFill/>
+          </a:ln>
+          <a:effectLst/>
+        </p:spPr>
+        <p:style>
+          <a:lnRef idx="1">
+            <a:schemeClr val="accent1"/>
+          </a:lnRef>
+          <a:fillRef idx="3">
+            <a:schemeClr val="accent1"/>
+          </a:fillRef>
+          <a:effectRef idx="2">
+            <a:schemeClr val="accent1"/>
+          </a:effectRef>
+          <a:fontRef idx="minor">
+            <a:schemeClr val="lt1"/>
+          </a:fontRef>
+        </p:style>
+        <p:txBody>
+          <a:bodyPr rtlCol="0" anchor="ctr"/>
+          <a:lstStyle/>
+          <a:p>
+            <a:pPr algn="ctr"/>
+          </a:p>
+        </p:txBody>
+      </p:sp>
+      <p:sp>
+        <p:nvSpPr>
+          <p:cNvPr id="5" name="TextBox 4"/>
+          <p:cNvSpPr txBox="1"/>
+          <p:nvPr/>
+        </p:nvSpPr>
+        <p:spPr>
+          <a:xfrm>
+            <a:off x="457200" y="164592"/>
+            <a:ext cx="7315200" cy="320040"/>
+          </a:xfrm>
+          <a:prstGeom prst="rect">
+            <a:avLst/>
+          </a:prstGeom>
+          <a:noFill/>
+        </p:spPr>
+        <p:txBody>
+          <a:bodyPr wrap="square" anchor="t" lIns="45720" rIns="45720" tIns="18288" bIns="18288">
+            <a:spAutoFit/>
+          </a:bodyPr>
+          <a:lstStyle/>
+          <a:p>
+            <a:pPr algn="l"/>
+            <a:r>
+              <a:rPr sz="1100" b="1">
+                <a:solidFill>
+                  <a:srgbClr val="E8B84B"/>
+                </a:solidFill>
+                <a:latin typeface="Calibri"/>
+              </a:rPr>
+              <a:t>BACKUP E · BUSINESS RULE</a:t>
+            </a:r>
+          </a:p>
+        </p:txBody>
+      </p:sp>
+      <p:sp>
+        <p:nvSpPr>
+          <p:cNvPr id="6" name="TextBox 5"/>
+          <p:cNvSpPr txBox="1"/>
+          <p:nvPr/>
+        </p:nvSpPr>
+        <p:spPr>
+          <a:xfrm>
+            <a:off x="457200" y="457200"/>
+            <a:ext cx="10972800" cy="640080"/>
+          </a:xfrm>
+          <a:prstGeom prst="rect">
+            <a:avLst/>
+          </a:prstGeom>
+          <a:noFill/>
+        </p:spPr>
+        <p:txBody>
+          <a:bodyPr wrap="square" anchor="t" lIns="45720" rIns="45720" tIns="18288" bIns="18288">
+            <a:spAutoFit/>
+          </a:bodyPr>
+          <a:lstStyle/>
+          <a:p>
+            <a:pPr algn="l"/>
+            <a:r>
+              <a:rPr sz="2600" b="1">
+                <a:solidFill>
+                  <a:srgbClr val="FFFFFF"/>
+                </a:solidFill>
+                <a:latin typeface="Calibri"/>
+              </a:rPr>
+              <a:t>Price computation pipeline</a:t>
+            </a:r>
+          </a:p>
+        </p:txBody>
+      </p:sp>
+      <p:sp>
+        <p:nvSpPr>
+          <p:cNvPr id="7" name="TextBox 6"/>
+          <p:cNvSpPr txBox="1"/>
+          <p:nvPr/>
+        </p:nvSpPr>
+        <p:spPr>
+          <a:xfrm>
+            <a:off x="640080" y="1463040"/>
+            <a:ext cx="10972800" cy="457200"/>
+          </a:xfrm>
+          <a:prstGeom prst="rect">
+            <a:avLst/>
+          </a:prstGeom>
+          <a:noFill/>
+        </p:spPr>
+        <p:txBody>
+          <a:bodyPr wrap="square" anchor="t" lIns="45720" rIns="45720" tIns="18288" bIns="18288">
+            <a:spAutoFit/>
+          </a:bodyPr>
+          <a:lstStyle/>
+          <a:p>
+            <a:pPr algn="l"/>
+            <a:r>
+              <a:rPr sz="1400" b="0">
+                <a:solidFill>
+                  <a:srgbClr val="1F2A3D"/>
+                </a:solidFill>
+                <a:latin typeface="Calibri"/>
+              </a:rPr>
+              <a:t>Order matters. Reviewed and validated with the supervising engineer.</a:t>
+            </a:r>
+          </a:p>
+        </p:txBody>
+      </p:sp>
+      <p:sp>
+        <p:nvSpPr>
+          <p:cNvPr id="8" name="Rectangle 7"/>
+          <p:cNvSpPr/>
+          <p:nvPr/>
+        </p:nvSpPr>
+        <p:spPr>
+          <a:xfrm>
+            <a:off x="914400" y="2194560"/>
+            <a:ext cx="457200" cy="457200"/>
+          </a:xfrm>
+          <a:prstGeom prst="rect">
+            <a:avLst/>
+          </a:prstGeom>
+          <a:solidFill>
+            <a:srgbClr val="E8B84B"/>
+          </a:solidFill>
+          <a:ln>
+            <a:noFill/>
+          </a:ln>
+          <a:effectLst/>
+        </p:spPr>
+        <p:style>
+          <a:lnRef idx="1">
+            <a:schemeClr val="accent1"/>
+          </a:lnRef>
+          <a:fillRef idx="3">
+            <a:schemeClr val="accent1"/>
+          </a:fillRef>
+          <a:effectRef idx="2">
+            <a:schemeClr val="accent1"/>
+          </a:effectRef>
+          <a:fontRef idx="minor">
+            <a:schemeClr val="lt1"/>
+          </a:fontRef>
+        </p:style>
+        <p:txBody>
+          <a:bodyPr rtlCol="0" anchor="ctr"/>
+          <a:lstStyle/>
+          <a:p>
+            <a:pPr algn="ctr"/>
+          </a:p>
+        </p:txBody>
+      </p:sp>
+      <p:sp>
+        <p:nvSpPr>
+          <p:cNvPr id="9" name="TextBox 8"/>
+          <p:cNvSpPr txBox="1"/>
+          <p:nvPr/>
+        </p:nvSpPr>
+        <p:spPr>
+          <a:xfrm>
+            <a:off x="914400" y="2194560"/>
+            <a:ext cx="457200" cy="457200"/>
+          </a:xfrm>
+          <a:prstGeom prst="rect">
+            <a:avLst/>
+          </a:prstGeom>
+          <a:noFill/>
+        </p:spPr>
+        <p:txBody>
+          <a:bodyPr wrap="square" anchor="ctr" lIns="45720" rIns="45720" tIns="18288" bIns="18288">
+            <a:spAutoFit/>
+          </a:bodyPr>
+          <a:lstStyle/>
+          <a:p>
+            <a:pPr algn="ctr"/>
+            <a:r>
+              <a:rPr sz="1600" b="1">
+                <a:solidFill>
+                  <a:srgbClr val="0A1628"/>
+                </a:solidFill>
+                <a:latin typeface="Calibri"/>
+              </a:rPr>
+              <a:t>1</a:t>
+            </a:r>
+          </a:p>
+        </p:txBody>
+      </p:sp>
+      <p:sp>
+        <p:nvSpPr>
+          <p:cNvPr id="10" name="TextBox 9"/>
+          <p:cNvSpPr txBox="1"/>
+          <p:nvPr/>
+        </p:nvSpPr>
+        <p:spPr>
+          <a:xfrm>
+            <a:off x="1554480" y="2212848"/>
+            <a:ext cx="2743200" cy="320040"/>
+          </a:xfrm>
+          <a:prstGeom prst="rect">
+            <a:avLst/>
+          </a:prstGeom>
+          <a:noFill/>
+        </p:spPr>
+        <p:txBody>
+          <a:bodyPr wrap="square" anchor="t" lIns="45720" rIns="45720" tIns="18288" bIns="18288">
+            <a:spAutoFit/>
+          </a:bodyPr>
+          <a:lstStyle/>
+          <a:p>
+            <a:pPr algn="l"/>
+            <a:r>
+              <a:rPr sz="1400" b="1">
+                <a:solidFill>
+                  <a:srgbClr val="0A1628"/>
+                </a:solidFill>
+                <a:latin typeface="Calibri"/>
+              </a:rPr>
+              <a:t>base price</a:t>
+            </a:r>
+          </a:p>
+        </p:txBody>
+      </p:sp>
+      <p:sp>
+        <p:nvSpPr>
+          <p:cNvPr id="11" name="TextBox 10"/>
+          <p:cNvSpPr txBox="1"/>
+          <p:nvPr/>
+        </p:nvSpPr>
+        <p:spPr>
+          <a:xfrm>
+            <a:off x="4572000" y="2240280"/>
+            <a:ext cx="6858000" cy="365760"/>
+          </a:xfrm>
+          <a:prstGeom prst="rect">
+            <a:avLst/>
+          </a:prstGeom>
+          <a:noFill/>
+        </p:spPr>
+        <p:txBody>
+          <a:bodyPr wrap="square" anchor="t" lIns="45720" rIns="45720" tIns="18288" bIns="18288">
+            <a:spAutoFit/>
+          </a:bodyPr>
+          <a:lstStyle/>
+          <a:p>
+            <a:pPr algn="l"/>
+            <a:r>
+              <a:rPr sz="1300" b="0">
+                <a:solidFill>
+                  <a:srgbClr val="1F2A3D"/>
+                </a:solidFill>
+                <a:latin typeface="Consolas"/>
+              </a:rPr>
+              <a:t>price_per_seat × seats_booked</a:t>
+            </a:r>
+          </a:p>
+        </p:txBody>
+      </p:sp>
+      <p:sp>
+        <p:nvSpPr>
+          <p:cNvPr id="12" name="Rectangle 11"/>
+          <p:cNvSpPr/>
+          <p:nvPr/>
+        </p:nvSpPr>
+        <p:spPr>
+          <a:xfrm>
+            <a:off x="914400" y="2834640"/>
+            <a:ext cx="457200" cy="457200"/>
+          </a:xfrm>
+          <a:prstGeom prst="rect">
+            <a:avLst/>
+          </a:prstGeom>
+          <a:solidFill>
+            <a:srgbClr val="E8B84B"/>
+          </a:solidFill>
+          <a:ln>
+            <a:noFill/>
+          </a:ln>
+          <a:effectLst/>
+        </p:spPr>
+        <p:style>
+          <a:lnRef idx="1">
+            <a:schemeClr val="accent1"/>
+          </a:lnRef>
+          <a:fillRef idx="3">
+            <a:schemeClr val="accent1"/>
+          </a:fillRef>
+          <a:effectRef idx="2">
+            <a:schemeClr val="accent1"/>
+          </a:effectRef>
+          <a:fontRef idx="minor">
+            <a:schemeClr val="lt1"/>
+          </a:fontRef>
+        </p:style>
+        <p:txBody>
+          <a:bodyPr rtlCol="0" anchor="ctr"/>
+          <a:lstStyle/>
+          <a:p>
+            <a:pPr algn="ctr"/>
+          </a:p>
+        </p:txBody>
+      </p:sp>
+      <p:sp>
+        <p:nvSpPr>
+          <p:cNvPr id="13" name="TextBox 12"/>
+          <p:cNvSpPr txBox="1"/>
+          <p:nvPr/>
+        </p:nvSpPr>
+        <p:spPr>
+          <a:xfrm>
+            <a:off x="914400" y="2834640"/>
+            <a:ext cx="457200" cy="457200"/>
+          </a:xfrm>
+          <a:prstGeom prst="rect">
+            <a:avLst/>
+          </a:prstGeom>
+          <a:noFill/>
+        </p:spPr>
+        <p:txBody>
+          <a:bodyPr wrap="square" anchor="ctr" lIns="45720" rIns="45720" tIns="18288" bIns="18288">
+            <a:spAutoFit/>
+          </a:bodyPr>
+          <a:lstStyle/>
+          <a:p>
+            <a:pPr algn="ctr"/>
+            <a:r>
+              <a:rPr sz="1600" b="1">
+                <a:solidFill>
+                  <a:srgbClr val="0A1628"/>
+                </a:solidFill>
+                <a:latin typeface="Calibri"/>
+              </a:rPr>
+              <a:t>2</a:t>
+            </a:r>
+          </a:p>
+        </p:txBody>
+      </p:sp>
+      <p:sp>
+        <p:nvSpPr>
+          <p:cNvPr id="14" name="TextBox 13"/>
+          <p:cNvSpPr txBox="1"/>
+          <p:nvPr/>
+        </p:nvSpPr>
+        <p:spPr>
+          <a:xfrm>
+            <a:off x="1554480" y="2852928"/>
+            <a:ext cx="2743200" cy="320040"/>
+          </a:xfrm>
+          <a:prstGeom prst="rect">
+            <a:avLst/>
+          </a:prstGeom>
+          <a:noFill/>
+        </p:spPr>
+        <p:txBody>
+          <a:bodyPr wrap="square" anchor="t" lIns="45720" rIns="45720" tIns="18288" bIns="18288">
+            <a:spAutoFit/>
+          </a:bodyPr>
+          <a:lstStyle/>
+          <a:p>
+            <a:pPr algn="l"/>
+            <a:r>
+              <a:rPr sz="1400" b="1">
+                <a:solidFill>
+                  <a:srgbClr val="0A1628"/>
+                </a:solidFill>
+                <a:latin typeface="Calibri"/>
+              </a:rPr>
+              <a:t>student discount</a:t>
+            </a:r>
+          </a:p>
+        </p:txBody>
+      </p:sp>
+      <p:sp>
+        <p:nvSpPr>
+          <p:cNvPr id="15" name="TextBox 14"/>
+          <p:cNvSpPr txBox="1"/>
+          <p:nvPr/>
+        </p:nvSpPr>
+        <p:spPr>
+          <a:xfrm>
+            <a:off x="4572000" y="2880360"/>
+            <a:ext cx="6858000" cy="365760"/>
+          </a:xfrm>
+          <a:prstGeom prst="rect">
+            <a:avLst/>
+          </a:prstGeom>
+          <a:noFill/>
+        </p:spPr>
+        <p:txBody>
+          <a:bodyPr wrap="square" anchor="t" lIns="45720" rIns="45720" tIns="18288" bIns="18288">
+            <a:spAutoFit/>
+          </a:bodyPr>
+          <a:lstStyle/>
+          <a:p>
+            <a:pPr algn="l"/>
+            <a:r>
+              <a:rPr sz="1300" b="0">
+                <a:solidFill>
+                  <a:srgbClr val="1F2A3D"/>
+                </a:solidFill>
+                <a:latin typeface="Consolas"/>
+              </a:rPr>
+              <a:t>if is_student_verified: price × 0.5</a:t>
+            </a:r>
+          </a:p>
+        </p:txBody>
+      </p:sp>
+      <p:sp>
+        <p:nvSpPr>
+          <p:cNvPr id="16" name="Rectangle 15"/>
+          <p:cNvSpPr/>
+          <p:nvPr/>
+        </p:nvSpPr>
+        <p:spPr>
+          <a:xfrm>
+            <a:off x="914400" y="3474720"/>
+            <a:ext cx="457200" cy="457200"/>
+          </a:xfrm>
+          <a:prstGeom prst="rect">
+            <a:avLst/>
+          </a:prstGeom>
+          <a:solidFill>
+            <a:srgbClr val="E8B84B"/>
+          </a:solidFill>
+          <a:ln>
+            <a:noFill/>
+          </a:ln>
+          <a:effectLst/>
+        </p:spPr>
+        <p:style>
+          <a:lnRef idx="1">
+            <a:schemeClr val="accent1"/>
+          </a:lnRef>
+          <a:fillRef idx="3">
+            <a:schemeClr val="accent1"/>
+          </a:fillRef>
+          <a:effectRef idx="2">
+            <a:schemeClr val="accent1"/>
+          </a:effectRef>
+          <a:fontRef idx="minor">
+            <a:schemeClr val="lt1"/>
+          </a:fontRef>
+        </p:style>
+        <p:txBody>
+          <a:bodyPr rtlCol="0" anchor="ctr"/>
+          <a:lstStyle/>
+          <a:p>
+            <a:pPr algn="ctr"/>
+          </a:p>
+        </p:txBody>
+      </p:sp>
+      <p:sp>
+        <p:nvSpPr>
+          <p:cNvPr id="17" name="TextBox 16"/>
+          <p:cNvSpPr txBox="1"/>
+          <p:nvPr/>
+        </p:nvSpPr>
+        <p:spPr>
+          <a:xfrm>
+            <a:off x="914400" y="3474720"/>
+            <a:ext cx="457200" cy="457200"/>
+          </a:xfrm>
+          <a:prstGeom prst="rect">
+            <a:avLst/>
+          </a:prstGeom>
+          <a:noFill/>
+        </p:spPr>
+        <p:txBody>
+          <a:bodyPr wrap="square" anchor="ctr" lIns="45720" rIns="45720" tIns="18288" bIns="18288">
+            <a:spAutoFit/>
+          </a:bodyPr>
+          <a:lstStyle/>
+          <a:p>
+            <a:pPr algn="ctr"/>
+            <a:r>
+              <a:rPr sz="1600" b="1">
+                <a:solidFill>
+                  <a:srgbClr val="0A1628"/>
+                </a:solidFill>
+                <a:latin typeface="Calibri"/>
+              </a:rPr>
+              <a:t>3</a:t>
+            </a:r>
+          </a:p>
+        </p:txBody>
+      </p:sp>
+      <p:sp>
+        <p:nvSpPr>
+          <p:cNvPr id="18" name="TextBox 17"/>
+          <p:cNvSpPr txBox="1"/>
+          <p:nvPr/>
+        </p:nvSpPr>
+        <p:spPr>
+          <a:xfrm>
+            <a:off x="1554480" y="3493008"/>
+            <a:ext cx="2743200" cy="320040"/>
+          </a:xfrm>
+          <a:prstGeom prst="rect">
+            <a:avLst/>
+          </a:prstGeom>
+          <a:noFill/>
+        </p:spPr>
+        <p:txBody>
+          <a:bodyPr wrap="square" anchor="t" lIns="45720" rIns="45720" tIns="18288" bIns="18288">
+            <a:spAutoFit/>
+          </a:bodyPr>
+          <a:lstStyle/>
+          <a:p>
+            <a:pPr algn="l"/>
+            <a:r>
+              <a:rPr sz="1400" b="1">
+                <a:solidFill>
+                  <a:srgbClr val="0A1628"/>
+                </a:solidFill>
+                <a:latin typeface="Calibri"/>
+              </a:rPr>
+              <a:t>promo code</a:t>
+            </a:r>
+          </a:p>
+        </p:txBody>
+      </p:sp>
+      <p:sp>
+        <p:nvSpPr>
+          <p:cNvPr id="19" name="TextBox 18"/>
+          <p:cNvSpPr txBox="1"/>
+          <p:nvPr/>
+        </p:nvSpPr>
+        <p:spPr>
+          <a:xfrm>
+            <a:off x="4572000" y="3520440"/>
+            <a:ext cx="6858000" cy="365760"/>
+          </a:xfrm>
+          <a:prstGeom prst="rect">
+            <a:avLst/>
+          </a:prstGeom>
+          <a:noFill/>
+        </p:spPr>
+        <p:txBody>
+          <a:bodyPr wrap="square" anchor="t" lIns="45720" rIns="45720" tIns="18288" bIns="18288">
+            <a:spAutoFit/>
+          </a:bodyPr>
+          <a:lstStyle/>
+          <a:p>
+            <a:pPr algn="l"/>
+            <a:r>
+              <a:rPr sz="1300" b="0">
+                <a:solidFill>
+                  <a:srgbClr val="1F2A3D"/>
+                </a:solidFill>
+                <a:latin typeface="Consolas"/>
+              </a:rPr>
+              <a:t>if org code valid: price × (1 − pct/100)</a:t>
+            </a:r>
+          </a:p>
+        </p:txBody>
+      </p:sp>
+      <p:sp>
+        <p:nvSpPr>
+          <p:cNvPr id="20" name="Rectangle 19"/>
+          <p:cNvSpPr/>
+          <p:nvPr/>
+        </p:nvSpPr>
+        <p:spPr>
+          <a:xfrm>
+            <a:off x="914400" y="4114800"/>
+            <a:ext cx="457200" cy="457200"/>
+          </a:xfrm>
+          <a:prstGeom prst="rect">
+            <a:avLst/>
+          </a:prstGeom>
+          <a:solidFill>
+            <a:srgbClr val="E8B84B"/>
+          </a:solidFill>
+          <a:ln>
+            <a:noFill/>
+          </a:ln>
+          <a:effectLst/>
+        </p:spPr>
+        <p:style>
+          <a:lnRef idx="1">
+            <a:schemeClr val="accent1"/>
+          </a:lnRef>
+          <a:fillRef idx="3">
+            <a:schemeClr val="accent1"/>
+          </a:fillRef>
+          <a:effectRef idx="2">
+            <a:schemeClr val="accent1"/>
+          </a:effectRef>
+          <a:fontRef idx="minor">
+            <a:schemeClr val="lt1"/>
+          </a:fontRef>
+        </p:style>
+        <p:txBody>
+          <a:bodyPr rtlCol="0" anchor="ctr"/>
+          <a:lstStyle/>
+          <a:p>
+            <a:pPr algn="ctr"/>
+          </a:p>
+        </p:txBody>
+      </p:sp>
+      <p:sp>
+        <p:nvSpPr>
+          <p:cNvPr id="21" name="TextBox 20"/>
+          <p:cNvSpPr txBox="1"/>
+          <p:nvPr/>
+        </p:nvSpPr>
+        <p:spPr>
+          <a:xfrm>
+            <a:off x="914400" y="4114800"/>
+            <a:ext cx="457200" cy="457200"/>
+          </a:xfrm>
+          <a:prstGeom prst="rect">
+            <a:avLst/>
+          </a:prstGeom>
+          <a:noFill/>
+        </p:spPr>
+        <p:txBody>
+          <a:bodyPr wrap="square" anchor="ctr" lIns="45720" rIns="45720" tIns="18288" bIns="18288">
+            <a:spAutoFit/>
+          </a:bodyPr>
+          <a:lstStyle/>
+          <a:p>
+            <a:pPr algn="ctr"/>
+            <a:r>
+              <a:rPr sz="1600" b="1">
+                <a:solidFill>
+                  <a:srgbClr val="0A1628"/>
+                </a:solidFill>
+                <a:latin typeface="Calibri"/>
+              </a:rPr>
+              <a:t>4</a:t>
+            </a:r>
+          </a:p>
+        </p:txBody>
+      </p:sp>
+      <p:sp>
+        <p:nvSpPr>
+          <p:cNvPr id="22" name="TextBox 21"/>
+          <p:cNvSpPr txBox="1"/>
+          <p:nvPr/>
+        </p:nvSpPr>
+        <p:spPr>
+          <a:xfrm>
+            <a:off x="1554480" y="4133088"/>
+            <a:ext cx="2743200" cy="320040"/>
+          </a:xfrm>
+          <a:prstGeom prst="rect">
+            <a:avLst/>
+          </a:prstGeom>
+          <a:noFill/>
+        </p:spPr>
+        <p:txBody>
+          <a:bodyPr wrap="square" anchor="t" lIns="45720" rIns="45720" tIns="18288" bIns="18288">
+            <a:spAutoFit/>
+          </a:bodyPr>
+          <a:lstStyle/>
+          <a:p>
+            <a:pPr algn="l"/>
+            <a:r>
+              <a:rPr sz="1400" b="1">
+                <a:solidFill>
+                  <a:srgbClr val="0A1628"/>
+                </a:solidFill>
+                <a:latin typeface="Calibri"/>
+              </a:rPr>
+              <a:t>prepayment</a:t>
+            </a:r>
+          </a:p>
+        </p:txBody>
+      </p:sp>
+      <p:sp>
+        <p:nvSpPr>
+          <p:cNvPr id="23" name="TextBox 22"/>
+          <p:cNvSpPr txBox="1"/>
+          <p:nvPr/>
+        </p:nvSpPr>
+        <p:spPr>
+          <a:xfrm>
+            <a:off x="4572000" y="4160520"/>
+            <a:ext cx="6858000" cy="365760"/>
+          </a:xfrm>
+          <a:prstGeom prst="rect">
+            <a:avLst/>
+          </a:prstGeom>
+          <a:noFill/>
+        </p:spPr>
+        <p:txBody>
+          <a:bodyPr wrap="square" anchor="t" lIns="45720" rIns="45720" tIns="18288" bIns="18288">
+            <a:spAutoFit/>
+          </a:bodyPr>
+          <a:lstStyle/>
+          <a:p>
+            <a:pPr algn="l"/>
+            <a:r>
+              <a:rPr sz="1300" b="0">
+                <a:solidFill>
+                  <a:srgbClr val="1F2A3D"/>
+                </a:solidFill>
+                <a:latin typeface="Consolas"/>
+              </a:rPr>
+              <a:t>prepayment = price × 0.5</a:t>
+            </a:r>
+          </a:p>
+        </p:txBody>
+      </p:sp>
+      <p:sp>
+        <p:nvSpPr>
+          <p:cNvPr id="24" name="Rectangle 23"/>
+          <p:cNvSpPr/>
+          <p:nvPr/>
+        </p:nvSpPr>
+        <p:spPr>
+          <a:xfrm>
+            <a:off x="914400" y="4754880"/>
+            <a:ext cx="457200" cy="457200"/>
+          </a:xfrm>
+          <a:prstGeom prst="rect">
+            <a:avLst/>
+          </a:prstGeom>
+          <a:solidFill>
+            <a:srgbClr val="E8B84B"/>
+          </a:solidFill>
+          <a:ln>
+            <a:noFill/>
+          </a:ln>
+          <a:effectLst/>
+        </p:spPr>
+        <p:style>
+          <a:lnRef idx="1">
+            <a:schemeClr val="accent1"/>
+          </a:lnRef>
+          <a:fillRef idx="3">
+            <a:schemeClr val="accent1"/>
+          </a:fillRef>
+          <a:effectRef idx="2">
+            <a:schemeClr val="accent1"/>
+          </a:effectRef>
+          <a:fontRef idx="minor">
+            <a:schemeClr val="lt1"/>
+          </a:fontRef>
+        </p:style>
+        <p:txBody>
+          <a:bodyPr rtlCol="0" anchor="ctr"/>
+          <a:lstStyle/>
+          <a:p>
+            <a:pPr algn="ctr"/>
+          </a:p>
+        </p:txBody>
+      </p:sp>
+      <p:sp>
+        <p:nvSpPr>
+          <p:cNvPr id="25" name="TextBox 24"/>
+          <p:cNvSpPr txBox="1"/>
+          <p:nvPr/>
+        </p:nvSpPr>
+        <p:spPr>
+          <a:xfrm>
+            <a:off x="914400" y="4754880"/>
+            <a:ext cx="457200" cy="457200"/>
+          </a:xfrm>
+          <a:prstGeom prst="rect">
+            <a:avLst/>
+          </a:prstGeom>
+          <a:noFill/>
+        </p:spPr>
+        <p:txBody>
+          <a:bodyPr wrap="square" anchor="ctr" lIns="45720" rIns="45720" tIns="18288" bIns="18288">
+            <a:spAutoFit/>
+          </a:bodyPr>
+          <a:lstStyle/>
+          <a:p>
+            <a:pPr algn="ctr"/>
+            <a:r>
+              <a:rPr sz="1600" b="1">
+                <a:solidFill>
+                  <a:srgbClr val="0A1628"/>
+                </a:solidFill>
+                <a:latin typeface="Calibri"/>
+              </a:rPr>
+              <a:t>5</a:t>
+            </a:r>
+          </a:p>
+        </p:txBody>
+      </p:sp>
+      <p:sp>
+        <p:nvSpPr>
+          <p:cNvPr id="26" name="TextBox 25"/>
+          <p:cNvSpPr txBox="1"/>
+          <p:nvPr/>
+        </p:nvSpPr>
+        <p:spPr>
+          <a:xfrm>
+            <a:off x="1554480" y="4773168"/>
+            <a:ext cx="2743200" cy="320040"/>
+          </a:xfrm>
+          <a:prstGeom prst="rect">
+            <a:avLst/>
+          </a:prstGeom>
+          <a:noFill/>
+        </p:spPr>
+        <p:txBody>
+          <a:bodyPr wrap="square" anchor="t" lIns="45720" rIns="45720" tIns="18288" bIns="18288">
+            <a:spAutoFit/>
+          </a:bodyPr>
+          <a:lstStyle/>
+          <a:p>
+            <a:pPr algn="l"/>
+            <a:r>
+              <a:rPr sz="1400" b="1">
+                <a:solidFill>
+                  <a:srgbClr val="0A1628"/>
+                </a:solidFill>
+                <a:latin typeface="Calibri"/>
+              </a:rPr>
+              <a:t>persist</a:t>
+            </a:r>
+          </a:p>
+        </p:txBody>
+      </p:sp>
+      <p:sp>
+        <p:nvSpPr>
+          <p:cNvPr id="27" name="TextBox 26"/>
+          <p:cNvSpPr txBox="1"/>
+          <p:nvPr/>
+        </p:nvSpPr>
+        <p:spPr>
+          <a:xfrm>
+            <a:off x="4572000" y="4800600"/>
+            <a:ext cx="6858000" cy="365760"/>
+          </a:xfrm>
+          <a:prstGeom prst="rect">
+            <a:avLst/>
+          </a:prstGeom>
+          <a:noFill/>
+        </p:spPr>
+        <p:txBody>
+          <a:bodyPr wrap="square" anchor="t" lIns="45720" rIns="45720" tIns="18288" bIns="18288">
+            <a:spAutoFit/>
+          </a:bodyPr>
+          <a:lstStyle/>
+          <a:p>
+            <a:pPr algn="l"/>
+            <a:r>
+              <a:rPr sz="1300" b="0">
+                <a:solidFill>
+                  <a:srgbClr val="1F2A3D"/>
+                </a:solidFill>
+                <a:latin typeface="Consolas"/>
+              </a:rPr>
+              <a:t>store all 5 values on the booking row</a:t>
+            </a:r>
+          </a:p>
+        </p:txBody>
+      </p:sp>
+      <p:sp>
+        <p:nvSpPr>
+          <p:cNvPr id="28" name="Rectangle 27"/>
+          <p:cNvSpPr/>
+          <p:nvPr/>
+        </p:nvSpPr>
+        <p:spPr>
+          <a:xfrm>
+            <a:off x="640080" y="5760720"/>
+            <a:ext cx="10972800" cy="457200"/>
+          </a:xfrm>
+          <a:prstGeom prst="rect">
+            <a:avLst/>
+          </a:prstGeom>
+          <a:solidFill>
+            <a:srgbClr val="FFF3CD"/>
+          </a:solidFill>
+          <a:ln>
+            <a:noFill/>
+          </a:ln>
+          <a:effectLst/>
+        </p:spPr>
+        <p:style>
+          <a:lnRef idx="1">
+            <a:schemeClr val="accent1"/>
+          </a:lnRef>
+          <a:fillRef idx="3">
+            <a:schemeClr val="accent1"/>
+          </a:fillRef>
+          <a:effectRef idx="2">
+            <a:schemeClr val="accent1"/>
+          </a:effectRef>
+          <a:fontRef idx="minor">
+            <a:schemeClr val="lt1"/>
+          </a:fontRef>
+        </p:style>
+        <p:txBody>
+          <a:bodyPr rtlCol="0" anchor="ctr"/>
+          <a:lstStyle/>
+          <a:p>
+            <a:pPr algn="ctr"/>
+          </a:p>
+        </p:txBody>
+      </p:sp>
+      <p:sp>
+        <p:nvSpPr>
+          <p:cNvPr id="29" name="TextBox 28"/>
+          <p:cNvSpPr txBox="1"/>
+          <p:nvPr/>
+        </p:nvSpPr>
+        <p:spPr>
+          <a:xfrm>
+            <a:off x="777240" y="5806440"/>
+            <a:ext cx="10789920" cy="365760"/>
+          </a:xfrm>
+          <a:prstGeom prst="rect">
+            <a:avLst/>
+          </a:prstGeom>
+          <a:noFill/>
+        </p:spPr>
+        <p:txBody>
+          <a:bodyPr wrap="square" anchor="ctr" lIns="45720" rIns="45720" tIns="18288" bIns="18288">
+            <a:spAutoFit/>
+          </a:bodyPr>
+          <a:lstStyle/>
+          <a:p>
+            <a:pPr algn="l"/>
+            <a:r>
+              <a:rPr sz="1200" b="1">
+                <a:solidFill>
+                  <a:srgbClr val="0A1628"/>
+                </a:solidFill>
+                <a:latin typeface="Calibri"/>
+              </a:rPr>
+              <a:t>Bug caught at Sprint 3 review: steps 2 &amp; 3 were inverted. Fixed same evening, locked by a unit test.</a:t>
+            </a:r>
+          </a:p>
+        </p:txBody>
+      </p:sp>
+      <p:sp>
+        <p:nvSpPr>
+          <p:cNvPr id="30" name="Rectangle 29"/>
+          <p:cNvSpPr/>
+          <p:nvPr/>
+        </p:nvSpPr>
+        <p:spPr>
+          <a:xfrm>
+            <a:off x="0" y="6537960"/>
+            <a:ext cx="12191695" cy="320040"/>
+          </a:xfrm>
+          <a:prstGeom prst="rect">
+            <a:avLst/>
+          </a:prstGeom>
+          <a:solidFill>
+            <a:srgbClr val="0A1628"/>
+          </a:solidFill>
+          <a:ln>
+            <a:noFill/>
+          </a:ln>
+          <a:effectLst/>
+        </p:spPr>
+        <p:style>
+          <a:lnRef idx="1">
+            <a:schemeClr val="accent1"/>
+          </a:lnRef>
+          <a:fillRef idx="3">
+            <a:schemeClr val="accent1"/>
+          </a:fillRef>
+          <a:effectRef idx="2">
+            <a:schemeClr val="accent1"/>
+          </a:effectRef>
+          <a:fontRef idx="minor">
+            <a:schemeClr val="lt1"/>
+          </a:fontRef>
+        </p:style>
+        <p:txBody>
+          <a:bodyPr rtlCol="0" anchor="ctr"/>
+          <a:lstStyle/>
+          <a:p>
+            <a:pPr algn="ctr"/>
+          </a:p>
+        </p:txBody>
+      </p:sp>
+      <p:sp>
+        <p:nvSpPr>
+          <p:cNvPr id="31" name="TextBox 30"/>
+          <p:cNvSpPr txBox="1"/>
+          <p:nvPr/>
+        </p:nvSpPr>
+        <p:spPr>
+          <a:xfrm>
+            <a:off x="457200" y="6583680"/>
+            <a:ext cx="7315200" cy="274320"/>
+          </a:xfrm>
+          <a:prstGeom prst="rect">
+            <a:avLst/>
+          </a:prstGeom>
+          <a:noFill/>
+        </p:spPr>
+        <p:txBody>
+          <a:bodyPr wrap="square" anchor="ctr" lIns="45720" rIns="45720" tIns="18288" bIns="18288">
+            <a:spAutoFit/>
+          </a:bodyPr>
+          <a:lstStyle/>
+          <a:p>
+            <a:pPr algn="l"/>
+            <a:r>
+              <a:rPr sz="1000" b="0">
+                <a:solidFill>
+                  <a:srgbClr val="FFFFFF"/>
+                </a:solidFill>
+                <a:latin typeface="Calibri"/>
+              </a:rPr>
+              <a:t>ForsaDrive  •  Final Year Project Defense  •  ATOMIC IT</a:t>
+            </a:r>
+          </a:p>
+        </p:txBody>
+      </p:sp>
+      <p:sp>
+        <p:nvSpPr>
+          <p:cNvPr id="32" name="TextBox 31"/>
+          <p:cNvSpPr txBox="1"/>
+          <p:nvPr/>
+        </p:nvSpPr>
+        <p:spPr>
+          <a:xfrm>
+            <a:off x="10515600" y="6583680"/>
+            <a:ext cx="1371600" cy="274320"/>
+          </a:xfrm>
+          <a:prstGeom prst="rect">
+            <a:avLst/>
+          </a:prstGeom>
+          <a:noFill/>
+        </p:spPr>
+        <p:txBody>
+          <a:bodyPr wrap="square" anchor="ctr" lIns="45720" rIns="45720" tIns="18288" bIns="18288">
+            <a:spAutoFit/>
+          </a:bodyPr>
+          <a:lstStyle/>
+          <a:p>
+            <a:pPr algn="r"/>
+            <a:r>
+              <a:rPr sz="1000" b="1">
+                <a:solidFill>
+                  <a:srgbClr val="E8B84B"/>
+                </a:solidFill>
+                <a:latin typeface="Calibri"/>
+              </a:rPr>
+              <a:t>E / 21</a:t>
+            </a:r>
+          </a:p>
+        </p:txBody>
+      </p:sp>
+    </p:spTree>
+  </p:cSld>
+  <p:clrMapOvr>
+    <a:masterClrMapping/>
+  </p:clrMapOvr>
+</p:sld>
+</file>
+
+<file path=ppt/slides/slide28.xml><?xml version="1.0" encoding="utf-8"?>
+<p:sld xmlns:a="http://schemas.openxmlformats.org/drawingml/2006/main" xmlns:p="http://schemas.openxmlformats.org/presentationml/2006/main" xmlns:r="http://schemas.openxmlformats.org/officeDocument/2006/relationships">
+  <p:cSld>
+    <p:spTree>
+      <p:nvGrpSpPr>
+        <p:cNvPr id="1" name=""/>
+        <p:cNvGrpSpPr/>
+        <p:nvPr/>
+      </p:nvGrpSpPr>
+      <p:grpSpPr/>
+      <p:sp>
+        <p:nvSpPr>
+          <p:cNvPr id="2" name="Rectangle 1"/>
+          <p:cNvSpPr/>
+          <p:nvPr/>
+        </p:nvSpPr>
+        <p:spPr>
+          <a:xfrm>
+            <a:off x="0" y="0"/>
+            <a:ext cx="12191695" cy="6858000"/>
+          </a:xfrm>
+          <a:prstGeom prst="rect">
+            <a:avLst/>
+          </a:prstGeom>
+          <a:solidFill>
+            <a:srgbClr val="FFFFFF"/>
+          </a:solidFill>
+          <a:ln>
+            <a:noFill/>
+          </a:ln>
+          <a:effectLst/>
+        </p:spPr>
+        <p:style>
+          <a:lnRef idx="1">
+            <a:schemeClr val="accent1"/>
+          </a:lnRef>
+          <a:fillRef idx="3">
+            <a:schemeClr val="accent1"/>
+          </a:fillRef>
+          <a:effectRef idx="2">
+            <a:schemeClr val="accent1"/>
+          </a:effectRef>
+          <a:fontRef idx="minor">
+            <a:schemeClr val="lt1"/>
+          </a:fontRef>
+        </p:style>
+        <p:txBody>
+          <a:bodyPr rtlCol="0" anchor="ctr"/>
+          <a:lstStyle/>
+          <a:p>
+            <a:pPr algn="ctr"/>
+          </a:p>
+        </p:txBody>
+      </p:sp>
+      <p:sp>
+        <p:nvSpPr>
+          <p:cNvPr id="3" name="Rectangle 2"/>
+          <p:cNvSpPr/>
+          <p:nvPr/>
+        </p:nvSpPr>
+        <p:spPr>
+          <a:xfrm>
+            <a:off x="0" y="0"/>
+            <a:ext cx="12191695" cy="1097280"/>
+          </a:xfrm>
+          <a:prstGeom prst="rect">
+            <a:avLst/>
+          </a:prstGeom>
+          <a:solidFill>
+            <a:srgbClr val="0A1628"/>
+          </a:solidFill>
+          <a:ln>
+            <a:noFill/>
+          </a:ln>
+          <a:effectLst/>
+        </p:spPr>
+        <p:style>
+          <a:lnRef idx="1">
+            <a:schemeClr val="accent1"/>
+          </a:lnRef>
+          <a:fillRef idx="3">
+            <a:schemeClr val="accent1"/>
+          </a:fillRef>
+          <a:effectRef idx="2">
+            <a:schemeClr val="accent1"/>
+          </a:effectRef>
+          <a:fontRef idx="minor">
+            <a:schemeClr val="lt1"/>
+          </a:fontRef>
+        </p:style>
+        <p:txBody>
+          <a:bodyPr rtlCol="0" anchor="ctr"/>
+          <a:lstStyle/>
+          <a:p>
+            <a:pPr algn="ctr"/>
+          </a:p>
+        </p:txBody>
+      </p:sp>
+      <p:sp>
+        <p:nvSpPr>
+          <p:cNvPr id="4" name="Rectangle 3"/>
+          <p:cNvSpPr/>
+          <p:nvPr/>
+        </p:nvSpPr>
+        <p:spPr>
+          <a:xfrm>
+            <a:off x="0" y="1097280"/>
+            <a:ext cx="12191695" cy="54864"/>
+          </a:xfrm>
+          <a:prstGeom prst="rect">
+            <a:avLst/>
+          </a:prstGeom>
+          <a:solidFill>
+            <a:srgbClr val="E8B84B"/>
+          </a:solidFill>
+          <a:ln>
+            <a:noFill/>
+          </a:ln>
+          <a:effectLst/>
+        </p:spPr>
+        <p:style>
+          <a:lnRef idx="1">
+            <a:schemeClr val="accent1"/>
+          </a:lnRef>
+          <a:fillRef idx="3">
+            <a:schemeClr val="accent1"/>
+          </a:fillRef>
+          <a:effectRef idx="2">
+            <a:schemeClr val="accent1"/>
+          </a:effectRef>
+          <a:fontRef idx="minor">
+            <a:schemeClr val="lt1"/>
+          </a:fontRef>
+        </p:style>
+        <p:txBody>
+          <a:bodyPr rtlCol="0" anchor="ctr"/>
+          <a:lstStyle/>
+          <a:p>
+            <a:pPr algn="ctr"/>
+          </a:p>
+        </p:txBody>
+      </p:sp>
+      <p:sp>
+        <p:nvSpPr>
+          <p:cNvPr id="5" name="TextBox 4"/>
+          <p:cNvSpPr txBox="1"/>
+          <p:nvPr/>
+        </p:nvSpPr>
+        <p:spPr>
+          <a:xfrm>
+            <a:off x="457200" y="164592"/>
+            <a:ext cx="7315200" cy="320040"/>
+          </a:xfrm>
+          <a:prstGeom prst="rect">
+            <a:avLst/>
+          </a:prstGeom>
+          <a:noFill/>
+        </p:spPr>
+        <p:txBody>
+          <a:bodyPr wrap="square" anchor="t" lIns="45720" rIns="45720" tIns="18288" bIns="18288">
+            <a:spAutoFit/>
+          </a:bodyPr>
+          <a:lstStyle/>
+          <a:p>
+            <a:pPr algn="l"/>
+            <a:r>
+              <a:rPr sz="1100" b="1">
+                <a:solidFill>
+                  <a:srgbClr val="E8B84B"/>
+                </a:solidFill>
+                <a:latin typeface="Calibri"/>
+              </a:rPr>
+              <a:t>BACKUP F · DATA MODEL</a:t>
+            </a:r>
+          </a:p>
+        </p:txBody>
+      </p:sp>
+      <p:sp>
+        <p:nvSpPr>
+          <p:cNvPr id="6" name="TextBox 5"/>
+          <p:cNvSpPr txBox="1"/>
+          <p:nvPr/>
+        </p:nvSpPr>
+        <p:spPr>
+          <a:xfrm>
+            <a:off x="457200" y="457200"/>
+            <a:ext cx="10972800" cy="640080"/>
+          </a:xfrm>
+          <a:prstGeom prst="rect">
+            <a:avLst/>
+          </a:prstGeom>
+          <a:noFill/>
+        </p:spPr>
+        <p:txBody>
+          <a:bodyPr wrap="square" anchor="t" lIns="45720" rIns="45720" tIns="18288" bIns="18288">
+            <a:spAutoFit/>
+          </a:bodyPr>
+          <a:lstStyle/>
+          <a:p>
+            <a:pPr algn="l"/>
+            <a:r>
+              <a:rPr sz="2600" b="1">
+                <a:solidFill>
+                  <a:srgbClr val="FFFFFF"/>
+                </a:solidFill>
+                <a:latin typeface="Calibri"/>
+              </a:rPr>
+              <a:t>Core relational schema (extract)</a:t>
+            </a:r>
+          </a:p>
+        </p:txBody>
+      </p:sp>
+      <p:graphicFrame>
+        <p:nvGraphicFramePr>
+          <p:cNvPr id="7" name="Table 6"/>
+          <p:cNvGraphicFramePr>
+            <a:graphicFrameLocks noGrp="1"/>
+          </p:cNvGraphicFramePr>
+          <p:nvPr/>
+        </p:nvGraphicFramePr>
+        <p:xfrm>
+          <a:off x="457200" y="1463040"/>
+          <a:ext cx="11247120" cy="4389120"/>
+        </p:xfrm>
+        <a:graphic>
+          <a:graphicData uri="http://schemas.openxmlformats.org/drawingml/2006/table">
+            <a:tbl>
+              <a:tblPr firstRow="1" bandRow="1">
+                <a:tableStyleId>{5C22544A-7EE6-4342-B048-85BDC9FD1C3A}</a:tableStyleId>
+              </a:tblPr>
+              <a:tblGrid>
+                <a:gridCol w="5623560"/>
+                <a:gridCol w="5623560"/>
+              </a:tblGrid>
+              <a:tr h="365760">
+                <a:tc>
+                  <a:txBody>
+                    <a:bodyPr lIns="73152" rIns="73152" tIns="36576" bIns="36576"/>
+                    <a:lstStyle/>
+                    <a:p>
+                      <a:pPr algn="l"/>
+                      <a:r>
+                        <a:rPr sz="1100" b="1">
+                          <a:solidFill>
+                            <a:srgbClr val="FFFFFF"/>
+                          </a:solidFill>
+                          <a:latin typeface="Calibri"/>
+                        </a:rPr>
+                        <a:t>Table</a:t>
+                      </a:r>
+                    </a:p>
+                  </a:txBody>
+                  <a:tcPr>
+                    <a:solidFill>
+                      <a:srgbClr val="0A1628"/>
+                    </a:solidFill>
+                  </a:tcPr>
+                </a:tc>
+                <a:tc>
+                  <a:txBody>
+                    <a:bodyPr lIns="73152" rIns="73152" tIns="36576" bIns="36576"/>
+                    <a:lstStyle/>
+                    <a:p>
+                      <a:pPr algn="l"/>
+                      <a:r>
+                        <a:rPr sz="1100" b="1">
+                          <a:solidFill>
+                            <a:srgbClr val="FFFFFF"/>
+                          </a:solidFill>
+                          <a:latin typeface="Calibri"/>
+                        </a:rPr>
+                        <a:t>Columns</a:t>
+                      </a:r>
+                    </a:p>
+                  </a:txBody>
+                  <a:tcPr>
+                    <a:solidFill>
+                      <a:srgbClr val="0A1628"/>
+                    </a:solidFill>
+                  </a:tcPr>
+                </a:tc>
+              </a:tr>
+              <a:tr h="365760">
+                <a:tc>
+                  <a:txBody>
+                    <a:bodyPr lIns="73152" rIns="73152" tIns="36576" bIns="36576"/>
+                    <a:lstStyle/>
+                    <a:p>
+                      <a:pPr algn="l"/>
+                      <a:r>
+                        <a:rPr sz="1000">
+                          <a:solidFill>
+                            <a:srgbClr val="1F2A3D"/>
+                          </a:solidFill>
+                          <a:latin typeface="Calibri"/>
+                        </a:rPr>
+                        <a:t>users</a:t>
+                      </a:r>
+                    </a:p>
+                  </a:txBody>
+                  <a:tcPr>
+                    <a:solidFill>
+                      <a:srgbClr val="FFFFFF"/>
+                    </a:solidFill>
+                  </a:tcPr>
+                </a:tc>
+                <a:tc>
+                  <a:txBody>
+                    <a:bodyPr lIns="73152" rIns="73152" tIns="36576" bIns="36576"/>
+                    <a:lstStyle/>
+                    <a:p>
+                      <a:pPr algn="l"/>
+                      <a:r>
+                        <a:rPr sz="1000">
+                          <a:solidFill>
+                            <a:srgbClr val="1F2A3D"/>
+                          </a:solidFill>
+                          <a:latin typeface="Calibri"/>
+                        </a:rPr>
+                        <a:t>id, username, email, password, is_driver, is_student, balance, score</a:t>
+                      </a:r>
+                    </a:p>
+                  </a:txBody>
+                  <a:tcPr>
+                    <a:solidFill>
+                      <a:srgbClr val="FFFFFF"/>
+                    </a:solidFill>
+                  </a:tcPr>
+                </a:tc>
+              </a:tr>
+              <a:tr h="365760">
+                <a:tc>
+                  <a:txBody>
+                    <a:bodyPr lIns="73152" rIns="73152" tIns="36576" bIns="36576"/>
+                    <a:lstStyle/>
+                    <a:p>
+                      <a:pPr algn="l"/>
+                      <a:r>
+                        <a:rPr sz="1000">
+                          <a:solidFill>
+                            <a:srgbClr val="1F2A3D"/>
+                          </a:solidFill>
+                          <a:latin typeface="Calibri"/>
+                        </a:rPr>
+                        <a:t>driver_profiles</a:t>
+                      </a:r>
+                    </a:p>
+                  </a:txBody>
+                  <a:tcPr>
+                    <a:solidFill>
+                      <a:srgbClr val="F3F4F6"/>
+                    </a:solidFill>
+                  </a:tcPr>
+                </a:tc>
+                <a:tc>
+                  <a:txBody>
+                    <a:bodyPr lIns="73152" rIns="73152" tIns="36576" bIns="36576"/>
+                    <a:lstStyle/>
+                    <a:p>
+                      <a:pPr algn="l"/>
+                      <a:r>
+                        <a:rPr sz="1000">
+                          <a:solidFill>
+                            <a:srgbClr val="1F2A3D"/>
+                          </a:solidFill>
+                          <a:latin typeface="Calibri"/>
+                        </a:rPr>
+                        <a:t>id, user_id*, license_number, avg_rating, total_trips, reliability</a:t>
+                      </a:r>
+                    </a:p>
+                  </a:txBody>
+                  <a:tcPr>
+                    <a:solidFill>
+                      <a:srgbClr val="F3F4F6"/>
+                    </a:solidFill>
+                  </a:tcPr>
+                </a:tc>
+              </a:tr>
+              <a:tr h="365760">
+                <a:tc>
+                  <a:txBody>
+                    <a:bodyPr lIns="73152" rIns="73152" tIns="36576" bIns="36576"/>
+                    <a:lstStyle/>
+                    <a:p>
+                      <a:pPr algn="l"/>
+                      <a:r>
+                        <a:rPr sz="1000">
+                          <a:solidFill>
+                            <a:srgbClr val="1F2A3D"/>
+                          </a:solidFill>
+                          <a:latin typeface="Calibri"/>
+                        </a:rPr>
+                        <a:t>vehicles</a:t>
+                      </a:r>
+                    </a:p>
+                  </a:txBody>
+                  <a:tcPr>
+                    <a:solidFill>
+                      <a:srgbClr val="FFFFFF"/>
+                    </a:solidFill>
+                  </a:tcPr>
+                </a:tc>
+                <a:tc>
+                  <a:txBody>
+                    <a:bodyPr lIns="73152" rIns="73152" tIns="36576" bIns="36576"/>
+                    <a:lstStyle/>
+                    <a:p>
+                      <a:pPr algn="l"/>
+                      <a:r>
+                        <a:rPr sz="1000">
+                          <a:solidFill>
+                            <a:srgbClr val="1F2A3D"/>
+                          </a:solidFill>
+                          <a:latin typeface="Calibri"/>
+                        </a:rPr>
+                        <a:t>id, user_id*, type, make, model, plate_number, seats, has_ac, has_wifi</a:t>
+                      </a:r>
+                    </a:p>
+                  </a:txBody>
+                  <a:tcPr>
+                    <a:solidFill>
+                      <a:srgbClr val="FFFFFF"/>
+                    </a:solidFill>
+                  </a:tcPr>
+                </a:tc>
+              </a:tr>
+              <a:tr h="365760">
+                <a:tc>
+                  <a:txBody>
+                    <a:bodyPr lIns="73152" rIns="73152" tIns="36576" bIns="36576"/>
+                    <a:lstStyle/>
+                    <a:p>
+                      <a:pPr algn="l"/>
+                      <a:r>
+                        <a:rPr sz="1000">
+                          <a:solidFill>
+                            <a:srgbClr val="1F2A3D"/>
+                          </a:solidFill>
+                          <a:latin typeface="Calibri"/>
+                        </a:rPr>
+                        <a:t>rides</a:t>
+                      </a:r>
+                    </a:p>
+                  </a:txBody>
+                  <a:tcPr>
+                    <a:solidFill>
+                      <a:srgbClr val="F3F4F6"/>
+                    </a:solidFill>
+                  </a:tcPr>
+                </a:tc>
+                <a:tc>
+                  <a:txBody>
+                    <a:bodyPr lIns="73152" rIns="73152" tIns="36576" bIns="36576"/>
+                    <a:lstStyle/>
+                    <a:p>
+                      <a:pPr algn="l"/>
+                      <a:r>
+                        <a:rPr sz="1000">
+                          <a:solidFill>
+                            <a:srgbClr val="1F2A3D"/>
+                          </a:solidFill>
+                          <a:latin typeface="Calibri"/>
+                        </a:rPr>
+                        <a:t>id, driver_id*, vehicle_id*, from_location, to_location, departure_time, price, available_seats, status</a:t>
+                      </a:r>
+                    </a:p>
+                  </a:txBody>
+                  <a:tcPr>
+                    <a:solidFill>
+                      <a:srgbClr val="F3F4F6"/>
+                    </a:solidFill>
+                  </a:tcPr>
+                </a:tc>
+              </a:tr>
+              <a:tr h="365760">
+                <a:tc>
+                  <a:txBody>
+                    <a:bodyPr lIns="73152" rIns="73152" tIns="36576" bIns="36576"/>
+                    <a:lstStyle/>
+                    <a:p>
+                      <a:pPr algn="l"/>
+                      <a:r>
+                        <a:rPr sz="1000">
+                          <a:solidFill>
+                            <a:srgbClr val="1F2A3D"/>
+                          </a:solidFill>
+                          <a:latin typeface="Calibri"/>
+                        </a:rPr>
+                        <a:t>bookings</a:t>
+                      </a:r>
+                    </a:p>
+                  </a:txBody>
+                  <a:tcPr>
+                    <a:solidFill>
+                      <a:srgbClr val="FFFFFF"/>
+                    </a:solidFill>
+                  </a:tcPr>
+                </a:tc>
+                <a:tc>
+                  <a:txBody>
+                    <a:bodyPr lIns="73152" rIns="73152" tIns="36576" bIns="36576"/>
+                    <a:lstStyle/>
+                    <a:p>
+                      <a:pPr algn="l"/>
+                      <a:r>
+                        <a:rPr sz="1000">
+                          <a:solidFill>
+                            <a:srgbClr val="1F2A3D"/>
+                          </a:solidFill>
+                          <a:latin typeface="Calibri"/>
+                        </a:rPr>
+                        <a:t>id, ride_id*, passenger_id*, seats, paid_amount, status</a:t>
+                      </a:r>
+                    </a:p>
+                  </a:txBody>
+                  <a:tcPr>
+                    <a:solidFill>
+                      <a:srgbClr val="FFFFFF"/>
+                    </a:solidFill>
+                  </a:tcPr>
+                </a:tc>
+              </a:tr>
+              <a:tr h="365760">
+                <a:tc>
+                  <a:txBody>
+                    <a:bodyPr lIns="73152" rIns="73152" tIns="36576" bIns="36576"/>
+                    <a:lstStyle/>
+                    <a:p>
+                      <a:pPr algn="l"/>
+                      <a:r>
+                        <a:rPr sz="1000">
+                          <a:solidFill>
+                            <a:srgbClr val="1F2A3D"/>
+                          </a:solidFill>
+                          <a:latin typeface="Calibri"/>
+                        </a:rPr>
+                        <a:t>payments</a:t>
+                      </a:r>
+                    </a:p>
+                  </a:txBody>
+                  <a:tcPr>
+                    <a:solidFill>
+                      <a:srgbClr val="F3F4F6"/>
+                    </a:solidFill>
+                  </a:tcPr>
+                </a:tc>
+                <a:tc>
+                  <a:txBody>
+                    <a:bodyPr lIns="73152" rIns="73152" tIns="36576" bIns="36576"/>
+                    <a:lstStyle/>
+                    <a:p>
+                      <a:pPr algn="l"/>
+                      <a:r>
+                        <a:rPr sz="1000">
+                          <a:solidFill>
+                            <a:srgbClr val="1F2A3D"/>
+                          </a:solidFill>
+                          <a:latin typeface="Calibri"/>
+                        </a:rPr>
+                        <a:t>id, user_id*, amount, type, description, ref_id</a:t>
+                      </a:r>
+                    </a:p>
+                  </a:txBody>
+                  <a:tcPr>
+                    <a:solidFill>
+                      <a:srgbClr val="F3F4F6"/>
+                    </a:solidFill>
+                  </a:tcPr>
+                </a:tc>
+              </a:tr>
+              <a:tr h="365760">
+                <a:tc>
+                  <a:txBody>
+                    <a:bodyPr lIns="73152" rIns="73152" tIns="36576" bIns="36576"/>
+                    <a:lstStyle/>
+                    <a:p>
+                      <a:pPr algn="l"/>
+                      <a:r>
+                        <a:rPr sz="1000">
+                          <a:solidFill>
+                            <a:srgbClr val="1F2A3D"/>
+                          </a:solidFill>
+                          <a:latin typeface="Calibri"/>
+                        </a:rPr>
+                        <a:t>ratings</a:t>
+                      </a:r>
+                    </a:p>
+                  </a:txBody>
+                  <a:tcPr>
+                    <a:solidFill>
+                      <a:srgbClr val="FFFFFF"/>
+                    </a:solidFill>
+                  </a:tcPr>
+                </a:tc>
+                <a:tc>
+                  <a:txBody>
+                    <a:bodyPr lIns="73152" rIns="73152" tIns="36576" bIns="36576"/>
+                    <a:lstStyle/>
+                    <a:p>
+                      <a:pPr algn="l"/>
+                      <a:r>
+                        <a:rPr sz="1000">
+                          <a:solidFill>
+                            <a:srgbClr val="1F2A3D"/>
+                          </a:solidFill>
+                          <a:latin typeface="Calibri"/>
+                        </a:rPr>
+                        <a:t>id, ride_id*, from_user_id*, to_user_id*, score, comment</a:t>
+                      </a:r>
+                    </a:p>
+                  </a:txBody>
+                  <a:tcPr>
+                    <a:solidFill>
+                      <a:srgbClr val="FFFFFF"/>
+                    </a:solidFill>
+                  </a:tcPr>
+                </a:tc>
+              </a:tr>
+              <a:tr h="365760">
+                <a:tc>
+                  <a:txBody>
+                    <a:bodyPr lIns="73152" rIns="73152" tIns="36576" bIns="36576"/>
+                    <a:lstStyle/>
+                    <a:p>
+                      <a:pPr algn="l"/>
+                      <a:r>
+                        <a:rPr sz="1000">
+                          <a:solidFill>
+                            <a:srgbClr val="1F2A3D"/>
+                          </a:solidFill>
+                          <a:latin typeface="Calibri"/>
+                        </a:rPr>
+                        <a:t>student_verifications</a:t>
+                      </a:r>
+                    </a:p>
+                  </a:txBody>
+                  <a:tcPr>
+                    <a:solidFill>
+                      <a:srgbClr val="F3F4F6"/>
+                    </a:solidFill>
+                  </a:tcPr>
+                </a:tc>
+                <a:tc>
+                  <a:txBody>
+                    <a:bodyPr lIns="73152" rIns="73152" tIns="36576" bIns="36576"/>
+                    <a:lstStyle/>
+                    <a:p>
+                      <a:pPr algn="l"/>
+                      <a:r>
+                        <a:rPr sz="1000">
+                          <a:solidFill>
+                            <a:srgbClr val="1F2A3D"/>
+                          </a:solidFill>
+                          <a:latin typeface="Calibri"/>
+                        </a:rPr>
+                        <a:t>id, user_id*, university_email, status, verified_at</a:t>
+                      </a:r>
+                    </a:p>
+                  </a:txBody>
+                  <a:tcPr>
+                    <a:solidFill>
+                      <a:srgbClr val="F3F4F6"/>
+                    </a:solidFill>
+                  </a:tcPr>
+                </a:tc>
+              </a:tr>
+              <a:tr h="365760">
+                <a:tc>
+                  <a:txBody>
+                    <a:bodyPr lIns="73152" rIns="73152" tIns="36576" bIns="36576"/>
+                    <a:lstStyle/>
+                    <a:p>
+                      <a:pPr algn="l"/>
+                      <a:r>
+                        <a:rPr sz="1000">
+                          <a:solidFill>
+                            <a:srgbClr val="1F2A3D"/>
+                          </a:solidFill>
+                          <a:latin typeface="Calibri"/>
+                        </a:rPr>
+                        <a:t>organizations</a:t>
+                      </a:r>
+                    </a:p>
+                  </a:txBody>
+                  <a:tcPr>
+                    <a:solidFill>
+                      <a:srgbClr val="FFFFFF"/>
+                    </a:solidFill>
+                  </a:tcPr>
+                </a:tc>
+                <a:tc>
+                  <a:txBody>
+                    <a:bodyPr lIns="73152" rIns="73152" tIns="36576" bIns="36576"/>
+                    <a:lstStyle/>
+                    <a:p>
+                      <a:pPr algn="l"/>
+                      <a:r>
+                        <a:rPr sz="1000">
+                          <a:solidFill>
+                            <a:srgbClr val="1F2A3D"/>
+                          </a:solidFill>
+                          <a:latin typeface="Calibri"/>
+                        </a:rPr>
+                        <a:t>id, name, type, contact_email, email_domain, discount_percent, discount_code, status</a:t>
+                      </a:r>
+                    </a:p>
+                  </a:txBody>
+                  <a:tcPr>
+                    <a:solidFill>
+                      <a:srgbClr val="FFFFFF"/>
+                    </a:solidFill>
+                  </a:tcPr>
+                </a:tc>
+              </a:tr>
+              <a:tr h="365760">
+                <a:tc>
+                  <a:txBody>
+                    <a:bodyPr lIns="73152" rIns="73152" tIns="36576" bIns="36576"/>
+                    <a:lstStyle/>
+                    <a:p>
+                      <a:pPr algn="l"/>
+                      <a:r>
+                        <a:rPr sz="1000">
+                          <a:solidFill>
+                            <a:srgbClr val="1F2A3D"/>
+                          </a:solidFill>
+                          <a:latin typeface="Calibri"/>
+                        </a:rPr>
+                        <a:t>complaints</a:t>
+                      </a:r>
+                    </a:p>
+                  </a:txBody>
+                  <a:tcPr>
+                    <a:solidFill>
+                      <a:srgbClr val="F3F4F6"/>
+                    </a:solidFill>
+                  </a:tcPr>
+                </a:tc>
+                <a:tc>
+                  <a:txBody>
+                    <a:bodyPr lIns="73152" rIns="73152" tIns="36576" bIns="36576"/>
+                    <a:lstStyle/>
+                    <a:p>
+                      <a:pPr algn="l"/>
+                      <a:r>
+                        <a:rPr sz="1000">
+                          <a:solidFill>
+                            <a:srgbClr val="1F2A3D"/>
+                          </a:solidFill>
+                          <a:latin typeface="Calibri"/>
+                        </a:rPr>
+                        <a:t>id, from_user_id*, against_user_id*, type, text, status, admin_note</a:t>
+                      </a:r>
+                    </a:p>
+                  </a:txBody>
+                  <a:tcPr>
+                    <a:solidFill>
+                      <a:srgbClr val="F3F4F6"/>
+                    </a:solidFill>
+                  </a:tcPr>
+                </a:tc>
+              </a:tr>
+              <a:tr h="365760">
+                <a:tc>
+                  <a:txBody>
+                    <a:bodyPr lIns="73152" rIns="73152" tIns="36576" bIns="36576"/>
+                    <a:lstStyle/>
+                    <a:p>
+                      <a:pPr algn="l"/>
+                      <a:r>
+                        <a:rPr sz="1000">
+                          <a:solidFill>
+                            <a:srgbClr val="1F2A3D"/>
+                          </a:solidFill>
+                          <a:latin typeface="Calibri"/>
+                        </a:rPr>
+                        <a:t>messages</a:t>
+                      </a:r>
+                    </a:p>
+                  </a:txBody>
+                  <a:tcPr>
+                    <a:solidFill>
+                      <a:srgbClr val="FFFFFF"/>
+                    </a:solidFill>
+                  </a:tcPr>
+                </a:tc>
+                <a:tc>
+                  <a:txBody>
+                    <a:bodyPr lIns="73152" rIns="73152" tIns="36576" bIns="36576"/>
+                    <a:lstStyle/>
+                    <a:p>
+                      <a:pPr algn="l"/>
+                      <a:r>
+                        <a:rPr sz="1000">
+                          <a:solidFill>
+                            <a:srgbClr val="1F2A3D"/>
+                          </a:solidFill>
+                          <a:latin typeface="Calibri"/>
+                        </a:rPr>
+                        <a:t>id, conversation_id*, sender_id*, body, is_read, sent_at</a:t>
+                      </a:r>
+                    </a:p>
+                  </a:txBody>
+                  <a:tcPr>
+                    <a:solidFill>
+                      <a:srgbClr val="FFFFFF"/>
+                    </a:solidFill>
+                  </a:tcPr>
+                </a:tc>
+              </a:tr>
+            </a:tbl>
+          </a:graphicData>
+        </a:graphic>
+      </p:graphicFrame>
+      <p:sp>
+        <p:nvSpPr>
+          <p:cNvPr id="8" name="TextBox 7"/>
+          <p:cNvSpPr txBox="1"/>
+          <p:nvPr/>
+        </p:nvSpPr>
+        <p:spPr>
+          <a:xfrm>
+            <a:off x="457200" y="5989320"/>
+            <a:ext cx="10972800" cy="365760"/>
+          </a:xfrm>
+          <a:prstGeom prst="rect">
+            <a:avLst/>
+          </a:prstGeom>
+          <a:noFill/>
+        </p:spPr>
+        <p:txBody>
+          <a:bodyPr wrap="square" anchor="t" lIns="45720" rIns="45720" tIns="18288" bIns="18288">
+            <a:spAutoFit/>
+          </a:bodyPr>
+          <a:lstStyle/>
+          <a:p>
+            <a:pPr algn="ctr"/>
+            <a:r>
+              <a:rPr sz="1100" b="0">
+                <a:solidFill>
+                  <a:srgbClr val="6B7280"/>
+                </a:solidFill>
+                <a:latin typeface="Calibri"/>
+              </a:rPr>
+              <a:t>* foreign key. ~20 tables total in the live schema. Indexes on origin, destination, departure_time, foreign keys.</a:t>
+            </a:r>
+          </a:p>
+        </p:txBody>
+      </p:sp>
+      <p:sp>
+        <p:nvSpPr>
+          <p:cNvPr id="9" name="Rectangle 8"/>
+          <p:cNvSpPr/>
+          <p:nvPr/>
+        </p:nvSpPr>
+        <p:spPr>
+          <a:xfrm>
+            <a:off x="0" y="6537960"/>
+            <a:ext cx="12191695" cy="320040"/>
+          </a:xfrm>
+          <a:prstGeom prst="rect">
+            <a:avLst/>
+          </a:prstGeom>
+          <a:solidFill>
+            <a:srgbClr val="0A1628"/>
+          </a:solidFill>
+          <a:ln>
+            <a:noFill/>
+          </a:ln>
+          <a:effectLst/>
+        </p:spPr>
+        <p:style>
+          <a:lnRef idx="1">
+            <a:schemeClr val="accent1"/>
+          </a:lnRef>
+          <a:fillRef idx="3">
+            <a:schemeClr val="accent1"/>
+          </a:fillRef>
+          <a:effectRef idx="2">
+            <a:schemeClr val="accent1"/>
+          </a:effectRef>
+          <a:fontRef idx="minor">
+            <a:schemeClr val="lt1"/>
+          </a:fontRef>
+        </p:style>
+        <p:txBody>
+          <a:bodyPr rtlCol="0" anchor="ctr"/>
+          <a:lstStyle/>
+          <a:p>
+            <a:pPr algn="ctr"/>
+          </a:p>
+        </p:txBody>
+      </p:sp>
+      <p:sp>
+        <p:nvSpPr>
+          <p:cNvPr id="10" name="TextBox 9"/>
+          <p:cNvSpPr txBox="1"/>
+          <p:nvPr/>
+        </p:nvSpPr>
+        <p:spPr>
+          <a:xfrm>
+            <a:off x="457200" y="6583680"/>
+            <a:ext cx="7315200" cy="274320"/>
+          </a:xfrm>
+          <a:prstGeom prst="rect">
+            <a:avLst/>
+          </a:prstGeom>
+          <a:noFill/>
+        </p:spPr>
+        <p:txBody>
+          <a:bodyPr wrap="square" anchor="ctr" lIns="45720" rIns="45720" tIns="18288" bIns="18288">
+            <a:spAutoFit/>
+          </a:bodyPr>
+          <a:lstStyle/>
+          <a:p>
+            <a:pPr algn="l"/>
+            <a:r>
+              <a:rPr sz="1000" b="0">
+                <a:solidFill>
+                  <a:srgbClr val="FFFFFF"/>
+                </a:solidFill>
+                <a:latin typeface="Calibri"/>
+              </a:rPr>
+              <a:t>ForsaDrive  •  Final Year Project Defense  •  ATOMIC IT</a:t>
+            </a:r>
+          </a:p>
+        </p:txBody>
+      </p:sp>
+      <p:sp>
+        <p:nvSpPr>
+          <p:cNvPr id="11" name="TextBox 10"/>
+          <p:cNvSpPr txBox="1"/>
+          <p:nvPr/>
+        </p:nvSpPr>
+        <p:spPr>
+          <a:xfrm>
+            <a:off x="10515600" y="6583680"/>
+            <a:ext cx="1371600" cy="274320"/>
+          </a:xfrm>
+          <a:prstGeom prst="rect">
+            <a:avLst/>
+          </a:prstGeom>
+          <a:noFill/>
+        </p:spPr>
+        <p:txBody>
+          <a:bodyPr wrap="square" anchor="ctr" lIns="45720" rIns="45720" tIns="18288" bIns="18288">
+            <a:spAutoFit/>
+          </a:bodyPr>
+          <a:lstStyle/>
+          <a:p>
+            <a:pPr algn="r"/>
+            <a:r>
+              <a:rPr sz="1000" b="1">
+                <a:solidFill>
+                  <a:srgbClr val="E8B84B"/>
+                </a:solidFill>
+                <a:latin typeface="Calibri"/>
+              </a:rPr>
+              <a:t>F / 21</a:t>
+            </a:r>
+          </a:p>
+        </p:txBody>
+      </p:sp>
+    </p:spTree>
+  </p:cSld>
+  <p:clrMapOvr>
+    <a:masterClrMapping/>
+  </p:clrMapOvr>
+</p:sld>
+</file>
+
+<file path=ppt/slides/slide29.xml><?xml version="1.0" encoding="utf-8"?>
+<p:sld xmlns:a="http://schemas.openxmlformats.org/drawingml/2006/main" xmlns:p="http://schemas.openxmlformats.org/presentationml/2006/main" xmlns:r="http://schemas.openxmlformats.org/officeDocument/2006/relationships">
+  <p:cSld>
+    <p:spTree>
+      <p:nvGrpSpPr>
+        <p:cNvPr id="1" name=""/>
+        <p:cNvGrpSpPr/>
+        <p:nvPr/>
+      </p:nvGrpSpPr>
+      <p:grpSpPr/>
+      <p:sp>
+        <p:nvSpPr>
+          <p:cNvPr id="2" name="Rectangle 1"/>
+          <p:cNvSpPr/>
+          <p:nvPr/>
+        </p:nvSpPr>
+        <p:spPr>
+          <a:xfrm>
+            <a:off x="0" y="0"/>
+            <a:ext cx="12191695" cy="6858000"/>
+          </a:xfrm>
+          <a:prstGeom prst="rect">
+            <a:avLst/>
+          </a:prstGeom>
+          <a:solidFill>
+            <a:srgbClr val="FFFFFF"/>
+          </a:solidFill>
+          <a:ln>
+            <a:noFill/>
+          </a:ln>
+          <a:effectLst/>
+        </p:spPr>
+        <p:style>
+          <a:lnRef idx="1">
+            <a:schemeClr val="accent1"/>
+          </a:lnRef>
+          <a:fillRef idx="3">
+            <a:schemeClr val="accent1"/>
+          </a:fillRef>
+          <a:effectRef idx="2">
+            <a:schemeClr val="accent1"/>
+          </a:effectRef>
+          <a:fontRef idx="minor">
+            <a:schemeClr val="lt1"/>
+          </a:fontRef>
+        </p:style>
+        <p:txBody>
+          <a:bodyPr rtlCol="0" anchor="ctr"/>
+          <a:lstStyle/>
+          <a:p>
+            <a:pPr algn="ctr"/>
+          </a:p>
+        </p:txBody>
+      </p:sp>
+      <p:sp>
+        <p:nvSpPr>
+          <p:cNvPr id="3" name="Rectangle 2"/>
+          <p:cNvSpPr/>
+          <p:nvPr/>
+        </p:nvSpPr>
+        <p:spPr>
+          <a:xfrm>
+            <a:off x="0" y="0"/>
+            <a:ext cx="12191695" cy="1097280"/>
+          </a:xfrm>
+          <a:prstGeom prst="rect">
+            <a:avLst/>
+          </a:prstGeom>
+          <a:solidFill>
+            <a:srgbClr val="0A1628"/>
+          </a:solidFill>
+          <a:ln>
+            <a:noFill/>
+          </a:ln>
+          <a:effectLst/>
+        </p:spPr>
+        <p:style>
+          <a:lnRef idx="1">
+            <a:schemeClr val="accent1"/>
+          </a:lnRef>
+          <a:fillRef idx="3">
+            <a:schemeClr val="accent1"/>
+          </a:fillRef>
+          <a:effectRef idx="2">
+            <a:schemeClr val="accent1"/>
+          </a:effectRef>
+          <a:fontRef idx="minor">
+            <a:schemeClr val="lt1"/>
+          </a:fontRef>
+        </p:style>
+        <p:txBody>
+          <a:bodyPr rtlCol="0" anchor="ctr"/>
+          <a:lstStyle/>
+          <a:p>
+            <a:pPr algn="ctr"/>
+          </a:p>
+        </p:txBody>
+      </p:sp>
+      <p:sp>
+        <p:nvSpPr>
+          <p:cNvPr id="4" name="Rectangle 3"/>
+          <p:cNvSpPr/>
+          <p:nvPr/>
+        </p:nvSpPr>
+        <p:spPr>
+          <a:xfrm>
+            <a:off x="0" y="1097280"/>
+            <a:ext cx="12191695" cy="54864"/>
+          </a:xfrm>
+          <a:prstGeom prst="rect">
+            <a:avLst/>
+          </a:prstGeom>
+          <a:solidFill>
+            <a:srgbClr val="E8B84B"/>
+          </a:solidFill>
+          <a:ln>
+            <a:noFill/>
+          </a:ln>
+          <a:effectLst/>
+        </p:spPr>
+        <p:style>
+          <a:lnRef idx="1">
+            <a:schemeClr val="accent1"/>
+          </a:lnRef>
+          <a:fillRef idx="3">
+            <a:schemeClr val="accent1"/>
+          </a:fillRef>
+          <a:effectRef idx="2">
+            <a:schemeClr val="accent1"/>
+          </a:effectRef>
+          <a:fontRef idx="minor">
+            <a:schemeClr val="lt1"/>
+          </a:fontRef>
+        </p:style>
+        <p:txBody>
+          <a:bodyPr rtlCol="0" anchor="ctr"/>
+          <a:lstStyle/>
+          <a:p>
+            <a:pPr algn="ctr"/>
+          </a:p>
+        </p:txBody>
+      </p:sp>
+      <p:sp>
+        <p:nvSpPr>
+          <p:cNvPr id="5" name="TextBox 4"/>
+          <p:cNvSpPr txBox="1"/>
+          <p:nvPr/>
+        </p:nvSpPr>
+        <p:spPr>
+          <a:xfrm>
+            <a:off x="457200" y="164592"/>
+            <a:ext cx="7315200" cy="320040"/>
+          </a:xfrm>
+          <a:prstGeom prst="rect">
+            <a:avLst/>
+          </a:prstGeom>
+          <a:noFill/>
+        </p:spPr>
+        <p:txBody>
+          <a:bodyPr wrap="square" anchor="t" lIns="45720" rIns="45720" tIns="18288" bIns="18288">
+            <a:spAutoFit/>
+          </a:bodyPr>
+          <a:lstStyle/>
+          <a:p>
+            <a:pPr algn="l"/>
+            <a:r>
+              <a:rPr sz="1100" b="1">
+                <a:solidFill>
+                  <a:srgbClr val="E8B84B"/>
+                </a:solidFill>
+                <a:latin typeface="Calibri"/>
+              </a:rPr>
+              <a:t>BACKUP G · API CONTRACT</a:t>
+            </a:r>
+          </a:p>
+        </p:txBody>
+      </p:sp>
+      <p:sp>
+        <p:nvSpPr>
+          <p:cNvPr id="6" name="TextBox 5"/>
+          <p:cNvSpPr txBox="1"/>
+          <p:nvPr/>
+        </p:nvSpPr>
+        <p:spPr>
+          <a:xfrm>
+            <a:off x="457200" y="457200"/>
+            <a:ext cx="10972800" cy="640080"/>
+          </a:xfrm>
+          <a:prstGeom prst="rect">
+            <a:avLst/>
+          </a:prstGeom>
+          <a:noFill/>
+        </p:spPr>
+        <p:txBody>
+          <a:bodyPr wrap="square" anchor="t" lIns="45720" rIns="45720" tIns="18288" bIns="18288">
+            <a:spAutoFit/>
+          </a:bodyPr>
+          <a:lstStyle/>
+          <a:p>
+            <a:pPr algn="l"/>
+            <a:r>
+              <a:rPr sz="2600" b="1">
+                <a:solidFill>
+                  <a:srgbClr val="FFFFFF"/>
+                </a:solidFill>
+                <a:latin typeface="Calibri"/>
+              </a:rPr>
+              <a:t>REST API surface (extract)</a:t>
+            </a:r>
+          </a:p>
+        </p:txBody>
+      </p:sp>
+      <p:graphicFrame>
+        <p:nvGraphicFramePr>
+          <p:cNvPr id="7" name="Table 6"/>
+          <p:cNvGraphicFramePr>
+            <a:graphicFrameLocks noGrp="1"/>
+          </p:cNvGraphicFramePr>
+          <p:nvPr/>
+        </p:nvGraphicFramePr>
+        <p:xfrm>
+          <a:off x="457200" y="1463040"/>
+          <a:ext cx="11247120" cy="4572000"/>
+        </p:xfrm>
+        <a:graphic>
+          <a:graphicData uri="http://schemas.openxmlformats.org/drawingml/2006/table">
+            <a:tbl>
+              <a:tblPr firstRow="1" bandRow="1">
+                <a:tableStyleId>{5C22544A-7EE6-4342-B048-85BDC9FD1C3A}</a:tableStyleId>
+              </a:tblPr>
+              <a:tblGrid>
+                <a:gridCol w="3749040"/>
+                <a:gridCol w="3749040"/>
+                <a:gridCol w="3749040"/>
+              </a:tblGrid>
+              <a:tr h="304800">
+                <a:tc>
+                  <a:txBody>
+                    <a:bodyPr lIns="73152" rIns="73152" tIns="36576" bIns="36576"/>
+                    <a:lstStyle/>
+                    <a:p>
+                      <a:pPr algn="l"/>
+                      <a:r>
+                        <a:rPr sz="1100" b="1">
+                          <a:solidFill>
+                            <a:srgbClr val="FFFFFF"/>
+                          </a:solidFill>
+                          <a:latin typeface="Calibri"/>
+                        </a:rPr>
+                        <a:t>Method</a:t>
+                      </a:r>
+                    </a:p>
+                  </a:txBody>
+                  <a:tcPr>
+                    <a:solidFill>
+                      <a:srgbClr val="0A1628"/>
+                    </a:solidFill>
+                  </a:tcPr>
+                </a:tc>
+                <a:tc>
+                  <a:txBody>
+                    <a:bodyPr lIns="73152" rIns="73152" tIns="36576" bIns="36576"/>
+                    <a:lstStyle/>
+                    <a:p>
+                      <a:pPr algn="l"/>
+                      <a:r>
+                        <a:rPr sz="1100" b="1">
+                          <a:solidFill>
+                            <a:srgbClr val="FFFFFF"/>
+                          </a:solidFill>
+                          <a:latin typeface="Calibri"/>
+                        </a:rPr>
+                        <a:t>Path</a:t>
+                      </a:r>
+                    </a:p>
+                  </a:txBody>
+                  <a:tcPr>
+                    <a:solidFill>
+                      <a:srgbClr val="0A1628"/>
+                    </a:solidFill>
+                  </a:tcPr>
+                </a:tc>
+                <a:tc>
+                  <a:txBody>
+                    <a:bodyPr lIns="73152" rIns="73152" tIns="36576" bIns="36576"/>
+                    <a:lstStyle/>
+                    <a:p>
+                      <a:pPr algn="l"/>
+                      <a:r>
+                        <a:rPr sz="1100" b="1">
+                          <a:solidFill>
+                            <a:srgbClr val="FFFFFF"/>
+                          </a:solidFill>
+                          <a:latin typeface="Calibri"/>
+                        </a:rPr>
+                        <a:t>Purpose</a:t>
+                      </a:r>
+                    </a:p>
+                  </a:txBody>
+                  <a:tcPr>
+                    <a:solidFill>
+                      <a:srgbClr val="0A1628"/>
+                    </a:solidFill>
+                  </a:tcPr>
+                </a:tc>
+              </a:tr>
+              <a:tr h="304800">
+                <a:tc>
+                  <a:txBody>
+                    <a:bodyPr lIns="73152" rIns="73152" tIns="36576" bIns="36576"/>
+                    <a:lstStyle/>
+                    <a:p>
+                      <a:pPr algn="l"/>
+                      <a:r>
+                        <a:rPr sz="1100">
+                          <a:solidFill>
+                            <a:srgbClr val="1F2A3D"/>
+                          </a:solidFill>
+                          <a:latin typeface="Calibri"/>
+                        </a:rPr>
+                        <a:t>POST</a:t>
+                      </a:r>
+                    </a:p>
+                  </a:txBody>
+                  <a:tcPr>
+                    <a:solidFill>
+                      <a:srgbClr val="FFFFFF"/>
+                    </a:solidFill>
+                  </a:tcPr>
+                </a:tc>
+                <a:tc>
+                  <a:txBody>
+                    <a:bodyPr lIns="73152" rIns="73152" tIns="36576" bIns="36576"/>
+                    <a:lstStyle/>
+                    <a:p>
+                      <a:pPr algn="l"/>
+                      <a:r>
+                        <a:rPr sz="1100">
+                          <a:solidFill>
+                            <a:srgbClr val="1F2A3D"/>
+                          </a:solidFill>
+                          <a:latin typeface="Calibri"/>
+                        </a:rPr>
+                        <a:t>/api/auth/register</a:t>
+                      </a:r>
+                    </a:p>
+                  </a:txBody>
+                  <a:tcPr>
+                    <a:solidFill>
+                      <a:srgbClr val="FFFFFF"/>
+                    </a:solidFill>
+                  </a:tcPr>
+                </a:tc>
+                <a:tc>
+                  <a:txBody>
+                    <a:bodyPr lIns="73152" rIns="73152" tIns="36576" bIns="36576"/>
+                    <a:lstStyle/>
+                    <a:p>
+                      <a:pPr algn="l"/>
+                      <a:r>
+                        <a:rPr sz="1100">
+                          <a:solidFill>
+                            <a:srgbClr val="1F2A3D"/>
+                          </a:solidFill>
+                          <a:latin typeface="Calibri"/>
+                        </a:rPr>
+                        <a:t>Create account</a:t>
+                      </a:r>
+                    </a:p>
+                  </a:txBody>
+                  <a:tcPr>
+                    <a:solidFill>
+                      <a:srgbClr val="FFFFFF"/>
+                    </a:solidFill>
+                  </a:tcPr>
+                </a:tc>
+              </a:tr>
+              <a:tr h="304800">
+                <a:tc>
+                  <a:txBody>
+                    <a:bodyPr lIns="73152" rIns="73152" tIns="36576" bIns="36576"/>
+                    <a:lstStyle/>
+                    <a:p>
+                      <a:pPr algn="l"/>
+                      <a:r>
+                        <a:rPr sz="1100">
+                          <a:solidFill>
+                            <a:srgbClr val="1F2A3D"/>
+                          </a:solidFill>
+                          <a:latin typeface="Calibri"/>
+                        </a:rPr>
+                        <a:t>POST</a:t>
+                      </a:r>
+                    </a:p>
+                  </a:txBody>
+                  <a:tcPr>
+                    <a:solidFill>
+                      <a:srgbClr val="F3F4F6"/>
+                    </a:solidFill>
+                  </a:tcPr>
+                </a:tc>
+                <a:tc>
+                  <a:txBody>
+                    <a:bodyPr lIns="73152" rIns="73152" tIns="36576" bIns="36576"/>
+                    <a:lstStyle/>
+                    <a:p>
+                      <a:pPr algn="l"/>
+                      <a:r>
+                        <a:rPr sz="1100">
+                          <a:solidFill>
+                            <a:srgbClr val="1F2A3D"/>
+                          </a:solidFill>
+                          <a:latin typeface="Calibri"/>
+                        </a:rPr>
+                        <a:t>/api/auth/login</a:t>
+                      </a:r>
+                    </a:p>
+                  </a:txBody>
+                  <a:tcPr>
+                    <a:solidFill>
+                      <a:srgbClr val="F3F4F6"/>
+                    </a:solidFill>
+                  </a:tcPr>
+                </a:tc>
+                <a:tc>
+                  <a:txBody>
+                    <a:bodyPr lIns="73152" rIns="73152" tIns="36576" bIns="36576"/>
+                    <a:lstStyle/>
+                    <a:p>
+                      <a:pPr algn="l"/>
+                      <a:r>
+                        <a:rPr sz="1100">
+                          <a:solidFill>
+                            <a:srgbClr val="1F2A3D"/>
+                          </a:solidFill>
+                          <a:latin typeface="Calibri"/>
+                        </a:rPr>
+                        <a:t>Returns 32-byte bearer token</a:t>
+                      </a:r>
+                    </a:p>
+                  </a:txBody>
+                  <a:tcPr>
+                    <a:solidFill>
+                      <a:srgbClr val="F3F4F6"/>
+                    </a:solidFill>
+                  </a:tcPr>
+                </a:tc>
+              </a:tr>
+              <a:tr h="304800">
+                <a:tc>
+                  <a:txBody>
+                    <a:bodyPr lIns="73152" rIns="73152" tIns="36576" bIns="36576"/>
+                    <a:lstStyle/>
+                    <a:p>
+                      <a:pPr algn="l"/>
+                      <a:r>
+                        <a:rPr sz="1100">
+                          <a:solidFill>
+                            <a:srgbClr val="1F2A3D"/>
+                          </a:solidFill>
+                          <a:latin typeface="Calibri"/>
+                        </a:rPr>
+                        <a:t>GET</a:t>
+                      </a:r>
+                    </a:p>
+                  </a:txBody>
+                  <a:tcPr>
+                    <a:solidFill>
+                      <a:srgbClr val="FFFFFF"/>
+                    </a:solidFill>
+                  </a:tcPr>
+                </a:tc>
+                <a:tc>
+                  <a:txBody>
+                    <a:bodyPr lIns="73152" rIns="73152" tIns="36576" bIns="36576"/>
+                    <a:lstStyle/>
+                    <a:p>
+                      <a:pPr algn="l"/>
+                      <a:r>
+                        <a:rPr sz="1100">
+                          <a:solidFill>
+                            <a:srgbClr val="1F2A3D"/>
+                          </a:solidFill>
+                          <a:latin typeface="Calibri"/>
+                        </a:rPr>
+                        <a:t>/api/rides</a:t>
+                      </a:r>
+                    </a:p>
+                  </a:txBody>
+                  <a:tcPr>
+                    <a:solidFill>
+                      <a:srgbClr val="FFFFFF"/>
+                    </a:solidFill>
+                  </a:tcPr>
+                </a:tc>
+                <a:tc>
+                  <a:txBody>
+                    <a:bodyPr lIns="73152" rIns="73152" tIns="36576" bIns="36576"/>
+                    <a:lstStyle/>
+                    <a:p>
+                      <a:pPr algn="l"/>
+                      <a:r>
+                        <a:rPr sz="1100">
+                          <a:solidFill>
+                            <a:srgbClr val="1F2A3D"/>
+                          </a:solidFill>
+                          <a:latin typeface="Calibri"/>
+                        </a:rPr>
+                        <a:t>Search with from/to/date/filters</a:t>
+                      </a:r>
+                    </a:p>
+                  </a:txBody>
+                  <a:tcPr>
+                    <a:solidFill>
+                      <a:srgbClr val="FFFFFF"/>
+                    </a:solidFill>
+                  </a:tcPr>
+                </a:tc>
+              </a:tr>
+              <a:tr h="304800">
+                <a:tc>
+                  <a:txBody>
+                    <a:bodyPr lIns="73152" rIns="73152" tIns="36576" bIns="36576"/>
+                    <a:lstStyle/>
+                    <a:p>
+                      <a:pPr algn="l"/>
+                      <a:r>
+                        <a:rPr sz="1100">
+                          <a:solidFill>
+                            <a:srgbClr val="1F2A3D"/>
+                          </a:solidFill>
+                          <a:latin typeface="Calibri"/>
+                        </a:rPr>
+                        <a:t>POST</a:t>
+                      </a:r>
+                    </a:p>
+                  </a:txBody>
+                  <a:tcPr>
+                    <a:solidFill>
+                      <a:srgbClr val="F3F4F6"/>
+                    </a:solidFill>
+                  </a:tcPr>
+                </a:tc>
+                <a:tc>
+                  <a:txBody>
+                    <a:bodyPr lIns="73152" rIns="73152" tIns="36576" bIns="36576"/>
+                    <a:lstStyle/>
+                    <a:p>
+                      <a:pPr algn="l"/>
+                      <a:r>
+                        <a:rPr sz="1100">
+                          <a:solidFill>
+                            <a:srgbClr val="1F2A3D"/>
+                          </a:solidFill>
+                          <a:latin typeface="Calibri"/>
+                        </a:rPr>
+                        <a:t>/api/rides</a:t>
+                      </a:r>
+                    </a:p>
+                  </a:txBody>
+                  <a:tcPr>
+                    <a:solidFill>
+                      <a:srgbClr val="F3F4F6"/>
+                    </a:solidFill>
+                  </a:tcPr>
+                </a:tc>
+                <a:tc>
+                  <a:txBody>
+                    <a:bodyPr lIns="73152" rIns="73152" tIns="36576" bIns="36576"/>
+                    <a:lstStyle/>
+                    <a:p>
+                      <a:pPr algn="l"/>
+                      <a:r>
+                        <a:rPr sz="1100">
+                          <a:solidFill>
+                            <a:srgbClr val="1F2A3D"/>
+                          </a:solidFill>
+                          <a:latin typeface="Calibri"/>
+                        </a:rPr>
+                        <a:t>Driver publishes a ride</a:t>
+                      </a:r>
+                    </a:p>
+                  </a:txBody>
+                  <a:tcPr>
+                    <a:solidFill>
+                      <a:srgbClr val="F3F4F6"/>
+                    </a:solidFill>
+                  </a:tcPr>
+                </a:tc>
+              </a:tr>
+              <a:tr h="304800">
+                <a:tc>
+                  <a:txBody>
+                    <a:bodyPr lIns="73152" rIns="73152" tIns="36576" bIns="36576"/>
+                    <a:lstStyle/>
+                    <a:p>
+                      <a:pPr algn="l"/>
+                      <a:r>
+                        <a:rPr sz="1100">
+                          <a:solidFill>
+                            <a:srgbClr val="1F2A3D"/>
+                          </a:solidFill>
+                          <a:latin typeface="Calibri"/>
+                        </a:rPr>
+                        <a:t>DELETE</a:t>
+                      </a:r>
+                    </a:p>
+                  </a:txBody>
+                  <a:tcPr>
+                    <a:solidFill>
+                      <a:srgbClr val="FFFFFF"/>
+                    </a:solidFill>
+                  </a:tcPr>
+                </a:tc>
+                <a:tc>
+                  <a:txBody>
+                    <a:bodyPr lIns="73152" rIns="73152" tIns="36576" bIns="36576"/>
+                    <a:lstStyle/>
+                    <a:p>
+                      <a:pPr algn="l"/>
+                      <a:r>
+                        <a:rPr sz="1100">
+                          <a:solidFill>
+                            <a:srgbClr val="1F2A3D"/>
+                          </a:solidFill>
+                          <a:latin typeface="Calibri"/>
+                        </a:rPr>
+                        <a:t>/api/rides/{id}</a:t>
+                      </a:r>
+                    </a:p>
+                  </a:txBody>
+                  <a:tcPr>
+                    <a:solidFill>
+                      <a:srgbClr val="FFFFFF"/>
+                    </a:solidFill>
+                  </a:tcPr>
+                </a:tc>
+                <a:tc>
+                  <a:txBody>
+                    <a:bodyPr lIns="73152" rIns="73152" tIns="36576" bIns="36576"/>
+                    <a:lstStyle/>
+                    <a:p>
+                      <a:pPr algn="l"/>
+                      <a:r>
+                        <a:rPr sz="1100">
+                          <a:solidFill>
+                            <a:srgbClr val="1F2A3D"/>
+                          </a:solidFill>
+                          <a:latin typeface="Calibri"/>
+                        </a:rPr>
+                        <a:t>Driver cancels</a:t>
+                      </a:r>
+                    </a:p>
+                  </a:txBody>
+                  <a:tcPr>
+                    <a:solidFill>
+                      <a:srgbClr val="FFFFFF"/>
+                    </a:solidFill>
+                  </a:tcPr>
+                </a:tc>
+              </a:tr>
+              <a:tr h="304800">
+                <a:tc>
+                  <a:txBody>
+                    <a:bodyPr lIns="73152" rIns="73152" tIns="36576" bIns="36576"/>
+                    <a:lstStyle/>
+                    <a:p>
+                      <a:pPr algn="l"/>
+                      <a:r>
+                        <a:rPr sz="1100">
+                          <a:solidFill>
+                            <a:srgbClr val="1F2A3D"/>
+                          </a:solidFill>
+                          <a:latin typeface="Calibri"/>
+                        </a:rPr>
+                        <a:t>POST</a:t>
+                      </a:r>
+                    </a:p>
+                  </a:txBody>
+                  <a:tcPr>
+                    <a:solidFill>
+                      <a:srgbClr val="F3F4F6"/>
+                    </a:solidFill>
+                  </a:tcPr>
+                </a:tc>
+                <a:tc>
+                  <a:txBody>
+                    <a:bodyPr lIns="73152" rIns="73152" tIns="36576" bIns="36576"/>
+                    <a:lstStyle/>
+                    <a:p>
+                      <a:pPr algn="l"/>
+                      <a:r>
+                        <a:rPr sz="1100">
+                          <a:solidFill>
+                            <a:srgbClr val="1F2A3D"/>
+                          </a:solidFill>
+                          <a:latin typeface="Calibri"/>
+                        </a:rPr>
+                        <a:t>/api/bookings</a:t>
+                      </a:r>
+                    </a:p>
+                  </a:txBody>
+                  <a:tcPr>
+                    <a:solidFill>
+                      <a:srgbClr val="F3F4F6"/>
+                    </a:solidFill>
+                  </a:tcPr>
+                </a:tc>
+                <a:tc>
+                  <a:txBody>
+                    <a:bodyPr lIns="73152" rIns="73152" tIns="36576" bIns="36576"/>
+                    <a:lstStyle/>
+                    <a:p>
+                      <a:pPr algn="l"/>
+                      <a:r>
+                        <a:rPr sz="1100">
+                          <a:solidFill>
+                            <a:srgbClr val="1F2A3D"/>
+                          </a:solidFill>
+                          <a:latin typeface="Calibri"/>
+                        </a:rPr>
+                        <a:t>Passenger books — 50% prepayment</a:t>
+                      </a:r>
+                    </a:p>
+                  </a:txBody>
+                  <a:tcPr>
+                    <a:solidFill>
+                      <a:srgbClr val="F3F4F6"/>
+                    </a:solidFill>
+                  </a:tcPr>
+                </a:tc>
+              </a:tr>
+              <a:tr h="304800">
+                <a:tc>
+                  <a:txBody>
+                    <a:bodyPr lIns="73152" rIns="73152" tIns="36576" bIns="36576"/>
+                    <a:lstStyle/>
+                    <a:p>
+                      <a:pPr algn="l"/>
+                      <a:r>
+                        <a:rPr sz="1100">
+                          <a:solidFill>
+                            <a:srgbClr val="1F2A3D"/>
+                          </a:solidFill>
+                          <a:latin typeface="Calibri"/>
+                        </a:rPr>
+                        <a:t>POST</a:t>
+                      </a:r>
+                    </a:p>
+                  </a:txBody>
+                  <a:tcPr>
+                    <a:solidFill>
+                      <a:srgbClr val="FFFFFF"/>
+                    </a:solidFill>
+                  </a:tcPr>
+                </a:tc>
+                <a:tc>
+                  <a:txBody>
+                    <a:bodyPr lIns="73152" rIns="73152" tIns="36576" bIns="36576"/>
+                    <a:lstStyle/>
+                    <a:p>
+                      <a:pPr algn="l"/>
+                      <a:r>
+                        <a:rPr sz="1100">
+                          <a:solidFill>
+                            <a:srgbClr val="1F2A3D"/>
+                          </a:solidFill>
+                          <a:latin typeface="Calibri"/>
+                        </a:rPr>
+                        <a:t>/api/bookings/group</a:t>
+                      </a:r>
+                    </a:p>
+                  </a:txBody>
+                  <a:tcPr>
+                    <a:solidFill>
+                      <a:srgbClr val="FFFFFF"/>
+                    </a:solidFill>
+                  </a:tcPr>
+                </a:tc>
+                <a:tc>
+                  <a:txBody>
+                    <a:bodyPr lIns="73152" rIns="73152" tIns="36576" bIns="36576"/>
+                    <a:lstStyle/>
+                    <a:p>
+                      <a:pPr algn="l"/>
+                      <a:r>
+                        <a:rPr sz="1100">
+                          <a:solidFill>
+                            <a:srgbClr val="1F2A3D"/>
+                          </a:solidFill>
+                          <a:latin typeface="Calibri"/>
+                        </a:rPr>
+                        <a:t>Group booking</a:t>
+                      </a:r>
+                    </a:p>
+                  </a:txBody>
+                  <a:tcPr>
+                    <a:solidFill>
+                      <a:srgbClr val="FFFFFF"/>
+                    </a:solidFill>
+                  </a:tcPr>
+                </a:tc>
+              </a:tr>
+              <a:tr h="304800">
+                <a:tc>
+                  <a:txBody>
+                    <a:bodyPr lIns="73152" rIns="73152" tIns="36576" bIns="36576"/>
+                    <a:lstStyle/>
+                    <a:p>
+                      <a:pPr algn="l"/>
+                      <a:r>
+                        <a:rPr sz="1100">
+                          <a:solidFill>
+                            <a:srgbClr val="1F2A3D"/>
+                          </a:solidFill>
+                          <a:latin typeface="Calibri"/>
+                        </a:rPr>
+                        <a:t>POST</a:t>
+                      </a:r>
+                    </a:p>
+                  </a:txBody>
+                  <a:tcPr>
+                    <a:solidFill>
+                      <a:srgbClr val="F3F4F6"/>
+                    </a:solidFill>
+                  </a:tcPr>
+                </a:tc>
+                <a:tc>
+                  <a:txBody>
+                    <a:bodyPr lIns="73152" rIns="73152" tIns="36576" bIns="36576"/>
+                    <a:lstStyle/>
+                    <a:p>
+                      <a:pPr algn="l"/>
+                      <a:r>
+                        <a:rPr sz="1100">
+                          <a:solidFill>
+                            <a:srgbClr val="1F2A3D"/>
+                          </a:solidFill>
+                          <a:latin typeface="Calibri"/>
+                        </a:rPr>
+                        <a:t>/api/bookings/validate-promo</a:t>
+                      </a:r>
+                    </a:p>
+                  </a:txBody>
+                  <a:tcPr>
+                    <a:solidFill>
+                      <a:srgbClr val="F3F4F6"/>
+                    </a:solidFill>
+                  </a:tcPr>
+                </a:tc>
+                <a:tc>
+                  <a:txBody>
+                    <a:bodyPr lIns="73152" rIns="73152" tIns="36576" bIns="36576"/>
+                    <a:lstStyle/>
+                    <a:p>
+                      <a:pPr algn="l"/>
+                      <a:r>
+                        <a:rPr sz="1100">
+                          <a:solidFill>
+                            <a:srgbClr val="1F2A3D"/>
+                          </a:solidFill>
+                          <a:latin typeface="Calibri"/>
+                        </a:rPr>
+                        <a:t>Org promo code lookup</a:t>
+                      </a:r>
+                    </a:p>
+                  </a:txBody>
+                  <a:tcPr>
+                    <a:solidFill>
+                      <a:srgbClr val="F3F4F6"/>
+                    </a:solidFill>
+                  </a:tcPr>
+                </a:tc>
+              </a:tr>
+              <a:tr h="304800">
+                <a:tc>
+                  <a:txBody>
+                    <a:bodyPr lIns="73152" rIns="73152" tIns="36576" bIns="36576"/>
+                    <a:lstStyle/>
+                    <a:p>
+                      <a:pPr algn="l"/>
+                      <a:r>
+                        <a:rPr sz="1100">
+                          <a:solidFill>
+                            <a:srgbClr val="1F2A3D"/>
+                          </a:solidFill>
+                          <a:latin typeface="Calibri"/>
+                        </a:rPr>
+                        <a:t>POST</a:t>
+                      </a:r>
+                    </a:p>
+                  </a:txBody>
+                  <a:tcPr>
+                    <a:solidFill>
+                      <a:srgbClr val="FFFFFF"/>
+                    </a:solidFill>
+                  </a:tcPr>
+                </a:tc>
+                <a:tc>
+                  <a:txBody>
+                    <a:bodyPr lIns="73152" rIns="73152" tIns="36576" bIns="36576"/>
+                    <a:lstStyle/>
+                    <a:p>
+                      <a:pPr algn="l"/>
+                      <a:r>
+                        <a:rPr sz="1100">
+                          <a:solidFill>
+                            <a:srgbClr val="1F2A3D"/>
+                          </a:solidFill>
+                          <a:latin typeface="Calibri"/>
+                        </a:rPr>
+                        <a:t>/api/bookings/requests/{id}</a:t>
+                      </a:r>
+                    </a:p>
+                  </a:txBody>
+                  <a:tcPr>
+                    <a:solidFill>
+                      <a:srgbClr val="FFFFFF"/>
+                    </a:solidFill>
+                  </a:tcPr>
+                </a:tc>
+                <a:tc>
+                  <a:txBody>
+                    <a:bodyPr lIns="73152" rIns="73152" tIns="36576" bIns="36576"/>
+                    <a:lstStyle/>
+                    <a:p>
+                      <a:pPr algn="l"/>
+                      <a:r>
+                        <a:rPr sz="1100">
+                          <a:solidFill>
+                            <a:srgbClr val="1F2A3D"/>
+                          </a:solidFill>
+                          <a:latin typeface="Calibri"/>
+                        </a:rPr>
+                        <a:t>Driver accepts/rejects</a:t>
+                      </a:r>
+                    </a:p>
+                  </a:txBody>
+                  <a:tcPr>
+                    <a:solidFill>
+                      <a:srgbClr val="FFFFFF"/>
+                    </a:solidFill>
+                  </a:tcPr>
+                </a:tc>
+              </a:tr>
+              <a:tr h="304800">
+                <a:tc>
+                  <a:txBody>
+                    <a:bodyPr lIns="73152" rIns="73152" tIns="36576" bIns="36576"/>
+                    <a:lstStyle/>
+                    <a:p>
+                      <a:pPr algn="l"/>
+                      <a:r>
+                        <a:rPr sz="1100">
+                          <a:solidFill>
+                            <a:srgbClr val="1F2A3D"/>
+                          </a:solidFill>
+                          <a:latin typeface="Calibri"/>
+                        </a:rPr>
+                        <a:t>POST</a:t>
+                      </a:r>
+                    </a:p>
+                  </a:txBody>
+                  <a:tcPr>
+                    <a:solidFill>
+                      <a:srgbClr val="F3F4F6"/>
+                    </a:solidFill>
+                  </a:tcPr>
+                </a:tc>
+                <a:tc>
+                  <a:txBody>
+                    <a:bodyPr lIns="73152" rIns="73152" tIns="36576" bIns="36576"/>
+                    <a:lstStyle/>
+                    <a:p>
+                      <a:pPr algn="l"/>
+                      <a:r>
+                        <a:rPr sz="1100">
+                          <a:solidFill>
+                            <a:srgbClr val="1F2A3D"/>
+                          </a:solidFill>
+                          <a:latin typeface="Calibri"/>
+                        </a:rPr>
+                        <a:t>/api/student/send-otp</a:t>
+                      </a:r>
+                    </a:p>
+                  </a:txBody>
+                  <a:tcPr>
+                    <a:solidFill>
+                      <a:srgbClr val="F3F4F6"/>
+                    </a:solidFill>
+                  </a:tcPr>
+                </a:tc>
+                <a:tc>
+                  <a:txBody>
+                    <a:bodyPr lIns="73152" rIns="73152" tIns="36576" bIns="36576"/>
+                    <a:lstStyle/>
+                    <a:p>
+                      <a:pPr algn="l"/>
+                      <a:r>
+                        <a:rPr sz="1100">
+                          <a:solidFill>
+                            <a:srgbClr val="1F2A3D"/>
+                          </a:solidFill>
+                          <a:latin typeface="Calibri"/>
+                        </a:rPr>
+                        <a:t>Send OTP to university email</a:t>
+                      </a:r>
+                    </a:p>
+                  </a:txBody>
+                  <a:tcPr>
+                    <a:solidFill>
+                      <a:srgbClr val="F3F4F6"/>
+                    </a:solidFill>
+                  </a:tcPr>
+                </a:tc>
+              </a:tr>
+              <a:tr h="304800">
+                <a:tc>
+                  <a:txBody>
+                    <a:bodyPr lIns="73152" rIns="73152" tIns="36576" bIns="36576"/>
+                    <a:lstStyle/>
+                    <a:p>
+                      <a:pPr algn="l"/>
+                      <a:r>
+                        <a:rPr sz="1100">
+                          <a:solidFill>
+                            <a:srgbClr val="1F2A3D"/>
+                          </a:solidFill>
+                          <a:latin typeface="Calibri"/>
+                        </a:rPr>
+                        <a:t>POST</a:t>
+                      </a:r>
+                    </a:p>
+                  </a:txBody>
+                  <a:tcPr>
+                    <a:solidFill>
+                      <a:srgbClr val="FFFFFF"/>
+                    </a:solidFill>
+                  </a:tcPr>
+                </a:tc>
+                <a:tc>
+                  <a:txBody>
+                    <a:bodyPr lIns="73152" rIns="73152" tIns="36576" bIns="36576"/>
+                    <a:lstStyle/>
+                    <a:p>
+                      <a:pPr algn="l"/>
+                      <a:r>
+                        <a:rPr sz="1100">
+                          <a:solidFill>
+                            <a:srgbClr val="1F2A3D"/>
+                          </a:solidFill>
+                          <a:latin typeface="Calibri"/>
+                        </a:rPr>
+                        <a:t>/api/student/verify-otp</a:t>
+                      </a:r>
+                    </a:p>
+                  </a:txBody>
+                  <a:tcPr>
+                    <a:solidFill>
+                      <a:srgbClr val="FFFFFF"/>
+                    </a:solidFill>
+                  </a:tcPr>
+                </a:tc>
+                <a:tc>
+                  <a:txBody>
+                    <a:bodyPr lIns="73152" rIns="73152" tIns="36576" bIns="36576"/>
+                    <a:lstStyle/>
+                    <a:p>
+                      <a:pPr algn="l"/>
+                      <a:r>
+                        <a:rPr sz="1100">
+                          <a:solidFill>
+                            <a:srgbClr val="1F2A3D"/>
+                          </a:solidFill>
+                          <a:latin typeface="Calibri"/>
+                        </a:rPr>
+                        <a:t>Verify OTP, mark verified</a:t>
+                      </a:r>
+                    </a:p>
+                  </a:txBody>
+                  <a:tcPr>
+                    <a:solidFill>
+                      <a:srgbClr val="FFFFFF"/>
+                    </a:solidFill>
+                  </a:tcPr>
+                </a:tc>
+              </a:tr>
+              <a:tr h="304800">
+                <a:tc>
+                  <a:txBody>
+                    <a:bodyPr lIns="73152" rIns="73152" tIns="36576" bIns="36576"/>
+                    <a:lstStyle/>
+                    <a:p>
+                      <a:pPr algn="l"/>
+                      <a:r>
+                        <a:rPr sz="1100">
+                          <a:solidFill>
+                            <a:srgbClr val="1F2A3D"/>
+                          </a:solidFill>
+                          <a:latin typeface="Calibri"/>
+                        </a:rPr>
+                        <a:t>GET</a:t>
+                      </a:r>
+                    </a:p>
+                  </a:txBody>
+                  <a:tcPr>
+                    <a:solidFill>
+                      <a:srgbClr val="F3F4F6"/>
+                    </a:solidFill>
+                  </a:tcPr>
+                </a:tc>
+                <a:tc>
+                  <a:txBody>
+                    <a:bodyPr lIns="73152" rIns="73152" tIns="36576" bIns="36576"/>
+                    <a:lstStyle/>
+                    <a:p>
+                      <a:pPr algn="l"/>
+                      <a:r>
+                        <a:rPr sz="1100">
+                          <a:solidFill>
+                            <a:srgbClr val="1F2A3D"/>
+                          </a:solidFill>
+                          <a:latin typeface="Calibri"/>
+                        </a:rPr>
+                        <a:t>/api/admin/organizations</a:t>
+                      </a:r>
+                    </a:p>
+                  </a:txBody>
+                  <a:tcPr>
+                    <a:solidFill>
+                      <a:srgbClr val="F3F4F6"/>
+                    </a:solidFill>
+                  </a:tcPr>
+                </a:tc>
+                <a:tc>
+                  <a:txBody>
+                    <a:bodyPr lIns="73152" rIns="73152" tIns="36576" bIns="36576"/>
+                    <a:lstStyle/>
+                    <a:p>
+                      <a:pPr algn="l"/>
+                      <a:r>
+                        <a:rPr sz="1100">
+                          <a:solidFill>
+                            <a:srgbClr val="1F2A3D"/>
+                          </a:solidFill>
+                          <a:latin typeface="Calibri"/>
+                        </a:rPr>
+                        <a:t>List org accounts (admin)</a:t>
+                      </a:r>
+                    </a:p>
+                  </a:txBody>
+                  <a:tcPr>
+                    <a:solidFill>
+                      <a:srgbClr val="F3F4F6"/>
+                    </a:solidFill>
+                  </a:tcPr>
+                </a:tc>
+              </a:tr>
+              <a:tr h="304800">
+                <a:tc>
+                  <a:txBody>
+                    <a:bodyPr lIns="73152" rIns="73152" tIns="36576" bIns="36576"/>
+                    <a:lstStyle/>
+                    <a:p>
+                      <a:pPr algn="l"/>
+                      <a:r>
+                        <a:rPr sz="1100">
+                          <a:solidFill>
+                            <a:srgbClr val="1F2A3D"/>
+                          </a:solidFill>
+                          <a:latin typeface="Calibri"/>
+                        </a:rPr>
+                        <a:t>POST</a:t>
+                      </a:r>
+                    </a:p>
+                  </a:txBody>
+                  <a:tcPr>
+                    <a:solidFill>
+                      <a:srgbClr val="FFFFFF"/>
+                    </a:solidFill>
+                  </a:tcPr>
+                </a:tc>
+                <a:tc>
+                  <a:txBody>
+                    <a:bodyPr lIns="73152" rIns="73152" tIns="36576" bIns="36576"/>
+                    <a:lstStyle/>
+                    <a:p>
+                      <a:pPr algn="l"/>
+                      <a:r>
+                        <a:rPr sz="1100">
+                          <a:solidFill>
+                            <a:srgbClr val="1F2A3D"/>
+                          </a:solidFill>
+                          <a:latin typeface="Calibri"/>
+                        </a:rPr>
+                        <a:t>/api/admin/organizations/{id}/review</a:t>
+                      </a:r>
+                    </a:p>
+                  </a:txBody>
+                  <a:tcPr>
+                    <a:solidFill>
+                      <a:srgbClr val="FFFFFF"/>
+                    </a:solidFill>
+                  </a:tcPr>
+                </a:tc>
+                <a:tc>
+                  <a:txBody>
+                    <a:bodyPr lIns="73152" rIns="73152" tIns="36576" bIns="36576"/>
+                    <a:lstStyle/>
+                    <a:p>
+                      <a:pPr algn="l"/>
+                      <a:r>
+                        <a:rPr sz="1100">
+                          <a:solidFill>
+                            <a:srgbClr val="1F2A3D"/>
+                          </a:solidFill>
+                          <a:latin typeface="Calibri"/>
+                        </a:rPr>
+                        <a:t>Approve / reject org</a:t>
+                      </a:r>
+                    </a:p>
+                  </a:txBody>
+                  <a:tcPr>
+                    <a:solidFill>
+                      <a:srgbClr val="FFFFFF"/>
+                    </a:solidFill>
+                  </a:tcPr>
+                </a:tc>
+              </a:tr>
+              <a:tr h="304800">
+                <a:tc>
+                  <a:txBody>
+                    <a:bodyPr lIns="73152" rIns="73152" tIns="36576" bIns="36576"/>
+                    <a:lstStyle/>
+                    <a:p>
+                      <a:pPr algn="l"/>
+                      <a:r>
+                        <a:rPr sz="1100">
+                          <a:solidFill>
+                            <a:srgbClr val="1F2A3D"/>
+                          </a:solidFill>
+                          <a:latin typeface="Calibri"/>
+                        </a:rPr>
+                        <a:t>GET</a:t>
+                      </a:r>
+                    </a:p>
+                  </a:txBody>
+                  <a:tcPr>
+                    <a:solidFill>
+                      <a:srgbClr val="F3F4F6"/>
+                    </a:solidFill>
+                  </a:tcPr>
+                </a:tc>
+                <a:tc>
+                  <a:txBody>
+                    <a:bodyPr lIns="73152" rIns="73152" tIns="36576" bIns="36576"/>
+                    <a:lstStyle/>
+                    <a:p>
+                      <a:pPr algn="l"/>
+                      <a:r>
+                        <a:rPr sz="1100">
+                          <a:solidFill>
+                            <a:srgbClr val="1F2A3D"/>
+                          </a:solidFill>
+                          <a:latin typeface="Calibri"/>
+                        </a:rPr>
+                        <a:t>/api/feed</a:t>
+                      </a:r>
+                    </a:p>
+                  </a:txBody>
+                  <a:tcPr>
+                    <a:solidFill>
+                      <a:srgbClr val="F3F4F6"/>
+                    </a:solidFill>
+                  </a:tcPr>
+                </a:tc>
+                <a:tc>
+                  <a:txBody>
+                    <a:bodyPr lIns="73152" rIns="73152" tIns="36576" bIns="36576"/>
+                    <a:lstStyle/>
+                    <a:p>
+                      <a:pPr algn="l"/>
+                      <a:r>
+                        <a:rPr sz="1100">
+                          <a:solidFill>
+                            <a:srgbClr val="1F2A3D"/>
+                          </a:solidFill>
+                          <a:latin typeface="Calibri"/>
+                        </a:rPr>
+                        <a:t>Social feed (posts + interactions)</a:t>
+                      </a:r>
+                    </a:p>
+                  </a:txBody>
+                  <a:tcPr>
+                    <a:solidFill>
+                      <a:srgbClr val="F3F4F6"/>
+                    </a:solidFill>
+                  </a:tcPr>
+                </a:tc>
+              </a:tr>
+            </a:tbl>
+          </a:graphicData>
+        </a:graphic>
+      </p:graphicFrame>
+      <p:sp>
+        <p:nvSpPr>
+          <p:cNvPr id="8" name="TextBox 7"/>
+          <p:cNvSpPr txBox="1"/>
+          <p:nvPr/>
+        </p:nvSpPr>
+        <p:spPr>
+          <a:xfrm>
+            <a:off x="457200" y="6172200"/>
+            <a:ext cx="10972800" cy="274320"/>
+          </a:xfrm>
+          <a:prstGeom prst="rect">
+            <a:avLst/>
+          </a:prstGeom>
+          <a:noFill/>
+        </p:spPr>
+        <p:txBody>
+          <a:bodyPr wrap="square" anchor="t" lIns="45720" rIns="45720" tIns="18288" bIns="18288">
+            <a:spAutoFit/>
+          </a:bodyPr>
+          <a:lstStyle/>
+          <a:p>
+            <a:pPr algn="ctr"/>
+            <a:r>
+              <a:rPr sz="1100" b="0">
+                <a:solidFill>
+                  <a:srgbClr val="6B7280"/>
+                </a:solidFill>
+                <a:latin typeface="Calibri"/>
+              </a:rPr>
+              <a:t>All protected endpoints require the Authorization: Bearer &lt;token&gt; header.</a:t>
+            </a:r>
+          </a:p>
+        </p:txBody>
+      </p:sp>
+      <p:sp>
+        <p:nvSpPr>
+          <p:cNvPr id="9" name="Rectangle 8"/>
+          <p:cNvSpPr/>
+          <p:nvPr/>
+        </p:nvSpPr>
+        <p:spPr>
+          <a:xfrm>
+            <a:off x="0" y="6537960"/>
+            <a:ext cx="12191695" cy="320040"/>
+          </a:xfrm>
+          <a:prstGeom prst="rect">
+            <a:avLst/>
+          </a:prstGeom>
+          <a:solidFill>
+            <a:srgbClr val="0A1628"/>
+          </a:solidFill>
+          <a:ln>
+            <a:noFill/>
+          </a:ln>
+          <a:effectLst/>
+        </p:spPr>
+        <p:style>
+          <a:lnRef idx="1">
+            <a:schemeClr val="accent1"/>
+          </a:lnRef>
+          <a:fillRef idx="3">
+            <a:schemeClr val="accent1"/>
+          </a:fillRef>
+          <a:effectRef idx="2">
+            <a:schemeClr val="accent1"/>
+          </a:effectRef>
+          <a:fontRef idx="minor">
+            <a:schemeClr val="lt1"/>
+          </a:fontRef>
+        </p:style>
+        <p:txBody>
+          <a:bodyPr rtlCol="0" anchor="ctr"/>
+          <a:lstStyle/>
+          <a:p>
+            <a:pPr algn="ctr"/>
+          </a:p>
+        </p:txBody>
+      </p:sp>
+      <p:sp>
+        <p:nvSpPr>
+          <p:cNvPr id="10" name="TextBox 9"/>
+          <p:cNvSpPr txBox="1"/>
+          <p:nvPr/>
+        </p:nvSpPr>
+        <p:spPr>
+          <a:xfrm>
+            <a:off x="457200" y="6583680"/>
+            <a:ext cx="7315200" cy="274320"/>
+          </a:xfrm>
+          <a:prstGeom prst="rect">
+            <a:avLst/>
+          </a:prstGeom>
+          <a:noFill/>
+        </p:spPr>
+        <p:txBody>
+          <a:bodyPr wrap="square" anchor="ctr" lIns="45720" rIns="45720" tIns="18288" bIns="18288">
+            <a:spAutoFit/>
+          </a:bodyPr>
+          <a:lstStyle/>
+          <a:p>
+            <a:pPr algn="l"/>
+            <a:r>
+              <a:rPr sz="1000" b="0">
+                <a:solidFill>
+                  <a:srgbClr val="FFFFFF"/>
+                </a:solidFill>
+                <a:latin typeface="Calibri"/>
+              </a:rPr>
+              <a:t>ForsaDrive  •  Final Year Project Defense  •  ATOMIC IT</a:t>
+            </a:r>
+          </a:p>
+        </p:txBody>
+      </p:sp>
+      <p:sp>
+        <p:nvSpPr>
+          <p:cNvPr id="11" name="TextBox 10"/>
+          <p:cNvSpPr txBox="1"/>
+          <p:nvPr/>
+        </p:nvSpPr>
+        <p:spPr>
+          <a:xfrm>
+            <a:off x="10515600" y="6583680"/>
+            <a:ext cx="1371600" cy="274320"/>
+          </a:xfrm>
+          <a:prstGeom prst="rect">
+            <a:avLst/>
+          </a:prstGeom>
+          <a:noFill/>
+        </p:spPr>
+        <p:txBody>
+          <a:bodyPr wrap="square" anchor="ctr" lIns="45720" rIns="45720" tIns="18288" bIns="18288">
+            <a:spAutoFit/>
+          </a:bodyPr>
+          <a:lstStyle/>
+          <a:p>
+            <a:pPr algn="r"/>
+            <a:r>
+              <a:rPr sz="1000" b="1">
+                <a:solidFill>
+                  <a:srgbClr val="E8B84B"/>
+                </a:solidFill>
+                <a:latin typeface="Calibri"/>
+              </a:rPr>
+              <a:t>G / 21</a:t>
+            </a:r>
+          </a:p>
+        </p:txBody>
+      </p:sp>
+    </p:spTree>
+  </p:cSld>
+  <p:clrMapOvr>
+    <a:masterClrMapping/>
+  </p:clrMapOvr>
+</p:sld>
+</file>
+
 <file path=ppt/slides/slide3.xml><?xml version="1.0" encoding="utf-8"?>
 <p:sld xmlns:a="http://schemas.openxmlformats.org/drawingml/2006/main" xmlns:p="http://schemas.openxmlformats.org/presentationml/2006/main" xmlns:r="http://schemas.openxmlformats.org/officeDocument/2006/relationships">
   <p:cSld>
@@ -18963,6 +24437,894 @@
                 <a:latin typeface="Calibri"/>
               </a:rPr>
               <a:t>3 / 21</a:t>
+            </a:r>
+          </a:p>
+        </p:txBody>
+      </p:sp>
+    </p:spTree>
+  </p:cSld>
+  <p:clrMapOvr>
+    <a:masterClrMapping/>
+  </p:clrMapOvr>
+</p:sld>
+</file>
+
+<file path=ppt/slides/slide30.xml><?xml version="1.0" encoding="utf-8"?>
+<p:sld xmlns:a="http://schemas.openxmlformats.org/drawingml/2006/main" xmlns:p="http://schemas.openxmlformats.org/presentationml/2006/main" xmlns:r="http://schemas.openxmlformats.org/officeDocument/2006/relationships">
+  <p:cSld>
+    <p:spTree>
+      <p:nvGrpSpPr>
+        <p:cNvPr id="1" name=""/>
+        <p:cNvGrpSpPr/>
+        <p:nvPr/>
+      </p:nvGrpSpPr>
+      <p:grpSpPr/>
+      <p:sp>
+        <p:nvSpPr>
+          <p:cNvPr id="2" name="Rectangle 1"/>
+          <p:cNvSpPr/>
+          <p:nvPr/>
+        </p:nvSpPr>
+        <p:spPr>
+          <a:xfrm>
+            <a:off x="0" y="0"/>
+            <a:ext cx="12191695" cy="6858000"/>
+          </a:xfrm>
+          <a:prstGeom prst="rect">
+            <a:avLst/>
+          </a:prstGeom>
+          <a:solidFill>
+            <a:srgbClr val="FFFFFF"/>
+          </a:solidFill>
+          <a:ln>
+            <a:noFill/>
+          </a:ln>
+          <a:effectLst/>
+        </p:spPr>
+        <p:style>
+          <a:lnRef idx="1">
+            <a:schemeClr val="accent1"/>
+          </a:lnRef>
+          <a:fillRef idx="3">
+            <a:schemeClr val="accent1"/>
+          </a:fillRef>
+          <a:effectRef idx="2">
+            <a:schemeClr val="accent1"/>
+          </a:effectRef>
+          <a:fontRef idx="minor">
+            <a:schemeClr val="lt1"/>
+          </a:fontRef>
+        </p:style>
+        <p:txBody>
+          <a:bodyPr rtlCol="0" anchor="ctr"/>
+          <a:lstStyle/>
+          <a:p>
+            <a:pPr algn="ctr"/>
+          </a:p>
+        </p:txBody>
+      </p:sp>
+      <p:sp>
+        <p:nvSpPr>
+          <p:cNvPr id="3" name="Rectangle 2"/>
+          <p:cNvSpPr/>
+          <p:nvPr/>
+        </p:nvSpPr>
+        <p:spPr>
+          <a:xfrm>
+            <a:off x="0" y="0"/>
+            <a:ext cx="12191695" cy="1097280"/>
+          </a:xfrm>
+          <a:prstGeom prst="rect">
+            <a:avLst/>
+          </a:prstGeom>
+          <a:solidFill>
+            <a:srgbClr val="0A1628"/>
+          </a:solidFill>
+          <a:ln>
+            <a:noFill/>
+          </a:ln>
+          <a:effectLst/>
+        </p:spPr>
+        <p:style>
+          <a:lnRef idx="1">
+            <a:schemeClr val="accent1"/>
+          </a:lnRef>
+          <a:fillRef idx="3">
+            <a:schemeClr val="accent1"/>
+          </a:fillRef>
+          <a:effectRef idx="2">
+            <a:schemeClr val="accent1"/>
+          </a:effectRef>
+          <a:fontRef idx="minor">
+            <a:schemeClr val="lt1"/>
+          </a:fontRef>
+        </p:style>
+        <p:txBody>
+          <a:bodyPr rtlCol="0" anchor="ctr"/>
+          <a:lstStyle/>
+          <a:p>
+            <a:pPr algn="ctr"/>
+          </a:p>
+        </p:txBody>
+      </p:sp>
+      <p:sp>
+        <p:nvSpPr>
+          <p:cNvPr id="4" name="Rectangle 3"/>
+          <p:cNvSpPr/>
+          <p:nvPr/>
+        </p:nvSpPr>
+        <p:spPr>
+          <a:xfrm>
+            <a:off x="0" y="1097280"/>
+            <a:ext cx="12191695" cy="54864"/>
+          </a:xfrm>
+          <a:prstGeom prst="rect">
+            <a:avLst/>
+          </a:prstGeom>
+          <a:solidFill>
+            <a:srgbClr val="E8B84B"/>
+          </a:solidFill>
+          <a:ln>
+            <a:noFill/>
+          </a:ln>
+          <a:effectLst/>
+        </p:spPr>
+        <p:style>
+          <a:lnRef idx="1">
+            <a:schemeClr val="accent1"/>
+          </a:lnRef>
+          <a:fillRef idx="3">
+            <a:schemeClr val="accent1"/>
+          </a:fillRef>
+          <a:effectRef idx="2">
+            <a:schemeClr val="accent1"/>
+          </a:effectRef>
+          <a:fontRef idx="minor">
+            <a:schemeClr val="lt1"/>
+          </a:fontRef>
+        </p:style>
+        <p:txBody>
+          <a:bodyPr rtlCol="0" anchor="ctr"/>
+          <a:lstStyle/>
+          <a:p>
+            <a:pPr algn="ctr"/>
+          </a:p>
+        </p:txBody>
+      </p:sp>
+      <p:sp>
+        <p:nvSpPr>
+          <p:cNvPr id="5" name="TextBox 4"/>
+          <p:cNvSpPr txBox="1"/>
+          <p:nvPr/>
+        </p:nvSpPr>
+        <p:spPr>
+          <a:xfrm>
+            <a:off x="457200" y="164592"/>
+            <a:ext cx="7315200" cy="320040"/>
+          </a:xfrm>
+          <a:prstGeom prst="rect">
+            <a:avLst/>
+          </a:prstGeom>
+          <a:noFill/>
+        </p:spPr>
+        <p:txBody>
+          <a:bodyPr wrap="square" anchor="t" lIns="45720" rIns="45720" tIns="18288" bIns="18288">
+            <a:spAutoFit/>
+          </a:bodyPr>
+          <a:lstStyle/>
+          <a:p>
+            <a:pPr algn="l"/>
+            <a:r>
+              <a:rPr sz="1100" b="1">
+                <a:solidFill>
+                  <a:srgbClr val="E8B84B"/>
+                </a:solidFill>
+                <a:latin typeface="Calibri"/>
+              </a:rPr>
+              <a:t>BACKUP H · RISK &amp; MITIGATIONS</a:t>
+            </a:r>
+          </a:p>
+        </p:txBody>
+      </p:sp>
+      <p:sp>
+        <p:nvSpPr>
+          <p:cNvPr id="6" name="TextBox 5"/>
+          <p:cNvSpPr txBox="1"/>
+          <p:nvPr/>
+        </p:nvSpPr>
+        <p:spPr>
+          <a:xfrm>
+            <a:off x="457200" y="457200"/>
+            <a:ext cx="10972800" cy="640080"/>
+          </a:xfrm>
+          <a:prstGeom prst="rect">
+            <a:avLst/>
+          </a:prstGeom>
+          <a:noFill/>
+        </p:spPr>
+        <p:txBody>
+          <a:bodyPr wrap="square" anchor="t" lIns="45720" rIns="45720" tIns="18288" bIns="18288">
+            <a:spAutoFit/>
+          </a:bodyPr>
+          <a:lstStyle/>
+          <a:p>
+            <a:pPr algn="l"/>
+            <a:r>
+              <a:rPr sz="2600" b="1">
+                <a:solidFill>
+                  <a:srgbClr val="FFFFFF"/>
+                </a:solidFill>
+                <a:latin typeface="Calibri"/>
+              </a:rPr>
+              <a:t>Security posture</a:t>
+            </a:r>
+          </a:p>
+        </p:txBody>
+      </p:sp>
+      <p:graphicFrame>
+        <p:nvGraphicFramePr>
+          <p:cNvPr id="7" name="Table 6"/>
+          <p:cNvGraphicFramePr>
+            <a:graphicFrameLocks noGrp="1"/>
+          </p:cNvGraphicFramePr>
+          <p:nvPr/>
+        </p:nvGraphicFramePr>
+        <p:xfrm>
+          <a:off x="457200" y="1463040"/>
+          <a:ext cx="11247120" cy="4846320"/>
+        </p:xfrm>
+        <a:graphic>
+          <a:graphicData uri="http://schemas.openxmlformats.org/drawingml/2006/table">
+            <a:tbl>
+              <a:tblPr firstRow="1" bandRow="1">
+                <a:tableStyleId>{5C22544A-7EE6-4342-B048-85BDC9FD1C3A}</a:tableStyleId>
+              </a:tblPr>
+              <a:tblGrid>
+                <a:gridCol w="5623560"/>
+                <a:gridCol w="5623560"/>
+              </a:tblGrid>
+              <a:tr h="440574">
+                <a:tc>
+                  <a:txBody>
+                    <a:bodyPr lIns="73152" rIns="73152" tIns="36576" bIns="36576"/>
+                    <a:lstStyle/>
+                    <a:p>
+                      <a:pPr algn="l"/>
+                      <a:r>
+                        <a:rPr sz="1200" b="1">
+                          <a:solidFill>
+                            <a:srgbClr val="FFFFFF"/>
+                          </a:solidFill>
+                          <a:latin typeface="Calibri"/>
+                        </a:rPr>
+                        <a:t>Concern</a:t>
+                      </a:r>
+                    </a:p>
+                  </a:txBody>
+                  <a:tcPr>
+                    <a:solidFill>
+                      <a:srgbClr val="0A1628"/>
+                    </a:solidFill>
+                  </a:tcPr>
+                </a:tc>
+                <a:tc>
+                  <a:txBody>
+                    <a:bodyPr lIns="73152" rIns="73152" tIns="36576" bIns="36576"/>
+                    <a:lstStyle/>
+                    <a:p>
+                      <a:pPr algn="l"/>
+                      <a:r>
+                        <a:rPr sz="1200" b="1">
+                          <a:solidFill>
+                            <a:srgbClr val="FFFFFF"/>
+                          </a:solidFill>
+                          <a:latin typeface="Calibri"/>
+                        </a:rPr>
+                        <a:t>Mitigation</a:t>
+                      </a:r>
+                    </a:p>
+                  </a:txBody>
+                  <a:tcPr>
+                    <a:solidFill>
+                      <a:srgbClr val="0A1628"/>
+                    </a:solidFill>
+                  </a:tcPr>
+                </a:tc>
+              </a:tr>
+              <a:tr h="440574">
+                <a:tc>
+                  <a:txBody>
+                    <a:bodyPr lIns="73152" rIns="73152" tIns="36576" bIns="36576"/>
+                    <a:lstStyle/>
+                    <a:p>
+                      <a:pPr algn="l"/>
+                      <a:r>
+                        <a:rPr sz="1200">
+                          <a:solidFill>
+                            <a:srgbClr val="1F2A3D"/>
+                          </a:solidFill>
+                          <a:latin typeface="Calibri"/>
+                        </a:rPr>
+                        <a:t>Password storage</a:t>
+                      </a:r>
+                    </a:p>
+                  </a:txBody>
+                  <a:tcPr>
+                    <a:solidFill>
+                      <a:srgbClr val="FFFFFF"/>
+                    </a:solidFill>
+                  </a:tcPr>
+                </a:tc>
+                <a:tc>
+                  <a:txBody>
+                    <a:bodyPr lIns="73152" rIns="73152" tIns="36576" bIns="36576"/>
+                    <a:lstStyle/>
+                    <a:p>
+                      <a:pPr algn="l"/>
+                      <a:r>
+                        <a:rPr sz="1200">
+                          <a:solidFill>
+                            <a:srgbClr val="1F2A3D"/>
+                          </a:solidFill>
+                          <a:latin typeface="Calibri"/>
+                        </a:rPr>
+                        <a:t>bcrypt via PHP password_hash</a:t>
+                      </a:r>
+                    </a:p>
+                  </a:txBody>
+                  <a:tcPr>
+                    <a:solidFill>
+                      <a:srgbClr val="FFFFFF"/>
+                    </a:solidFill>
+                  </a:tcPr>
+                </a:tc>
+              </a:tr>
+              <a:tr h="440574">
+                <a:tc>
+                  <a:txBody>
+                    <a:bodyPr lIns="73152" rIns="73152" tIns="36576" bIns="36576"/>
+                    <a:lstStyle/>
+                    <a:p>
+                      <a:pPr algn="l"/>
+                      <a:r>
+                        <a:rPr sz="1200">
+                          <a:solidFill>
+                            <a:srgbClr val="1F2A3D"/>
+                          </a:solidFill>
+                          <a:latin typeface="Calibri"/>
+                        </a:rPr>
+                        <a:t>Session</a:t>
+                      </a:r>
+                    </a:p>
+                  </a:txBody>
+                  <a:tcPr>
+                    <a:solidFill>
+                      <a:srgbClr val="F3F4F6"/>
+                    </a:solidFill>
+                  </a:tcPr>
+                </a:tc>
+                <a:tc>
+                  <a:txBody>
+                    <a:bodyPr lIns="73152" rIns="73152" tIns="36576" bIns="36576"/>
+                    <a:lstStyle/>
+                    <a:p>
+                      <a:pPr algn="l"/>
+                      <a:r>
+                        <a:rPr sz="1200">
+                          <a:solidFill>
+                            <a:srgbClr val="1F2A3D"/>
+                          </a:solidFill>
+                          <a:latin typeface="Calibri"/>
+                        </a:rPr>
+                        <a:t>Random 32-byte hex bearer token, 30-day TTL</a:t>
+                      </a:r>
+                    </a:p>
+                  </a:txBody>
+                  <a:tcPr>
+                    <a:solidFill>
+                      <a:srgbClr val="F3F4F6"/>
+                    </a:solidFill>
+                  </a:tcPr>
+                </a:tc>
+              </a:tr>
+              <a:tr h="440574">
+                <a:tc>
+                  <a:txBody>
+                    <a:bodyPr lIns="73152" rIns="73152" tIns="36576" bIns="36576"/>
+                    <a:lstStyle/>
+                    <a:p>
+                      <a:pPr algn="l"/>
+                      <a:r>
+                        <a:rPr sz="1200">
+                          <a:solidFill>
+                            <a:srgbClr val="1F2A3D"/>
+                          </a:solidFill>
+                          <a:latin typeface="Calibri"/>
+                        </a:rPr>
+                        <a:t>Transport</a:t>
+                      </a:r>
+                    </a:p>
+                  </a:txBody>
+                  <a:tcPr>
+                    <a:solidFill>
+                      <a:srgbClr val="FFFFFF"/>
+                    </a:solidFill>
+                  </a:tcPr>
+                </a:tc>
+                <a:tc>
+                  <a:txBody>
+                    <a:bodyPr lIns="73152" rIns="73152" tIns="36576" bIns="36576"/>
+                    <a:lstStyle/>
+                    <a:p>
+                      <a:pPr algn="l"/>
+                      <a:r>
+                        <a:rPr sz="1200">
+                          <a:solidFill>
+                            <a:srgbClr val="1F2A3D"/>
+                          </a:solidFill>
+                          <a:latin typeface="Calibri"/>
+                        </a:rPr>
+                        <a:t>HTTPS in production (XAMPP HTTP for dev)</a:t>
+                      </a:r>
+                    </a:p>
+                  </a:txBody>
+                  <a:tcPr>
+                    <a:solidFill>
+                      <a:srgbClr val="FFFFFF"/>
+                    </a:solidFill>
+                  </a:tcPr>
+                </a:tc>
+              </a:tr>
+              <a:tr h="440574">
+                <a:tc>
+                  <a:txBody>
+                    <a:bodyPr lIns="73152" rIns="73152" tIns="36576" bIns="36576"/>
+                    <a:lstStyle/>
+                    <a:p>
+                      <a:pPr algn="l"/>
+                      <a:r>
+                        <a:rPr sz="1200">
+                          <a:solidFill>
+                            <a:srgbClr val="1F2A3D"/>
+                          </a:solidFill>
+                          <a:latin typeface="Calibri"/>
+                        </a:rPr>
+                        <a:t>SQL injection</a:t>
+                      </a:r>
+                    </a:p>
+                  </a:txBody>
+                  <a:tcPr>
+                    <a:solidFill>
+                      <a:srgbClr val="F3F4F6"/>
+                    </a:solidFill>
+                  </a:tcPr>
+                </a:tc>
+                <a:tc>
+                  <a:txBody>
+                    <a:bodyPr lIns="73152" rIns="73152" tIns="36576" bIns="36576"/>
+                    <a:lstStyle/>
+                    <a:p>
+                      <a:pPr algn="l"/>
+                      <a:r>
+                        <a:rPr sz="1200">
+                          <a:solidFill>
+                            <a:srgbClr val="1F2A3D"/>
+                          </a:solidFill>
+                          <a:latin typeface="Calibri"/>
+                        </a:rPr>
+                        <a:t>PDO with parameterized queries everywhere</a:t>
+                      </a:r>
+                    </a:p>
+                  </a:txBody>
+                  <a:tcPr>
+                    <a:solidFill>
+                      <a:srgbClr val="F3F4F6"/>
+                    </a:solidFill>
+                  </a:tcPr>
+                </a:tc>
+              </a:tr>
+              <a:tr h="440574">
+                <a:tc>
+                  <a:txBody>
+                    <a:bodyPr lIns="73152" rIns="73152" tIns="36576" bIns="36576"/>
+                    <a:lstStyle/>
+                    <a:p>
+                      <a:pPr algn="l"/>
+                      <a:r>
+                        <a:rPr sz="1200">
+                          <a:solidFill>
+                            <a:srgbClr val="1F2A3D"/>
+                          </a:solidFill>
+                          <a:latin typeface="Calibri"/>
+                        </a:rPr>
+                        <a:t>XSS</a:t>
+                      </a:r>
+                    </a:p>
+                  </a:txBody>
+                  <a:tcPr>
+                    <a:solidFill>
+                      <a:srgbClr val="FFFFFF"/>
+                    </a:solidFill>
+                  </a:tcPr>
+                </a:tc>
+                <a:tc>
+                  <a:txBody>
+                    <a:bodyPr lIns="73152" rIns="73152" tIns="36576" bIns="36576"/>
+                    <a:lstStyle/>
+                    <a:p>
+                      <a:pPr algn="l"/>
+                      <a:r>
+                        <a:rPr sz="1200">
+                          <a:solidFill>
+                            <a:srgbClr val="1F2A3D"/>
+                          </a:solidFill>
+                          <a:latin typeface="Calibri"/>
+                        </a:rPr>
+                        <a:t>Server-rendered output is escaped (htmlspecialchars)</a:t>
+                      </a:r>
+                    </a:p>
+                  </a:txBody>
+                  <a:tcPr>
+                    <a:solidFill>
+                      <a:srgbClr val="FFFFFF"/>
+                    </a:solidFill>
+                  </a:tcPr>
+                </a:tc>
+              </a:tr>
+              <a:tr h="440574">
+                <a:tc>
+                  <a:txBody>
+                    <a:bodyPr lIns="73152" rIns="73152" tIns="36576" bIns="36576"/>
+                    <a:lstStyle/>
+                    <a:p>
+                      <a:pPr algn="l"/>
+                      <a:r>
+                        <a:rPr sz="1200">
+                          <a:solidFill>
+                            <a:srgbClr val="1F2A3D"/>
+                          </a:solidFill>
+                          <a:latin typeface="Calibri"/>
+                        </a:rPr>
+                        <a:t>CSRF (web admin)</a:t>
+                      </a:r>
+                    </a:p>
+                  </a:txBody>
+                  <a:tcPr>
+                    <a:solidFill>
+                      <a:srgbClr val="F3F4F6"/>
+                    </a:solidFill>
+                  </a:tcPr>
+                </a:tc>
+                <a:tc>
+                  <a:txBody>
+                    <a:bodyPr lIns="73152" rIns="73152" tIns="36576" bIns="36576"/>
+                    <a:lstStyle/>
+                    <a:p>
+                      <a:pPr algn="l"/>
+                      <a:r>
+                        <a:rPr sz="1200">
+                          <a:solidFill>
+                            <a:srgbClr val="1F2A3D"/>
+                          </a:solidFill>
+                          <a:latin typeface="Calibri"/>
+                        </a:rPr>
+                        <a:t>Same-origin admin panel + session-based auth</a:t>
+                      </a:r>
+                    </a:p>
+                  </a:txBody>
+                  <a:tcPr>
+                    <a:solidFill>
+                      <a:srgbClr val="F3F4F6"/>
+                    </a:solidFill>
+                  </a:tcPr>
+                </a:tc>
+              </a:tr>
+              <a:tr h="440574">
+                <a:tc>
+                  <a:txBody>
+                    <a:bodyPr lIns="73152" rIns="73152" tIns="36576" bIns="36576"/>
+                    <a:lstStyle/>
+                    <a:p>
+                      <a:pPr algn="l"/>
+                      <a:r>
+                        <a:rPr sz="1200">
+                          <a:solidFill>
+                            <a:srgbClr val="1F2A3D"/>
+                          </a:solidFill>
+                          <a:latin typeface="Calibri"/>
+                        </a:rPr>
+                        <a:t>Admin separation</a:t>
+                      </a:r>
+                    </a:p>
+                  </a:txBody>
+                  <a:tcPr>
+                    <a:solidFill>
+                      <a:srgbClr val="FFFFFF"/>
+                    </a:solidFill>
+                  </a:tcPr>
+                </a:tc>
+                <a:tc>
+                  <a:txBody>
+                    <a:bodyPr lIns="73152" rIns="73152" tIns="36576" bIns="36576"/>
+                    <a:lstStyle/>
+                    <a:p>
+                      <a:pPr algn="l"/>
+                      <a:r>
+                        <a:rPr sz="1200">
+                          <a:solidFill>
+                            <a:srgbClr val="1F2A3D"/>
+                          </a:solidFill>
+                          <a:latin typeface="Calibri"/>
+                        </a:rPr>
+                        <a:t>Admin login blocked on the mobile API (web-only)</a:t>
+                      </a:r>
+                    </a:p>
+                  </a:txBody>
+                  <a:tcPr>
+                    <a:solidFill>
+                      <a:srgbClr val="FFFFFF"/>
+                    </a:solidFill>
+                  </a:tcPr>
+                </a:tc>
+              </a:tr>
+              <a:tr h="440574">
+                <a:tc>
+                  <a:txBody>
+                    <a:bodyPr lIns="73152" rIns="73152" tIns="36576" bIns="36576"/>
+                    <a:lstStyle/>
+                    <a:p>
+                      <a:pPr algn="l"/>
+                      <a:r>
+                        <a:rPr sz="1200">
+                          <a:solidFill>
+                            <a:srgbClr val="1F2A3D"/>
+                          </a:solidFill>
+                          <a:latin typeface="Calibri"/>
+                        </a:rPr>
+                        <a:t>File uploads</a:t>
+                      </a:r>
+                    </a:p>
+                  </a:txBody>
+                  <a:tcPr>
+                    <a:solidFill>
+                      <a:srgbClr val="F3F4F6"/>
+                    </a:solidFill>
+                  </a:tcPr>
+                </a:tc>
+                <a:tc>
+                  <a:txBody>
+                    <a:bodyPr lIns="73152" rIns="73152" tIns="36576" bIns="36576"/>
+                    <a:lstStyle/>
+                    <a:p>
+                      <a:pPr algn="l"/>
+                      <a:r>
+                        <a:rPr sz="1200">
+                          <a:solidFill>
+                            <a:srgbClr val="1F2A3D"/>
+                          </a:solidFill>
+                          <a:latin typeface="Calibri"/>
+                        </a:rPr>
+                        <a:t>Mime + size validation; served from /Src under XAMPP</a:t>
+                      </a:r>
+                    </a:p>
+                  </a:txBody>
+                  <a:tcPr>
+                    <a:solidFill>
+                      <a:srgbClr val="F3F4F6"/>
+                    </a:solidFill>
+                  </a:tcPr>
+                </a:tc>
+              </a:tr>
+              <a:tr h="440574">
+                <a:tc>
+                  <a:txBody>
+                    <a:bodyPr lIns="73152" rIns="73152" tIns="36576" bIns="36576"/>
+                    <a:lstStyle/>
+                    <a:p>
+                      <a:pPr algn="l"/>
+                      <a:r>
+                        <a:rPr sz="1200">
+                          <a:solidFill>
+                            <a:srgbClr val="1F2A3D"/>
+                          </a:solidFill>
+                          <a:latin typeface="Calibri"/>
+                        </a:rPr>
+                        <a:t>Audit trail</a:t>
+                      </a:r>
+                    </a:p>
+                  </a:txBody>
+                  <a:tcPr>
+                    <a:solidFill>
+                      <a:srgbClr val="FFFFFF"/>
+                    </a:solidFill>
+                  </a:tcPr>
+                </a:tc>
+                <a:tc>
+                  <a:txBody>
+                    <a:bodyPr lIns="73152" rIns="73152" tIns="36576" bIns="36576"/>
+                    <a:lstStyle/>
+                    <a:p>
+                      <a:pPr algn="l"/>
+                      <a:r>
+                        <a:rPr sz="1200">
+                          <a:solidFill>
+                            <a:srgbClr val="1F2A3D"/>
+                          </a:solidFill>
+                          <a:latin typeface="Calibri"/>
+                        </a:rPr>
+                        <a:t>Sensitive ops (verification, suspension) logged server-side</a:t>
+                      </a:r>
+                    </a:p>
+                  </a:txBody>
+                  <a:tcPr>
+                    <a:solidFill>
+                      <a:srgbClr val="FFFFFF"/>
+                    </a:solidFill>
+                  </a:tcPr>
+                </a:tc>
+              </a:tr>
+              <a:tr h="440580">
+                <a:tc>
+                  <a:txBody>
+                    <a:bodyPr lIns="73152" rIns="73152" tIns="36576" bIns="36576"/>
+                    <a:lstStyle/>
+                    <a:p>
+                      <a:pPr algn="l"/>
+                      <a:r>
+                        <a:rPr sz="1200">
+                          <a:solidFill>
+                            <a:srgbClr val="1F2A3D"/>
+                          </a:solidFill>
+                          <a:latin typeface="Calibri"/>
+                        </a:rPr>
+                        <a:t>Rate limiting</a:t>
+                      </a:r>
+                    </a:p>
+                  </a:txBody>
+                  <a:tcPr>
+                    <a:solidFill>
+                      <a:srgbClr val="F3F4F6"/>
+                    </a:solidFill>
+                  </a:tcPr>
+                </a:tc>
+                <a:tc>
+                  <a:txBody>
+                    <a:bodyPr lIns="73152" rIns="73152" tIns="36576" bIns="36576"/>
+                    <a:lstStyle/>
+                    <a:p>
+                      <a:pPr algn="l"/>
+                      <a:r>
+                        <a:rPr sz="1200">
+                          <a:solidFill>
+                            <a:srgbClr val="1F2A3D"/>
+                          </a:solidFill>
+                          <a:latin typeface="Calibri"/>
+                        </a:rPr>
+                        <a:t>OTP send has a 30s per-account cooldown</a:t>
+                      </a:r>
+                    </a:p>
+                  </a:txBody>
+                  <a:tcPr>
+                    <a:solidFill>
+                      <a:srgbClr val="F3F4F6"/>
+                    </a:solidFill>
+                  </a:tcPr>
+                </a:tc>
+              </a:tr>
+            </a:tbl>
+          </a:graphicData>
+        </a:graphic>
+      </p:graphicFrame>
+      <p:sp>
+        <p:nvSpPr>
+          <p:cNvPr id="8" name="Rectangle 7"/>
+          <p:cNvSpPr/>
+          <p:nvPr/>
+        </p:nvSpPr>
+        <p:spPr>
+          <a:xfrm>
+            <a:off x="0" y="6537960"/>
+            <a:ext cx="12191695" cy="320040"/>
+          </a:xfrm>
+          <a:prstGeom prst="rect">
+            <a:avLst/>
+          </a:prstGeom>
+          <a:solidFill>
+            <a:srgbClr val="0A1628"/>
+          </a:solidFill>
+          <a:ln>
+            <a:noFill/>
+          </a:ln>
+          <a:effectLst/>
+        </p:spPr>
+        <p:style>
+          <a:lnRef idx="1">
+            <a:schemeClr val="accent1"/>
+          </a:lnRef>
+          <a:fillRef idx="3">
+            <a:schemeClr val="accent1"/>
+          </a:fillRef>
+          <a:effectRef idx="2">
+            <a:schemeClr val="accent1"/>
+          </a:effectRef>
+          <a:fontRef idx="minor">
+            <a:schemeClr val="lt1"/>
+          </a:fontRef>
+        </p:style>
+        <p:txBody>
+          <a:bodyPr rtlCol="0" anchor="ctr"/>
+          <a:lstStyle/>
+          <a:p>
+            <a:pPr algn="ctr"/>
+          </a:p>
+        </p:txBody>
+      </p:sp>
+      <p:sp>
+        <p:nvSpPr>
+          <p:cNvPr id="9" name="TextBox 8"/>
+          <p:cNvSpPr txBox="1"/>
+          <p:nvPr/>
+        </p:nvSpPr>
+        <p:spPr>
+          <a:xfrm>
+            <a:off x="457200" y="6583680"/>
+            <a:ext cx="7315200" cy="274320"/>
+          </a:xfrm>
+          <a:prstGeom prst="rect">
+            <a:avLst/>
+          </a:prstGeom>
+          <a:noFill/>
+        </p:spPr>
+        <p:txBody>
+          <a:bodyPr wrap="square" anchor="ctr" lIns="45720" rIns="45720" tIns="18288" bIns="18288">
+            <a:spAutoFit/>
+          </a:bodyPr>
+          <a:lstStyle/>
+          <a:p>
+            <a:pPr algn="l"/>
+            <a:r>
+              <a:rPr sz="1000" b="0">
+                <a:solidFill>
+                  <a:srgbClr val="FFFFFF"/>
+                </a:solidFill>
+                <a:latin typeface="Calibri"/>
+              </a:rPr>
+              <a:t>ForsaDrive  •  Final Year Project Defense  •  ATOMIC IT</a:t>
+            </a:r>
+          </a:p>
+        </p:txBody>
+      </p:sp>
+      <p:sp>
+        <p:nvSpPr>
+          <p:cNvPr id="10" name="TextBox 9"/>
+          <p:cNvSpPr txBox="1"/>
+          <p:nvPr/>
+        </p:nvSpPr>
+        <p:spPr>
+          <a:xfrm>
+            <a:off x="10515600" y="6583680"/>
+            <a:ext cx="1371600" cy="274320"/>
+          </a:xfrm>
+          <a:prstGeom prst="rect">
+            <a:avLst/>
+          </a:prstGeom>
+          <a:noFill/>
+        </p:spPr>
+        <p:txBody>
+          <a:bodyPr wrap="square" anchor="ctr" lIns="45720" rIns="45720" tIns="18288" bIns="18288">
+            <a:spAutoFit/>
+          </a:bodyPr>
+          <a:lstStyle/>
+          <a:p>
+            <a:pPr algn="r"/>
+            <a:r>
+              <a:rPr sz="1000" b="1">
+                <a:solidFill>
+                  <a:srgbClr val="E8B84B"/>
+                </a:solidFill>
+                <a:latin typeface="Calibri"/>
+              </a:rPr>
+              <a:t>H / 21</a:t>
             </a:r>
           </a:p>
         </p:txBody>
